--- a/docs/reports/2026-07-07.pptx
+++ b/docs/reports/2026-07-07.pptx
@@ -13,10 +13,9 @@
     <p:sldId id="261" r:id="rId7"/>
     <p:sldId id="262" r:id="rId8"/>
     <p:sldId id="263" r:id="rId9"/>
-    <p:sldId id="264" r:id="rId10"/>
   </p:sldIdLst>
   <p:notesMasterIdLst>
-    <p:notesMasterId r:id="rId11"/>
+    <p:notesMasterId r:id="rId10"/>
   </p:notesMasterIdLst>
   <p:sldSz cx="12192000" cy="6858000"/>
   <p:notesSz cx="6858000" cy="12192000"/>
@@ -1150,94 +1149,6 @@
             <a:fld id="{F7021451-1387-4CA6-816F-3879F97B5CBC}" type="slidenum">
               <a:rPr lang="en-US"/>
               <a:t>8</a:t>
-            </a:fld>
-            <a:endParaRPr lang="en-US"/>
-          </a:p>
-        </p:txBody>
-      </p:sp>
-    </p:spTree>
-    <p:extLst>
-      <p:ext uri="{BB962C8B-B14F-4D97-AF65-F5344CB8AC3E}">
-        <p14:creationId xmlns:p14="http://schemas.microsoft.com/office/powerpoint/2010/main" val="1024086991"/>
-      </p:ext>
-    </p:extLst>
-  </p:cSld>
-  <p:clrMapOvr>
-    <a:masterClrMapping/>
-  </p:clrMapOvr>
-</p:notes>
-</file>
-
-<file path=ppt/notesSlides/notesSlide9.xml><?xml version="1.0" encoding="utf-8"?>
-<p:notes xmlns:a="http://schemas.openxmlformats.org/drawingml/2006/main" xmlns:r="http://schemas.openxmlformats.org/officeDocument/2006/relationships" xmlns:p="http://schemas.openxmlformats.org/presentationml/2006/main">
-  <p:cSld>
-    <p:spTree>
-      <p:nvGrpSpPr>
-        <p:cNvPr id="1" name=""/>
-        <p:cNvGrpSpPr/>
-        <p:nvPr/>
-      </p:nvGrpSpPr>
-      <p:grpSpPr>
-        <a:xfrm>
-          <a:off x="0" y="0"/>
-          <a:ext cx="0" cy="0"/>
-          <a:chOff x="0" y="0"/>
-          <a:chExt cx="0" cy="0"/>
-        </a:xfrm>
-      </p:grpSpPr>
-      <p:sp>
-        <p:nvSpPr>
-          <p:cNvPr id="2" name="Slide Image Placeholder 1"/>
-          <p:cNvSpPr>
-            <a:spLocks noGrp="1" noRot="1" noChangeAspect="1"/>
-          </p:cNvSpPr>
-          <p:nvPr>
-            <p:ph type="sldImg"/>
-          </p:nvPr>
-        </p:nvSpPr>
-        <p:spPr/>
-      </p:sp>
-      <p:sp>
-        <p:nvSpPr>
-          <p:cNvPr id="3" name="Notes Placeholder 2"/>
-          <p:cNvSpPr>
-            <a:spLocks noGrp="1"/>
-          </p:cNvSpPr>
-          <p:nvPr>
-            <p:ph type="body" idx="1"/>
-          </p:nvPr>
-        </p:nvSpPr>
-        <p:spPr/>
-        <p:txBody>
-          <a:bodyPr/>
-          <a:lstStyle/>
-          <a:p>
-            <a:r>
-              <a:rPr lang="en-US" dirty="0"/>
-              <a:t/>
-            </a:r>
-            <a:endParaRPr lang="en-US" dirty="0"/>
-          </a:p>
-        </p:txBody>
-      </p:sp>
-      <p:sp>
-        <p:nvSpPr>
-          <p:cNvPr id="4" name="Slide Number Placeholder 3"/>
-          <p:cNvSpPr>
-            <a:spLocks noGrp="1"/>
-          </p:cNvSpPr>
-          <p:nvPr>
-            <p:ph type="sldNum" sz="quarter" idx="10"/>
-          </p:nvPr>
-        </p:nvSpPr>
-        <p:spPr/>
-        <p:txBody>
-          <a:bodyPr/>
-          <a:lstStyle/>
-          <a:p>
-            <a:fld id="{F7021451-1387-4CA6-816F-3879F97B5CBC}" type="slidenum">
-              <a:rPr lang="en-US"/>
-              <a:t>9</a:t>
             </a:fld>
             <a:endParaRPr lang="en-US"/>
           </a:p>
@@ -1982,7 +1893,7 @@
                 <a:ea typeface="Microsoft YaHei" pitchFamily="34" charset="-122"/>
                 <a:cs typeface="Microsoft YaHei" pitchFamily="34" charset="-120"/>
               </a:rPr>
-              <a:t>今日磷酸铁锂行业呈现“扩产与叫停并存、技术加速迭代、价格承压但挺价意愿强”的格局。多氟多发布同体积容量创纪录的大圆柱磷酸铁锂换电方案，技术突破显著；贵州毕节百万吨级项目一期即将投产，但川发龙蟒10万吨项目被叫停，显示行业投资分化。碳酸锂期货国际化落地，为价格发现提供新工具。工信部推动动力电池拆解安全国标及固态电池材料攻关，政策与合规风险上升。企业挺价意愿强烈，但二线企业仍普遍亏损。</a:t>
+              <a:t>今日磷酸铁锂行业呈现“扩产分化、技术升级、政策趋严”三大特征。多氟多发布同体积容量破纪录的大圆柱换电方案，技术路线向高能量密度演进；贵州毕节百万吨级项目一期8月投产，但川发龙蟒10万吨项目被叫停，产能扩张出现分化。碳酸锂期货引入境外交易者，价格波动风险增加。工信部加大固态电池材料攻关，并发布动力电池拆解安全国标征求意见，合规门槛提升。欧盟黑粉出口禁令倒计时，全球回收贸易格局面临重塑。</a:t>
             </a:r>
             <a:endParaRPr lang="en-US" sz="1400" dirty="0"/>
           </a:p>
@@ -2720,7 +2631,7 @@
                 <a:ea typeface="Microsoft YaHei" pitchFamily="34" charset="-122"/>
                 <a:cs typeface="Microsoft YaHei" pitchFamily="34" charset="-120"/>
               </a:rPr>
-              <a:t>今日磷酸铁锂行业呈现“扩产与叫停并存、技术加速迭代、价格承压但挺价意愿强”的格局。多氟多发布同体积容量创纪录的大圆柱磷酸铁锂换电方案，技术突破</a:t>
+              <a:t>今日磷酸铁锂行业呈现“扩产分化、技术升级、政策趋严”三大特征。多氟多发布同体积容量破纪录的大圆柱换电方案，技术路线向高能量密度演进；贵州毕节百</a:t>
             </a:r>
             <a:endParaRPr lang="en-US" sz="1020" dirty="0"/>
           </a:p>
@@ -3073,7 +2984,7 @@
                 <a:ea typeface="Microsoft YaHei" pitchFamily="34" charset="-122"/>
                 <a:cs typeface="Microsoft YaHei" pitchFamily="34" charset="-120"/>
               </a:rPr>
-              <a:t>今日磷酸铁锂行业呈现“扩产与叫停并存、技术加速迭代、价格承压但挺价意愿强”的格局。多氟多发布同体积容量创纪录的大圆柱磷酸铁锂换电方案，技术突破显著；贵州毕节百万吨级项目一期即将投产，但川发龙蟒10万吨项目被叫停，显示行业投资分化。碳酸锂期货国际化落地，为价格发现提供新工具。工信部推动动力电池拆解安全国标及固态电池材料攻关，政策与合规风险上升。企业挺价意愿强烈，但二线企业仍普遍亏损。</a:t>
+              <a:t>今日磷酸铁锂行业呈现“扩产分化、技术升级、政策趋严”三大特征。多氟多发布同体积容量破纪录的大圆柱换电方案，技术路线向高能量密度演进；贵州毕节百万吨级项目一期8月投产，但川发龙蟒10万吨项目被叫停，产能扩张出现分化。碳酸锂期货引入境外交易者，价格波动风险增加。工信部加大固态电池材料攻关，并发布动力电池拆解安全国标征求意见，合规门槛提升。欧盟黑粉出口禁令倒计时，全球回收贸易格局面临重塑。</a:t>
             </a:r>
             <a:endParaRPr lang="en-US" sz="1500" dirty="0"/>
           </a:p>
@@ -3244,7 +3155,7 @@
                 <a:ea typeface="Microsoft YaHei" pitchFamily="34" charset="-122"/>
                 <a:cs typeface="Microsoft YaHei" pitchFamily="34" charset="-120"/>
               </a:rPr>
-              <a:t>今日磷酸铁锂行业核心动态：多氟多发布同体积容量创纪录的大圆柱磷酸铁锂换电方案，技术突破引领换电市场；贵州毕节百万吨级项目一期即将投产，但川发龙蟒10万吨项目被叫停，显示行业投资分化加剧。碳酸锂期货国际化落地，为价格发现提供新工具，但企业挺价意愿强烈，二线企业仍普遍亏损。工信部推动动力电池拆解安全国标及固态电池材料攻关，政策与合规风险上升。 [1][2][3][4]</a:t>
+              <a:t>行业进入分化期：头部企业如多氟多、协鑫锂电通过技术迭代（大圆柱、高压实）巩固优势，而部分项目（川发龙蟒10万吨）因市场压力被叫停。碳酸锂期货国际化加剧价格波动，企业需强化风险管理。政策端，工信部推动固态电池材料攻关和电池拆解安全标准，欧盟黑粉出口禁令将重塑回收格局。建议关注技术领先和全球化布局的企业，警惕产能过剩和合规风险。 [1][2][3][4][5][6]</a:t>
             </a:r>
             <a:endParaRPr lang="en-US" sz="1050" dirty="0"/>
           </a:p>
@@ -3440,7 +3351,7 @@
                 <a:ea typeface="Microsoft YaHei" pitchFamily="34" charset="-122"/>
                 <a:cs typeface="Microsoft YaHei" pitchFamily="34" charset="-120"/>
               </a:rPr>
-              <a:t>多氟多发布两款大圆柱磷酸铁锂换电模组，实现同体积容量行业纪录突破，并通过通用化设计打通产业落地。协鑫锂电第五代高压实磷酸铁锂C18发布，采用一步物理干法技术，获“技术卓越奖”。磷酸锰铁锂（LMFP）技术专利分析显示其能量密度较LFP提升15%以上，成为重要技术方向。工信部明确加大固态电池正负极材料、固态电解质攻关，推动下一代技术发展。 [1][5][6][7]</a:t>
+              <a:t>技术路线向高能量密度和快充演进。多氟多发布大圆柱磷酸铁锂换电方案，实现同体积容量行业纪录突破，并采用通用化设计。协鑫锂电推出第五代高压实磷酸铁锂C18，主打高压实技术。工信部明确加大固态电池正负极材料、固态电解质攻关，推动下一代技术。磷酸锰铁锂（LMFP）因能量密度提升15%-20%成为热点，中应集团10万吨项目签约辽宁。 [1][7][4][8][9]</a:t>
             </a:r>
             <a:endParaRPr lang="en-US" sz="1050" dirty="0"/>
           </a:p>
@@ -3636,7 +3547,7 @@
                 <a:ea typeface="Microsoft YaHei" pitchFamily="34" charset="-122"/>
                 <a:cs typeface="Microsoft YaHei" pitchFamily="34" charset="-120"/>
               </a:rPr>
-              <a:t>产能扩张与叫停并存：贵州毕节百万吨级磷酸铁锂项目一期或8月投产，总投资73.23亿元；山西5万吨高压实磷酸铁锂项目开工；辽宁签约10万吨磷酸锰铁锂项目。但川发龙蟒终止10万吨磷酸铁锂项目，显示行业投资分化。金川瑞翔拟募资37.8亿元加码50万吨磷酸铁锂产能，创业板IPO获受理。蜂巢能源1-5月动力电池装车量增速达35.3%，蝉联全球第九。 [8][9][3][10][11]</a:t>
+              <a:t>产能扩张出现分化。贵州毕节百万吨级磷酸铁锂项目一期预计8月投产，总投资73.23亿元；金川瑞翔拟募资37.8亿元加码50万吨产能，创业板IPO获受理。但川发龙蟒终止10万吨项目，显示部分企业因市场压力收缩。海外布局加速，厦钨新能拟在马来西亚建1万吨正极材料项目；美国首个车企全资磷酸铁锂电池工厂投产。 [10][11][2][12][13]</a:t>
             </a:r>
             <a:endParaRPr lang="en-US" sz="1050" dirty="0"/>
           </a:p>
@@ -3832,7 +3743,7 @@
                 <a:ea typeface="Microsoft YaHei" pitchFamily="34" charset="-122"/>
                 <a:cs typeface="Microsoft YaHei" pitchFamily="34" charset="-120"/>
               </a:rPr>
-              <a:t>磷酸铁锂企业挺价意愿强烈，头部企业满产，但二线企业仍普遍亏损。机构预测2026年供需紧平衡加剧，产业链价格有回升空间。瑞银大幅上调锂价预测，预计2026年碳酸锂价格达26,000美元/吨。广期所碳酸锂期货国际化落地，境外交易者可参与，有助于价格发现。永太科技锂电主业盈利大幅改善，半年报最高预增1245%，显示部分环节盈利修复。 [4][12][2][13]</a:t>
+              <a:t>碳酸锂期货国际化（7月3日起引入境外交易者）将加剧价格波动，企业需加强风险管理。机构预测2026年供需紧平衡，产业链价格有回升空间，但二线企业仍普遍亏损。磷酸铁锂企业集体挺价，头部满产但行业整体盈利承压。瑞银大幅上调锂价预测，预计2026年碳酸锂达2.6万美元/吨。 [3][14][15]</a:t>
             </a:r>
             <a:endParaRPr lang="en-US" sz="1050" dirty="0"/>
           </a:p>
@@ -3962,7 +3873,7 @@
                 <a:ea typeface="Microsoft YaHei" pitchFamily="34" charset="-122"/>
                 <a:cs typeface="Microsoft YaHei" pitchFamily="34" charset="-120"/>
               </a:rPr>
-              <a:t>今日磷酸铁锂行业呈现“扩产与叫停并存、技术加速迭代、价格承压但挺价意愿强”的格局。多氟多发布同体积容量创纪录的大圆柱磷酸铁锂换电方案，技术突破</a:t>
+              <a:t>今日磷酸铁锂行业呈现“扩产分化、技术升级、政策趋严”三大特征。多氟多发布同体积容量破纪录的大圆柱换电方案，技术路线向高能量密度演进；贵州毕节百</a:t>
             </a:r>
             <a:endParaRPr lang="en-US" sz="1020" dirty="0"/>
           </a:p>
@@ -4383,7 +4294,7 @@
                 <a:ea typeface="Microsoft YaHei" pitchFamily="34" charset="-122"/>
                 <a:cs typeface="Microsoft YaHei" pitchFamily="34" charset="-120"/>
               </a:rPr>
-              <a:t>今日磷酸铁锂行业核心动态：多氟多发布同体积容量创纪录的大圆柱磷酸铁锂换电方案，技术突破引领换电市场；贵州毕节百万吨级项目一期即将投产，但川发龙蟒10万吨项目被叫停，显示行业投资分化加剧。碳酸锂期货国际化落地，为价格发现提供新工具，但企业挺价意愿强烈，二线企业仍普遍亏损。工信部推动动力电池拆解安全国标及固态电池材料攻关，政策与合规风险上升。</a:t>
+              <a:t>行业进入分化期：头部企业如多氟多、协鑫锂电通过技术迭代（大圆柱、高压实）巩固优势，而部分项目（川发龙蟒10万吨）因市场压力被叫停。碳酸锂期货国际化加剧价格波动，企业需强化风险管理。政策端，工信部推动固态电池材料攻关和电池拆解安全标准，欧盟黑粉出口禁令将重塑回收格局。建议关注技术领先和全球化布局的企业，警惕产能过剩和合规风险。</a:t>
             </a:r>
             <a:endParaRPr lang="en-US" sz="980" dirty="0"/>
           </a:p>
@@ -4422,7 +4333,7 @@
                 <a:ea typeface="Aptos" pitchFamily="34" charset="-122"/>
                 <a:cs typeface="Aptos" pitchFamily="34" charset="-120"/>
               </a:rPr>
-              <a:t>依据：[1][2][3][4]</a:t>
+              <a:t>依据：[1][2][3][4][5][6]</a:t>
             </a:r>
             <a:endParaRPr lang="en-US" sz="740" dirty="0"/>
           </a:p>
@@ -4531,7 +4442,7 @@
                 <a:ea typeface="Microsoft YaHei" pitchFamily="34" charset="-122"/>
                 <a:cs typeface="Microsoft YaHei" pitchFamily="34" charset="-120"/>
               </a:rPr>
-              <a:t>[1][2][3][4] 推测：未使用推测</a:t>
+              <a:t>[1][2][3][4][5][6] 推测：未使用推测</a:t>
             </a:r>
             <a:endParaRPr lang="en-US" sz="980" dirty="0"/>
           </a:p>
@@ -4570,7 +4481,7 @@
                 <a:ea typeface="Aptos" pitchFamily="34" charset="-122"/>
                 <a:cs typeface="Aptos" pitchFamily="34" charset="-120"/>
               </a:rPr>
-              <a:t>依据：[1][2][3][4]</a:t>
+              <a:t>依据：[1][2][3][4][5][6]</a:t>
             </a:r>
             <a:endParaRPr lang="en-US" sz="740" dirty="0"/>
           </a:p>
@@ -4679,7 +4590,7 @@
                 <a:ea typeface="Microsoft YaHei" pitchFamily="34" charset="-122"/>
                 <a:cs typeface="Microsoft YaHei" pitchFamily="34" charset="-120"/>
               </a:rPr>
-              <a:t>多氟多发布两款大圆柱磷酸铁锂换电模组，实现同体积容量行业纪录突破，并通过通用化设计打通产业落地。协鑫锂电第五代高压实磷酸铁锂C18发布，采用一步物理干法技术，获“技术卓越奖”。磷酸锰铁锂（LMFP）技术专利分析显示其能量密度较LFP提升15%以上，成为重要技术方向。工信部明确加大固态电池正负极材料、固态电解质攻关，推动下一代技术发展。</a:t>
+              <a:t>技术路线向高能量密度和快充演进。多氟多发布大圆柱磷酸铁锂换电方案，实现同体积容量行业纪录突破，并采用通用化设计。协鑫锂电推出第五代高压实磷酸铁锂C18，主打高压实技术。工信部明确加大固态电池正负极材料、固态电解质攻关，推动下一代技术。磷酸锰铁锂（LMFP）因能量密度提升15%-20%成为热点，中应集团10万吨项目签约辽宁。</a:t>
             </a:r>
             <a:endParaRPr lang="en-US" sz="980" dirty="0"/>
           </a:p>
@@ -4718,7 +4629,7 @@
                 <a:ea typeface="Aptos" pitchFamily="34" charset="-122"/>
                 <a:cs typeface="Aptos" pitchFamily="34" charset="-120"/>
               </a:rPr>
-              <a:t>依据：[1][5][6][7]</a:t>
+              <a:t>依据：[1][7][4][8][9]</a:t>
             </a:r>
             <a:endParaRPr lang="en-US" sz="740" dirty="0"/>
           </a:p>
@@ -5244,7 +5155,7 @@
                 <a:ea typeface="Microsoft YaHei" pitchFamily="34" charset="-122"/>
                 <a:cs typeface="Microsoft YaHei" pitchFamily="34" charset="-120"/>
               </a:rPr>
-              <a:t>[1][5][6][7] 推测：未使用推测</a:t>
+              <a:t>[1][7][4][8][9] 推测：未使用推测</a:t>
             </a:r>
             <a:endParaRPr lang="en-US" sz="980" dirty="0"/>
           </a:p>
@@ -5283,7 +5194,7 @@
                 <a:ea typeface="Aptos" pitchFamily="34" charset="-122"/>
                 <a:cs typeface="Aptos" pitchFamily="34" charset="-120"/>
               </a:rPr>
-              <a:t>依据：[1][5][6][7]</a:t>
+              <a:t>依据：[1][7][4][8][9]</a:t>
             </a:r>
             <a:endParaRPr lang="en-US" sz="740" dirty="0"/>
           </a:p>
@@ -5351,7 +5262,7 @@
                 <a:ea typeface="Microsoft YaHei" pitchFamily="34" charset="-122"/>
                 <a:cs typeface="Microsoft YaHei" pitchFamily="34" charset="-120"/>
               </a:rPr>
-              <a:t>产能/客户/订单 1/2</a:t>
+              <a:t>产能/客户/订单</a:t>
             </a:r>
             <a:endParaRPr lang="en-US" sz="1250" dirty="0"/>
           </a:p>
@@ -5392,7 +5303,7 @@
                 <a:ea typeface="Microsoft YaHei" pitchFamily="34" charset="-122"/>
                 <a:cs typeface="Microsoft YaHei" pitchFamily="34" charset="-120"/>
               </a:rPr>
-              <a:t>产能扩张与叫停并存：贵州毕节百万吨级磷酸铁锂项目一期或8月投产，总投资73.23亿元；山西5万吨高压实磷酸铁锂项目开工；辽宁签约10万吨磷酸锰铁锂项目。但川发龙蟒终止10万吨磷酸铁锂项目，显示行业投资分化。金川瑞翔拟募资37.8亿元加码50万吨磷酸铁锂产能，创业板IPO获受理。蜂巢能源1-5月动力电池装车量增速达35.3%，蝉联全球第九。</a:t>
+              <a:t>产能扩张出现分化。贵州毕节百万吨级磷酸铁锂项目一期预计8月投产，总投资73.23亿元；金川瑞翔拟募资37.8亿元加码50万吨产能，创业板IPO获受理。但川发龙蟒终止10万吨项目，显示部分企业因市场压力收缩。海外布局加速，厦钨新能拟在马来西亚建1万吨正极材料项目；美国首个车企全资磷酸铁锂电池工厂投产。 [10][11][2][12][13] 推测：未使用推测</a:t>
             </a:r>
             <a:endParaRPr lang="en-US" sz="980" dirty="0"/>
           </a:p>
@@ -5431,7 +5342,7 @@
                 <a:ea typeface="Aptos" pitchFamily="34" charset="-122"/>
                 <a:cs typeface="Aptos" pitchFamily="34" charset="-120"/>
               </a:rPr>
-              <a:t>依据：[8][9][3][10][11]</a:t>
+              <a:t>依据：[10][11][2][12][13]</a:t>
             </a:r>
             <a:endParaRPr lang="en-US" sz="740" dirty="0"/>
           </a:p>
@@ -5499,7 +5410,7 @@
                 <a:ea typeface="Microsoft YaHei" pitchFamily="34" charset="-122"/>
                 <a:cs typeface="Microsoft YaHei" pitchFamily="34" charset="-120"/>
               </a:rPr>
-              <a:t>产能/客户/订单 2/2</a:t>
+              <a:t>价格/盈利压力</a:t>
             </a:r>
             <a:endParaRPr lang="en-US" sz="1250" dirty="0"/>
           </a:p>
@@ -5540,7 +5451,7 @@
                 <a:ea typeface="Microsoft YaHei" pitchFamily="34" charset="-122"/>
                 <a:cs typeface="Microsoft YaHei" pitchFamily="34" charset="-120"/>
               </a:rPr>
-              <a:t>[8][9][3][10][11] 推测：未使用推测</a:t>
+              <a:t>碳酸锂期货国际化（7月3日起引入境外交易者）将加剧价格波动，企业需加强风险管理。机构预测2026年供需紧平衡，产业链价格有回升空间，但二线企业仍普遍亏损。磷酸铁锂企业集体挺价，头部满产但行业整体盈利承压。瑞银大幅上调锂价预测，预计2026年碳酸锂达2.6万美元/吨。 [3][14][15] 推测：未使用推测</a:t>
             </a:r>
             <a:endParaRPr lang="en-US" sz="980" dirty="0"/>
           </a:p>
@@ -5579,7 +5490,7 @@
                 <a:ea typeface="Aptos" pitchFamily="34" charset="-122"/>
                 <a:cs typeface="Aptos" pitchFamily="34" charset="-120"/>
               </a:rPr>
-              <a:t>依据：[8][9][3][10][11]</a:t>
+              <a:t>依据：[3][14][15]</a:t>
             </a:r>
             <a:endParaRPr lang="en-US" sz="740" dirty="0"/>
           </a:p>
@@ -6064,7 +5975,7 @@
                 <a:ea typeface="Microsoft YaHei" pitchFamily="34" charset="-122"/>
                 <a:cs typeface="Microsoft YaHei" pitchFamily="34" charset="-120"/>
               </a:rPr>
-              <a:t>价格/盈利压力 1/2</a:t>
+              <a:t>政策/合规风险</a:t>
             </a:r>
             <a:endParaRPr lang="en-US" sz="1250" dirty="0"/>
           </a:p>
@@ -6105,7 +6016,7 @@
                 <a:ea typeface="Microsoft YaHei" pitchFamily="34" charset="-122"/>
                 <a:cs typeface="Microsoft YaHei" pitchFamily="34" charset="-120"/>
               </a:rPr>
-              <a:t>磷酸铁锂企业挺价意愿强烈，头部企业满产，但二线企业仍普遍亏损。机构预测2026年供需紧平衡加剧，产业链价格有回升空间。瑞银大幅上调锂价预测，预计2026年碳酸锂价格达26,000美元/吨。广期所碳酸锂期货国际化落地，境外交易者可参与，有助于价格发现。永太科技锂电主业盈利大幅改善，半年报最高预增1245%，显示部分环节盈利修复。</a:t>
+              <a:t>政策趋严。工信部发布《车用动力电池拆解破碎安全要求》国标征求意见，提升回收合规门槛。七部门联合启动报废机动车非法回收拆解专项整治，动力电池流向监管升级。欧盟黑粉出口禁令将于2026年11月9日生效，全球锂电回收贸易格局面临重塑。国内2026年设备更新补贴已下达，2027年电池回收补贴备战开始。 [5][16][6][17] 推测：未使用推测</a:t>
             </a:r>
             <a:endParaRPr lang="en-US" sz="980" dirty="0"/>
           </a:p>
@@ -6144,7 +6055,7 @@
                 <a:ea typeface="Aptos" pitchFamily="34" charset="-122"/>
                 <a:cs typeface="Aptos" pitchFamily="34" charset="-120"/>
               </a:rPr>
-              <a:t>依据：[4][12][2][13]</a:t>
+              <a:t>依据：[5][16][6][17]</a:t>
             </a:r>
             <a:endParaRPr lang="en-US" sz="740" dirty="0"/>
           </a:p>
@@ -6212,7 +6123,7 @@
                 <a:ea typeface="Microsoft YaHei" pitchFamily="34" charset="-122"/>
                 <a:cs typeface="Microsoft YaHei" pitchFamily="34" charset="-120"/>
               </a:rPr>
-              <a:t>价格/盈利压力 2/2</a:t>
+              <a:t>竞品观察 1/2</a:t>
             </a:r>
             <a:endParaRPr lang="en-US" sz="1250" dirty="0"/>
           </a:p>
@@ -6253,7 +6164,7 @@
                 <a:ea typeface="Microsoft YaHei" pitchFamily="34" charset="-122"/>
                 <a:cs typeface="Microsoft YaHei" pitchFamily="34" charset="-120"/>
               </a:rPr>
-              <a:t>[4][12][2][13] 推测：未使用推测</a:t>
+              <a:t>头部企业加速技术迭代和全球化。宁德时代与福特技术授权模式推进美国工厂；赣锋锂电入选BNEF全球一级储能厂商，推出15000次循环电芯；协鑫锂电以“一步物理干法”获技术卓越奖，C18五代高压实产品亮相；当升科技荣登《财富》中国科技50强；万润新能获供应链卓越贡献奖。钠电方面，超威钠电安庆项目投产，NFPP正极技术获关注。</a:t>
             </a:r>
             <a:endParaRPr lang="en-US" sz="980" dirty="0"/>
           </a:p>
@@ -6292,7 +6203,7 @@
                 <a:ea typeface="Aptos" pitchFamily="34" charset="-122"/>
                 <a:cs typeface="Aptos" pitchFamily="34" charset="-120"/>
               </a:rPr>
-              <a:t>依据：[4][12][2][13]</a:t>
+              <a:t>依据：[13][18][19][20][21][22]</a:t>
             </a:r>
             <a:endParaRPr lang="en-US" sz="740" dirty="0"/>
           </a:p>
@@ -6360,7 +6271,7 @@
                 <a:ea typeface="Microsoft YaHei" pitchFamily="34" charset="-122"/>
                 <a:cs typeface="Microsoft YaHei" pitchFamily="34" charset="-120"/>
               </a:rPr>
-              <a:t>政策/合规风险</a:t>
+              <a:t>竞品观察 2/2</a:t>
             </a:r>
             <a:endParaRPr lang="en-US" sz="1250" dirty="0"/>
           </a:p>
@@ -6401,7 +6312,7 @@
                 <a:ea typeface="Microsoft YaHei" pitchFamily="34" charset="-122"/>
                 <a:cs typeface="Microsoft YaHei" pitchFamily="34" charset="-120"/>
               </a:rPr>
-              <a:t>工信部公开征求《车用动力电池拆解破碎安全要求》等两项强制性国家标准意见，动力电池回收合规要求升级。七部门联合启动报废机动车非法回收拆解专项整治，动力电池流向监管再升级。欧盟黑粉出口禁令将于2026年11月9日生效，全球锂电回收贸易格局面临重写。工信部加大固态电池材料攻关，可能影响现有磷酸铁锂技术路线预期。 [14][15][16][7] 推测：未使用推测</a:t>
+              <a:t>[13][18][19][20][21][22] 推测：未使用推测</a:t>
             </a:r>
             <a:endParaRPr lang="en-US" sz="980" dirty="0"/>
           </a:p>
@@ -6440,7 +6351,7 @@
                 <a:ea typeface="Aptos" pitchFamily="34" charset="-122"/>
                 <a:cs typeface="Aptos" pitchFamily="34" charset="-120"/>
               </a:rPr>
-              <a:t>依据：[14][15][16][7]</a:t>
+              <a:t>依据：[13][18][19][20][21][22]</a:t>
             </a:r>
             <a:endParaRPr lang="en-US" sz="740" dirty="0"/>
           </a:p>
@@ -6925,7 +6836,7 @@
                 <a:ea typeface="Microsoft YaHei" pitchFamily="34" charset="-122"/>
                 <a:cs typeface="Microsoft YaHei" pitchFamily="34" charset="-120"/>
               </a:rPr>
-              <a:t>竞品观察 1/2</a:t>
+              <a:t>风险/机会/观察 1/2</a:t>
             </a:r>
             <a:endParaRPr lang="en-US" sz="1250" dirty="0"/>
           </a:p>
@@ -6966,7 +6877,7 @@
                 <a:ea typeface="Microsoft YaHei" pitchFamily="34" charset="-122"/>
                 <a:cs typeface="Microsoft YaHei" pitchFamily="34" charset="-120"/>
               </a:rPr>
-              <a:t>协鑫锂电以一步物理干法技术挑战传统工艺，第五代高压实LFP C18发布，入选四川先进级智能工厂。当升科技荣登2026年《财富》中国科技50强，聚焦锰铁锂布局。万润新能获供应链卓越贡献奖，发布ESG报告。富临精工持续加码前驱体项目，草酸亚铁工艺具技术优势。钠电正极材料NFPP技术突破，璞钠能源获年度创新技术，可能分流部分磷酸铁锂市场。</a:t>
+              <a:t>风险：产能过剩导致项目叫停（如川发龙蟒）；碳酸锂价格波动加剧；欧盟黑粉出口禁令影响回收企业出海；二线企业持续亏损。机会：高压实、大圆柱等技术升级带来差异化竞争；储能需求爆发（欧盟22国承诺增30-35GW）；电池回收合规化利好龙头；固态电池等下一代技术布局。观察：贵州百万吨级项目投产进度；LMFP产业化放量节奏；海外政策变化。</a:t>
             </a:r>
             <a:endParaRPr lang="en-US" sz="980" dirty="0"/>
           </a:p>
@@ -7005,7 +6916,7 @@
                 <a:ea typeface="Aptos" pitchFamily="34" charset="-122"/>
                 <a:cs typeface="Aptos" pitchFamily="34" charset="-120"/>
               </a:rPr>
-              <a:t>依据：[5][17][18][19][20]</a:t>
+              <a:t>依据：[2][23][6][24]</a:t>
             </a:r>
             <a:endParaRPr lang="en-US" sz="740" dirty="0"/>
           </a:p>
@@ -7073,7 +6984,7 @@
                 <a:ea typeface="Microsoft YaHei" pitchFamily="34" charset="-122"/>
                 <a:cs typeface="Microsoft YaHei" pitchFamily="34" charset="-120"/>
               </a:rPr>
-              <a:t>竞品观察 2/2</a:t>
+              <a:t>风险/机会/观察 2/2</a:t>
             </a:r>
             <a:endParaRPr lang="en-US" sz="1250" dirty="0"/>
           </a:p>
@@ -7114,7 +7025,7 @@
                 <a:ea typeface="Microsoft YaHei" pitchFamily="34" charset="-122"/>
                 <a:cs typeface="Microsoft YaHei" pitchFamily="34" charset="-120"/>
               </a:rPr>
-              <a:t>[5][17][18][19][20] 推测：未使用推测</a:t>
+              <a:t>[2][23][6][24] 推测：未使用推测</a:t>
             </a:r>
             <a:endParaRPr lang="en-US" sz="980" dirty="0"/>
           </a:p>
@@ -7153,7 +7064,7 @@
                 <a:ea typeface="Aptos" pitchFamily="34" charset="-122"/>
                 <a:cs typeface="Aptos" pitchFamily="34" charset="-120"/>
               </a:rPr>
-              <a:t>依据：[5][17][18][19][20]</a:t>
+              <a:t>依据：[2][23][6][24]</a:t>
             </a:r>
             <a:endParaRPr lang="en-US" sz="740" dirty="0"/>
           </a:p>
@@ -7162,154 +7073,6 @@
       <p:sp>
         <p:nvSpPr>
           <p:cNvPr id="18" name="Shape 16"/>
-          <p:cNvSpPr/>
-          <p:nvPr/>
-        </p:nvSpPr>
-        <p:spPr>
-          <a:xfrm>
-            <a:off x="658368" y="4407408"/>
-            <a:ext cx="10881360" cy="1225296"/>
-          </a:xfrm>
-          <a:prstGeom prst="roundRect">
-            <a:avLst>
-              <a:gd name="adj" fmla="val 5970"/>
-            </a:avLst>
-          </a:prstGeom>
-          <a:solidFill>
-            <a:srgbClr val="F4FAF6"/>
-          </a:solidFill>
-          <a:ln w="10160">
-            <a:solidFill>
-              <a:srgbClr val="DADADA"/>
-            </a:solidFill>
-            <a:prstDash val="solid"/>
-          </a:ln>
-        </p:spPr>
-      </p:sp>
-      <p:sp>
-        <p:nvSpPr>
-          <p:cNvPr id="19" name="Text 17"/>
-          <p:cNvSpPr/>
-          <p:nvPr/>
-        </p:nvSpPr>
-        <p:spPr>
-          <a:xfrm>
-            <a:off x="932688" y="4572000"/>
-            <a:ext cx="1920240" cy="256032"/>
-          </a:xfrm>
-          <a:prstGeom prst="rect">
-            <a:avLst/>
-          </a:prstGeom>
-          <a:noFill/>
-          <a:ln/>
-        </p:spPr>
-        <p:txBody>
-          <a:bodyPr wrap="square" lIns="0" tIns="0" rIns="0" bIns="0" rtlCol="0" anchor="ctr">
-            <a:normAutofit/>
-          </a:bodyPr>
-          <a:lstStyle/>
-          <a:p>
-            <a:pPr indent="0" marL="0">
-              <a:buNone/>
-            </a:pPr>
-            <a:r>
-              <a:rPr lang="en-US" sz="1250" b="1" dirty="0">
-                <a:solidFill>
-                  <a:srgbClr val="487052"/>
-                </a:solidFill>
-                <a:latin typeface="Microsoft YaHei" pitchFamily="34" charset="0"/>
-                <a:ea typeface="Microsoft YaHei" pitchFamily="34" charset="-122"/>
-                <a:cs typeface="Microsoft YaHei" pitchFamily="34" charset="-120"/>
-              </a:rPr>
-              <a:t>风险/机会/观察 1/2</a:t>
-            </a:r>
-            <a:endParaRPr lang="en-US" sz="1250" dirty="0"/>
-          </a:p>
-        </p:txBody>
-      </p:sp>
-      <p:sp>
-        <p:nvSpPr>
-          <p:cNvPr id="20" name="Text 18"/>
-          <p:cNvSpPr/>
-          <p:nvPr/>
-        </p:nvSpPr>
-        <p:spPr>
-          <a:xfrm>
-            <a:off x="2788920" y="4572000"/>
-            <a:ext cx="8321040" cy="713232"/>
-          </a:xfrm>
-          <a:prstGeom prst="rect">
-            <a:avLst/>
-          </a:prstGeom>
-          <a:noFill/>
-          <a:ln/>
-        </p:spPr>
-        <p:txBody>
-          <a:bodyPr wrap="square" lIns="0" tIns="0" rIns="0" bIns="0" rtlCol="0" anchor="ctr">
-            <a:normAutofit/>
-          </a:bodyPr>
-          <a:lstStyle/>
-          <a:p>
-            <a:pPr indent="0" marL="0">
-              <a:buNone/>
-            </a:pPr>
-            <a:r>
-              <a:rPr lang="en-US" sz="980" dirty="0">
-                <a:solidFill>
-                  <a:srgbClr val="121212"/>
-                </a:solidFill>
-                <a:latin typeface="Microsoft YaHei" pitchFamily="34" charset="0"/>
-                <a:ea typeface="Microsoft YaHei" pitchFamily="34" charset="-122"/>
-                <a:cs typeface="Microsoft YaHei" pitchFamily="34" charset="-120"/>
-              </a:rPr>
-              <a:t>风险：产能过剩风险加剧，川发龙蟒项目叫停预示行业洗牌；二线企业持续亏损，价格战可能延续；欧盟黑粉出口禁令影响回收产业链。机会：碳酸锂期货国际化提升价格发现效率；储能需求增长，欧盟22国承诺储能装机增加30-35GW；磷酸锰铁锂、固态电池等新技术带来差异化机会。观察：贵州毕节百万吨级项目投产进度及市场消化能力；企业挺价联盟的可持续性。</a:t>
-            </a:r>
-            <a:endParaRPr lang="en-US" sz="980" dirty="0"/>
-          </a:p>
-        </p:txBody>
-      </p:sp>
-      <p:sp>
-        <p:nvSpPr>
-          <p:cNvPr id="21" name="Text 19"/>
-          <p:cNvSpPr/>
-          <p:nvPr/>
-        </p:nvSpPr>
-        <p:spPr>
-          <a:xfrm>
-            <a:off x="2788920" y="5358384"/>
-            <a:ext cx="3474720" cy="146304"/>
-          </a:xfrm>
-          <a:prstGeom prst="rect">
-            <a:avLst/>
-          </a:prstGeom>
-          <a:noFill/>
-          <a:ln/>
-        </p:spPr>
-        <p:txBody>
-          <a:bodyPr wrap="square" lIns="0" tIns="0" rIns="0" bIns="0" rtlCol="0" anchor="ctr"/>
-          <a:lstStyle/>
-          <a:p>
-            <a:pPr indent="0" marL="0">
-              <a:buNone/>
-            </a:pPr>
-            <a:r>
-              <a:rPr lang="en-US" sz="740" dirty="0">
-                <a:solidFill>
-                  <a:srgbClr val="487052"/>
-                </a:solidFill>
-                <a:latin typeface="Aptos" pitchFamily="34" charset="0"/>
-                <a:ea typeface="Aptos" pitchFamily="34" charset="-122"/>
-                <a:cs typeface="Aptos" pitchFamily="34" charset="-120"/>
-              </a:rPr>
-              <a:t>依据：[3][4][2][21][16]</a:t>
-            </a:r>
-            <a:endParaRPr lang="en-US" sz="740" dirty="0"/>
-          </a:p>
-        </p:txBody>
-      </p:sp>
-      <p:sp>
-        <p:nvSpPr>
-          <p:cNvPr id="22" name="Shape 20"/>
           <p:cNvSpPr/>
           <p:nvPr/>
         </p:nvSpPr>
@@ -7334,7 +7097,7 @@
       </p:sp>
       <p:sp>
         <p:nvSpPr>
-          <p:cNvPr id="23" name="Text 21"/>
+          <p:cNvPr id="19" name="Text 17"/>
           <p:cNvSpPr/>
           <p:nvPr/>
         </p:nvSpPr>
@@ -7373,7 +7136,7 @@
       </p:sp>
       <p:sp>
         <p:nvSpPr>
-          <p:cNvPr id="24" name="Text 22"/>
+          <p:cNvPr id="20" name="Text 18"/>
           <p:cNvSpPr/>
           <p:nvPr/>
         </p:nvSpPr>
@@ -7516,7 +7279,7 @@
                 <a:ea typeface="Aptos" pitchFamily="34" charset="-122"/>
                 <a:cs typeface="Aptos" pitchFamily="34" charset="-120"/>
               </a:rPr>
-              <a:t>DYNAMIC SIGNALS</a:t>
+              <a:t>SOURCE INDEX</a:t>
             </a:r>
             <a:endParaRPr lang="en-US" sz="850" dirty="0"/>
           </a:p>
@@ -7694,7 +7457,7 @@
         <p:spPr>
           <a:xfrm>
             <a:off x="1143000" y="932688"/>
-            <a:ext cx="2560320" cy="384048"/>
+            <a:ext cx="4114800" cy="384048"/>
           </a:xfrm>
           <a:prstGeom prst="rect">
             <a:avLst/>
@@ -7718,7 +7481,7 @@
                 <a:ea typeface="Microsoft YaHei" pitchFamily="34" charset="-122"/>
                 <a:cs typeface="Microsoft YaHei" pitchFamily="34" charset="-120"/>
               </a:rPr>
-              <a:t>重点板块</a:t>
+              <a:t>来源索引与可追溯性</a:t>
             </a:r>
             <a:endParaRPr lang="en-US" sz="2000" dirty="0"/>
           </a:p>
@@ -7732,18 +7495,16 @@
         </p:nvSpPr>
         <p:spPr>
           <a:xfrm>
-            <a:off x="658368" y="1371600"/>
-            <a:ext cx="10881360" cy="1225296"/>
-          </a:xfrm>
-          <a:prstGeom prst="roundRect">
-            <a:avLst>
-              <a:gd name="adj" fmla="val 5970"/>
-            </a:avLst>
+            <a:off x="658368" y="1444752"/>
+            <a:ext cx="566928" cy="310896"/>
+          </a:xfrm>
+          <a:prstGeom prst="rect">
+            <a:avLst/>
           </a:prstGeom>
           <a:solidFill>
-            <a:srgbClr val="F4FAF6"/>
+            <a:srgbClr val="121212"/>
           </a:solidFill>
-          <a:ln w="10160">
+          <a:ln w="6350">
             <a:solidFill>
               <a:srgbClr val="DADADA"/>
             </a:solidFill>
@@ -7759,8 +7520,303 @@
         </p:nvSpPr>
         <p:spPr>
           <a:xfrm>
-            <a:off x="932688" y="1536192"/>
-            <a:ext cx="1920240" cy="256032"/>
+            <a:off x="731520" y="1536192"/>
+            <a:ext cx="420624" cy="128016"/>
+          </a:xfrm>
+          <a:prstGeom prst="rect">
+            <a:avLst/>
+          </a:prstGeom>
+          <a:noFill/>
+          <a:ln/>
+        </p:spPr>
+        <p:txBody>
+          <a:bodyPr wrap="square" lIns="0" tIns="0" rIns="0" bIns="0" rtlCol="0" anchor="ctr"/>
+          <a:lstStyle/>
+          <a:p>
+            <a:pPr indent="0" marL="0">
+              <a:buNone/>
+            </a:pPr>
+            <a:r>
+              <a:rPr lang="en-US" sz="780" b="1" dirty="0">
+                <a:solidFill>
+                  <a:srgbClr val="FFFFFF"/>
+                </a:solidFill>
+                <a:latin typeface="Microsoft YaHei" pitchFamily="34" charset="0"/>
+                <a:ea typeface="Microsoft YaHei" pitchFamily="34" charset="-122"/>
+                <a:cs typeface="Microsoft YaHei" pitchFamily="34" charset="-120"/>
+              </a:rPr>
+              <a:t>编号</a:t>
+            </a:r>
+            <a:endParaRPr lang="en-US" sz="780" dirty="0"/>
+          </a:p>
+        </p:txBody>
+      </p:sp>
+      <p:sp>
+        <p:nvSpPr>
+          <p:cNvPr id="12" name="Shape 10"/>
+          <p:cNvSpPr/>
+          <p:nvPr/>
+        </p:nvSpPr>
+        <p:spPr>
+          <a:xfrm>
+            <a:off x="1225296" y="1444752"/>
+            <a:ext cx="1234440" cy="310896"/>
+          </a:xfrm>
+          <a:prstGeom prst="rect">
+            <a:avLst/>
+          </a:prstGeom>
+          <a:solidFill>
+            <a:srgbClr val="DDEBE0"/>
+          </a:solidFill>
+          <a:ln w="6350">
+            <a:solidFill>
+              <a:srgbClr val="DADADA"/>
+            </a:solidFill>
+            <a:prstDash val="solid"/>
+          </a:ln>
+        </p:spPr>
+      </p:sp>
+      <p:sp>
+        <p:nvSpPr>
+          <p:cNvPr id="13" name="Text 11"/>
+          <p:cNvSpPr/>
+          <p:nvPr/>
+        </p:nvSpPr>
+        <p:spPr>
+          <a:xfrm>
+            <a:off x="1298448" y="1536192"/>
+            <a:ext cx="1088136" cy="128016"/>
+          </a:xfrm>
+          <a:prstGeom prst="rect">
+            <a:avLst/>
+          </a:prstGeom>
+          <a:noFill/>
+          <a:ln/>
+        </p:spPr>
+        <p:txBody>
+          <a:bodyPr wrap="square" lIns="0" tIns="0" rIns="0" bIns="0" rtlCol="0" anchor="ctr"/>
+          <a:lstStyle/>
+          <a:p>
+            <a:pPr indent="0" marL="0">
+              <a:buNone/>
+            </a:pPr>
+            <a:r>
+              <a:rPr lang="en-US" sz="780" b="1" dirty="0">
+                <a:solidFill>
+                  <a:srgbClr val="121212"/>
+                </a:solidFill>
+                <a:latin typeface="Microsoft YaHei" pitchFamily="34" charset="0"/>
+                <a:ea typeface="Microsoft YaHei" pitchFamily="34" charset="-122"/>
+                <a:cs typeface="Microsoft YaHei" pitchFamily="34" charset="-120"/>
+              </a:rPr>
+              <a:t>来源</a:t>
+            </a:r>
+            <a:endParaRPr lang="en-US" sz="780" dirty="0"/>
+          </a:p>
+        </p:txBody>
+      </p:sp>
+      <p:sp>
+        <p:nvSpPr>
+          <p:cNvPr id="14" name="Shape 12"/>
+          <p:cNvSpPr/>
+          <p:nvPr/>
+        </p:nvSpPr>
+        <p:spPr>
+          <a:xfrm>
+            <a:off x="2459736" y="1444752"/>
+            <a:ext cx="3977640" cy="310896"/>
+          </a:xfrm>
+          <a:prstGeom prst="rect">
+            <a:avLst/>
+          </a:prstGeom>
+          <a:solidFill>
+            <a:srgbClr val="DDEBE0"/>
+          </a:solidFill>
+          <a:ln w="6350">
+            <a:solidFill>
+              <a:srgbClr val="DADADA"/>
+            </a:solidFill>
+            <a:prstDash val="solid"/>
+          </a:ln>
+        </p:spPr>
+      </p:sp>
+      <p:sp>
+        <p:nvSpPr>
+          <p:cNvPr id="15" name="Text 13"/>
+          <p:cNvSpPr/>
+          <p:nvPr/>
+        </p:nvSpPr>
+        <p:spPr>
+          <a:xfrm>
+            <a:off x="2532888" y="1536192"/>
+            <a:ext cx="3831336" cy="128016"/>
+          </a:xfrm>
+          <a:prstGeom prst="rect">
+            <a:avLst/>
+          </a:prstGeom>
+          <a:noFill/>
+          <a:ln/>
+        </p:spPr>
+        <p:txBody>
+          <a:bodyPr wrap="square" lIns="0" tIns="0" rIns="0" bIns="0" rtlCol="0" anchor="ctr"/>
+          <a:lstStyle/>
+          <a:p>
+            <a:pPr indent="0" marL="0">
+              <a:buNone/>
+            </a:pPr>
+            <a:r>
+              <a:rPr lang="en-US" sz="780" b="1" dirty="0">
+                <a:solidFill>
+                  <a:srgbClr val="121212"/>
+                </a:solidFill>
+                <a:latin typeface="Microsoft YaHei" pitchFamily="34" charset="0"/>
+                <a:ea typeface="Microsoft YaHei" pitchFamily="34" charset="-122"/>
+                <a:cs typeface="Microsoft YaHei" pitchFamily="34" charset="-120"/>
+              </a:rPr>
+              <a:t>标题</a:t>
+            </a:r>
+            <a:endParaRPr lang="en-US" sz="780" dirty="0"/>
+          </a:p>
+        </p:txBody>
+      </p:sp>
+      <p:sp>
+        <p:nvSpPr>
+          <p:cNvPr id="16" name="Shape 14"/>
+          <p:cNvSpPr/>
+          <p:nvPr/>
+        </p:nvSpPr>
+        <p:spPr>
+          <a:xfrm>
+            <a:off x="6437376" y="1444752"/>
+            <a:ext cx="4645152" cy="310896"/>
+          </a:xfrm>
+          <a:prstGeom prst="rect">
+            <a:avLst/>
+          </a:prstGeom>
+          <a:solidFill>
+            <a:srgbClr val="DDEBE0"/>
+          </a:solidFill>
+          <a:ln w="6350">
+            <a:solidFill>
+              <a:srgbClr val="DADADA"/>
+            </a:solidFill>
+            <a:prstDash val="solid"/>
+          </a:ln>
+        </p:spPr>
+      </p:sp>
+      <p:sp>
+        <p:nvSpPr>
+          <p:cNvPr id="17" name="Text 15"/>
+          <p:cNvSpPr/>
+          <p:nvPr/>
+        </p:nvSpPr>
+        <p:spPr>
+          <a:xfrm>
+            <a:off x="6510528" y="1536192"/>
+            <a:ext cx="4498848" cy="128016"/>
+          </a:xfrm>
+          <a:prstGeom prst="rect">
+            <a:avLst/>
+          </a:prstGeom>
+          <a:noFill/>
+          <a:ln/>
+        </p:spPr>
+        <p:txBody>
+          <a:bodyPr wrap="square" lIns="0" tIns="0" rIns="0" bIns="0" rtlCol="0" anchor="ctr"/>
+          <a:lstStyle/>
+          <a:p>
+            <a:pPr indent="0" marL="0">
+              <a:buNone/>
+            </a:pPr>
+            <a:r>
+              <a:rPr lang="en-US" sz="780" b="1" dirty="0">
+                <a:solidFill>
+                  <a:srgbClr val="121212"/>
+                </a:solidFill>
+                <a:latin typeface="Microsoft YaHei" pitchFamily="34" charset="0"/>
+                <a:ea typeface="Microsoft YaHei" pitchFamily="34" charset="-122"/>
+                <a:cs typeface="Microsoft YaHei" pitchFamily="34" charset="-120"/>
+              </a:rPr>
+              <a:t>链接</a:t>
+            </a:r>
+            <a:endParaRPr lang="en-US" sz="780" dirty="0"/>
+          </a:p>
+        </p:txBody>
+      </p:sp>
+      <p:sp>
+        <p:nvSpPr>
+          <p:cNvPr id="18" name="Shape 16"/>
+          <p:cNvSpPr/>
+          <p:nvPr/>
+        </p:nvSpPr>
+        <p:spPr>
+          <a:xfrm>
+            <a:off x="658368" y="1755648"/>
+            <a:ext cx="10424160" cy="274320"/>
+          </a:xfrm>
+          <a:prstGeom prst="rect">
+            <a:avLst/>
+          </a:prstGeom>
+          <a:solidFill>
+            <a:srgbClr val="F4FAF6"/>
+          </a:solidFill>
+          <a:ln w="5080">
+            <a:solidFill>
+              <a:srgbClr val="DADADA"/>
+            </a:solidFill>
+            <a:prstDash val="solid"/>
+          </a:ln>
+        </p:spPr>
+      </p:sp>
+      <p:sp>
+        <p:nvSpPr>
+          <p:cNvPr id="19" name="Text 17"/>
+          <p:cNvSpPr/>
+          <p:nvPr/>
+        </p:nvSpPr>
+        <p:spPr>
+          <a:xfrm>
+            <a:off x="749808" y="1828800"/>
+            <a:ext cx="411480" cy="109728"/>
+          </a:xfrm>
+          <a:prstGeom prst="rect">
+            <a:avLst/>
+          </a:prstGeom>
+          <a:noFill/>
+          <a:ln/>
+        </p:spPr>
+        <p:txBody>
+          <a:bodyPr wrap="square" lIns="0" tIns="0" rIns="0" bIns="0" rtlCol="0" anchor="ctr"/>
+          <a:lstStyle/>
+          <a:p>
+            <a:pPr indent="0" marL="0">
+              <a:buNone/>
+            </a:pPr>
+            <a:r>
+              <a:rPr lang="en-US" sz="680" b="1" dirty="0">
+                <a:solidFill>
+                  <a:srgbClr val="487052"/>
+                </a:solidFill>
+                <a:latin typeface="Aptos" pitchFamily="34" charset="0"/>
+                <a:ea typeface="Aptos" pitchFamily="34" charset="-122"/>
+                <a:cs typeface="Aptos" pitchFamily="34" charset="-120"/>
+              </a:rPr>
+              <a:t>[1]</a:t>
+            </a:r>
+            <a:endParaRPr lang="en-US" sz="680" dirty="0"/>
+          </a:p>
+        </p:txBody>
+      </p:sp>
+      <p:sp>
+        <p:nvSpPr>
+          <p:cNvPr id="20" name="Text 18"/>
+          <p:cNvSpPr/>
+          <p:nvPr/>
+        </p:nvSpPr>
+        <p:spPr>
+          <a:xfrm>
+            <a:off x="1261872" y="1828800"/>
+            <a:ext cx="1051560" cy="109728"/>
           </a:xfrm>
           <a:prstGeom prst="rect">
             <a:avLst/>
@@ -7778,30 +7834,30 @@
               <a:buNone/>
             </a:pPr>
             <a:r>
-              <a:rPr lang="en-US" sz="1250" b="1" dirty="0">
-                <a:solidFill>
-                  <a:srgbClr val="487052"/>
+              <a:rPr lang="en-US" sz="680" dirty="0">
+                <a:solidFill>
+                  <a:srgbClr val="121212"/>
                 </a:solidFill>
                 <a:latin typeface="Microsoft YaHei" pitchFamily="34" charset="0"/>
                 <a:ea typeface="Microsoft YaHei" pitchFamily="34" charset="-122"/>
                 <a:cs typeface="Microsoft YaHei" pitchFamily="34" charset="-120"/>
               </a:rPr>
-              <a:t>风险/机会/观察 2/2</a:t>
-            </a:r>
-            <a:endParaRPr lang="en-US" sz="1250" dirty="0"/>
-          </a:p>
-        </p:txBody>
-      </p:sp>
-      <p:sp>
-        <p:nvSpPr>
-          <p:cNvPr id="12" name="Text 10"/>
-          <p:cNvSpPr/>
-          <p:nvPr/>
-        </p:nvSpPr>
-        <p:spPr>
-          <a:xfrm>
-            <a:off x="2788920" y="1536192"/>
-            <a:ext cx="8321040" cy="713232"/>
+              <a:t>中国电池网</a:t>
+            </a:r>
+            <a:endParaRPr lang="en-US" sz="680" dirty="0"/>
+          </a:p>
+        </p:txBody>
+      </p:sp>
+      <p:sp>
+        <p:nvSpPr>
+          <p:cNvPr id="21" name="Text 19"/>
+          <p:cNvSpPr/>
+          <p:nvPr/>
+        </p:nvSpPr>
+        <p:spPr>
+          <a:xfrm>
+            <a:off x="2487168" y="1828800"/>
+            <a:ext cx="3749040" cy="109728"/>
           </a:xfrm>
           <a:prstGeom prst="rect">
             <a:avLst/>
@@ -7819,7 +7875,7 @@
               <a:buNone/>
             </a:pPr>
             <a:r>
-              <a:rPr lang="en-US" sz="980" dirty="0">
+              <a:rPr lang="en-US" sz="680" b="1" dirty="0">
                 <a:solidFill>
                   <a:srgbClr val="121212"/>
                 </a:solidFill>
@@ -7827,54 +7883,2113 @@
                 <a:ea typeface="Microsoft YaHei" pitchFamily="34" charset="-122"/>
                 <a:cs typeface="Microsoft YaHei" pitchFamily="34" charset="-120"/>
               </a:rPr>
-              <a:t>[3][4][2][21][16] 推测：未使用推测</a:t>
-            </a:r>
-            <a:endParaRPr lang="en-US" sz="980" dirty="0"/>
-          </a:p>
-        </p:txBody>
-      </p:sp>
-      <p:sp>
-        <p:nvSpPr>
-          <p:cNvPr id="13" name="Text 11"/>
-          <p:cNvSpPr/>
-          <p:nvPr/>
-        </p:nvSpPr>
-        <p:spPr>
-          <a:xfrm>
-            <a:off x="2788920" y="2322576"/>
-            <a:ext cx="3474720" cy="146304"/>
-          </a:xfrm>
-          <a:prstGeom prst="rect">
-            <a:avLst/>
-          </a:prstGeom>
-          <a:noFill/>
-          <a:ln/>
-        </p:spPr>
-        <p:txBody>
-          <a:bodyPr wrap="square" lIns="0" tIns="0" rIns="0" bIns="0" rtlCol="0" anchor="ctr"/>
-          <a:lstStyle/>
-          <a:p>
-            <a:pPr indent="0" marL="0">
-              <a:buNone/>
-            </a:pPr>
-            <a:r>
-              <a:rPr lang="en-US" sz="740" dirty="0">
-                <a:solidFill>
-                  <a:srgbClr val="487052"/>
+              <a:t>同体积容量击穿行业纪录！多氟多两款大圆柱磷酸铁锂换电方案发布_电池网</a:t>
+            </a:r>
+            <a:endParaRPr lang="en-US" sz="680" dirty="0"/>
+          </a:p>
+        </p:txBody>
+      </p:sp>
+      <p:sp>
+        <p:nvSpPr>
+          <p:cNvPr id="22" name="Text 20"/>
+          <p:cNvSpPr/>
+          <p:nvPr/>
+        </p:nvSpPr>
+        <p:spPr>
+          <a:xfrm>
+            <a:off x="6510528" y="1828800"/>
+            <a:ext cx="4343400" cy="109728"/>
+          </a:xfrm>
+          <a:prstGeom prst="rect">
+            <a:avLst/>
+          </a:prstGeom>
+          <a:noFill/>
+          <a:ln/>
+        </p:spPr>
+        <p:txBody>
+          <a:bodyPr wrap="square" lIns="0" tIns="0" rIns="0" bIns="0" rtlCol="0" anchor="ctr">
+            <a:normAutofit/>
+          </a:bodyPr>
+          <a:lstStyle/>
+          <a:p>
+            <a:pPr indent="0" marL="0">
+              <a:buNone/>
+            </a:pPr>
+            <a:r>
+              <a:rPr lang="en-US" sz="580" dirty="0">
+                <a:solidFill>
+                  <a:srgbClr val="6D756F"/>
                 </a:solidFill>
                 <a:latin typeface="Aptos" pitchFamily="34" charset="0"/>
                 <a:ea typeface="Aptos" pitchFamily="34" charset="-122"/>
                 <a:cs typeface="Aptos" pitchFamily="34" charset="-120"/>
               </a:rPr>
-              <a:t>依据：[3][4][2][21][16]</a:t>
-            </a:r>
-            <a:endParaRPr lang="en-US" sz="740" dirty="0"/>
-          </a:p>
-        </p:txBody>
-      </p:sp>
-      <p:sp>
-        <p:nvSpPr>
-          <p:cNvPr id="14" name="Shape 12"/>
+              <a:t>https://www.itdcw.com/news/chanpinxinwen/06251562M2026.html</a:t>
+            </a:r>
+            <a:endParaRPr lang="en-US" sz="580" dirty="0"/>
+          </a:p>
+        </p:txBody>
+      </p:sp>
+      <p:sp>
+        <p:nvSpPr>
+          <p:cNvPr id="23" name="Shape 21"/>
+          <p:cNvSpPr/>
+          <p:nvPr/>
+        </p:nvSpPr>
+        <p:spPr>
+          <a:xfrm>
+            <a:off x="658368" y="2066544"/>
+            <a:ext cx="10424160" cy="274320"/>
+          </a:xfrm>
+          <a:prstGeom prst="rect">
+            <a:avLst/>
+          </a:prstGeom>
+          <a:solidFill>
+            <a:srgbClr val="FFFFFF"/>
+          </a:solidFill>
+          <a:ln w="5080">
+            <a:solidFill>
+              <a:srgbClr val="DADADA"/>
+            </a:solidFill>
+            <a:prstDash val="solid"/>
+          </a:ln>
+        </p:spPr>
+      </p:sp>
+      <p:sp>
+        <p:nvSpPr>
+          <p:cNvPr id="24" name="Text 22"/>
+          <p:cNvSpPr/>
+          <p:nvPr/>
+        </p:nvSpPr>
+        <p:spPr>
+          <a:xfrm>
+            <a:off x="749808" y="2139696"/>
+            <a:ext cx="411480" cy="109728"/>
+          </a:xfrm>
+          <a:prstGeom prst="rect">
+            <a:avLst/>
+          </a:prstGeom>
+          <a:noFill/>
+          <a:ln/>
+        </p:spPr>
+        <p:txBody>
+          <a:bodyPr wrap="square" lIns="0" tIns="0" rIns="0" bIns="0" rtlCol="0" anchor="ctr"/>
+          <a:lstStyle/>
+          <a:p>
+            <a:pPr indent="0" marL="0">
+              <a:buNone/>
+            </a:pPr>
+            <a:r>
+              <a:rPr lang="en-US" sz="680" b="1" dirty="0">
+                <a:solidFill>
+                  <a:srgbClr val="487052"/>
+                </a:solidFill>
+                <a:latin typeface="Aptos" pitchFamily="34" charset="0"/>
+                <a:ea typeface="Aptos" pitchFamily="34" charset="-122"/>
+                <a:cs typeface="Aptos" pitchFamily="34" charset="-120"/>
+              </a:rPr>
+              <a:t>[2]</a:t>
+            </a:r>
+            <a:endParaRPr lang="en-US" sz="680" dirty="0"/>
+          </a:p>
+        </p:txBody>
+      </p:sp>
+      <p:sp>
+        <p:nvSpPr>
+          <p:cNvPr id="25" name="Text 23"/>
+          <p:cNvSpPr/>
+          <p:nvPr/>
+        </p:nvSpPr>
+        <p:spPr>
+          <a:xfrm>
+            <a:off x="1261872" y="2139696"/>
+            <a:ext cx="1051560" cy="109728"/>
+          </a:xfrm>
+          <a:prstGeom prst="rect">
+            <a:avLst/>
+          </a:prstGeom>
+          <a:noFill/>
+          <a:ln/>
+        </p:spPr>
+        <p:txBody>
+          <a:bodyPr wrap="square" lIns="0" tIns="0" rIns="0" bIns="0" rtlCol="0" anchor="ctr">
+            <a:normAutofit/>
+          </a:bodyPr>
+          <a:lstStyle/>
+          <a:p>
+            <a:pPr indent="0" marL="0">
+              <a:buNone/>
+            </a:pPr>
+            <a:r>
+              <a:rPr lang="en-US" sz="680" dirty="0">
+                <a:solidFill>
+                  <a:srgbClr val="121212"/>
+                </a:solidFill>
+                <a:latin typeface="Microsoft YaHei" pitchFamily="34" charset="0"/>
+                <a:ea typeface="Microsoft YaHei" pitchFamily="34" charset="-122"/>
+                <a:cs typeface="Microsoft YaHei" pitchFamily="34" charset="-120"/>
+              </a:rPr>
+              <a:t>公众号：动力电池ZM｜10</a:t>
+            </a:r>
+            <a:endParaRPr lang="en-US" sz="680" dirty="0"/>
+          </a:p>
+        </p:txBody>
+      </p:sp>
+      <p:sp>
+        <p:nvSpPr>
+          <p:cNvPr id="26" name="Text 24"/>
+          <p:cNvSpPr/>
+          <p:nvPr/>
+        </p:nvSpPr>
+        <p:spPr>
+          <a:xfrm>
+            <a:off x="2487168" y="2139696"/>
+            <a:ext cx="3749040" cy="109728"/>
+          </a:xfrm>
+          <a:prstGeom prst="rect">
+            <a:avLst/>
+          </a:prstGeom>
+          <a:noFill/>
+          <a:ln/>
+        </p:spPr>
+        <p:txBody>
+          <a:bodyPr wrap="square" lIns="0" tIns="0" rIns="0" bIns="0" rtlCol="0" anchor="ctr">
+            <a:normAutofit/>
+          </a:bodyPr>
+          <a:lstStyle/>
+          <a:p>
+            <a:pPr indent="0" marL="0">
+              <a:buNone/>
+            </a:pPr>
+            <a:r>
+              <a:rPr lang="en-US" sz="680" b="1" dirty="0">
+                <a:solidFill>
+                  <a:srgbClr val="121212"/>
+                </a:solidFill>
+                <a:latin typeface="Microsoft YaHei" pitchFamily="34" charset="0"/>
+                <a:ea typeface="Microsoft YaHei" pitchFamily="34" charset="-122"/>
+                <a:cs typeface="Microsoft YaHei" pitchFamily="34" charset="-120"/>
+              </a:rPr>
+              <a:t>公众号：动力电池ZM｜10万吨磷酸铁锂项目被叫停！</a:t>
+            </a:r>
+            <a:endParaRPr lang="en-US" sz="680" dirty="0"/>
+          </a:p>
+        </p:txBody>
+      </p:sp>
+      <p:sp>
+        <p:nvSpPr>
+          <p:cNvPr id="27" name="Text 25"/>
+          <p:cNvSpPr/>
+          <p:nvPr/>
+        </p:nvSpPr>
+        <p:spPr>
+          <a:xfrm>
+            <a:off x="6510528" y="2139696"/>
+            <a:ext cx="4343400" cy="109728"/>
+          </a:xfrm>
+          <a:prstGeom prst="rect">
+            <a:avLst/>
+          </a:prstGeom>
+          <a:noFill/>
+          <a:ln/>
+        </p:spPr>
+        <p:txBody>
+          <a:bodyPr wrap="square" lIns="0" tIns="0" rIns="0" bIns="0" rtlCol="0" anchor="ctr">
+            <a:normAutofit/>
+          </a:bodyPr>
+          <a:lstStyle/>
+          <a:p>
+            <a:pPr indent="0" marL="0">
+              <a:buNone/>
+            </a:pPr>
+            <a:r>
+              <a:rPr lang="en-US" sz="580" dirty="0">
+                <a:solidFill>
+                  <a:srgbClr val="6D756F"/>
+                </a:solidFill>
+                <a:latin typeface="Aptos" pitchFamily="34" charset="0"/>
+                <a:ea typeface="Aptos" pitchFamily="34" charset="-122"/>
+                <a:cs typeface="Aptos" pitchFamily="34" charset="-120"/>
+              </a:rPr>
+              <a:t>https://mp.weixin.qq.com/s/LnH18MJGr6OtkonOTxk4ig</a:t>
+            </a:r>
+            <a:endParaRPr lang="en-US" sz="580" dirty="0"/>
+          </a:p>
+        </p:txBody>
+      </p:sp>
+      <p:sp>
+        <p:nvSpPr>
+          <p:cNvPr id="28" name="Shape 26"/>
+          <p:cNvSpPr/>
+          <p:nvPr/>
+        </p:nvSpPr>
+        <p:spPr>
+          <a:xfrm>
+            <a:off x="658368" y="2377440"/>
+            <a:ext cx="10424160" cy="274320"/>
+          </a:xfrm>
+          <a:prstGeom prst="rect">
+            <a:avLst/>
+          </a:prstGeom>
+          <a:solidFill>
+            <a:srgbClr val="F4FAF6"/>
+          </a:solidFill>
+          <a:ln w="5080">
+            <a:solidFill>
+              <a:srgbClr val="DADADA"/>
+            </a:solidFill>
+            <a:prstDash val="solid"/>
+          </a:ln>
+        </p:spPr>
+      </p:sp>
+      <p:sp>
+        <p:nvSpPr>
+          <p:cNvPr id="29" name="Text 27"/>
+          <p:cNvSpPr/>
+          <p:nvPr/>
+        </p:nvSpPr>
+        <p:spPr>
+          <a:xfrm>
+            <a:off x="749808" y="2450592"/>
+            <a:ext cx="411480" cy="109728"/>
+          </a:xfrm>
+          <a:prstGeom prst="rect">
+            <a:avLst/>
+          </a:prstGeom>
+          <a:noFill/>
+          <a:ln/>
+        </p:spPr>
+        <p:txBody>
+          <a:bodyPr wrap="square" lIns="0" tIns="0" rIns="0" bIns="0" rtlCol="0" anchor="ctr"/>
+          <a:lstStyle/>
+          <a:p>
+            <a:pPr indent="0" marL="0">
+              <a:buNone/>
+            </a:pPr>
+            <a:r>
+              <a:rPr lang="en-US" sz="680" b="1" dirty="0">
+                <a:solidFill>
+                  <a:srgbClr val="487052"/>
+                </a:solidFill>
+                <a:latin typeface="Aptos" pitchFamily="34" charset="0"/>
+                <a:ea typeface="Aptos" pitchFamily="34" charset="-122"/>
+                <a:cs typeface="Aptos" pitchFamily="34" charset="-120"/>
+              </a:rPr>
+              <a:t>[3]</a:t>
+            </a:r>
+            <a:endParaRPr lang="en-US" sz="680" dirty="0"/>
+          </a:p>
+        </p:txBody>
+      </p:sp>
+      <p:sp>
+        <p:nvSpPr>
+          <p:cNvPr id="30" name="Text 28"/>
+          <p:cNvSpPr/>
+          <p:nvPr/>
+        </p:nvSpPr>
+        <p:spPr>
+          <a:xfrm>
+            <a:off x="1261872" y="2450592"/>
+            <a:ext cx="1051560" cy="109728"/>
+          </a:xfrm>
+          <a:prstGeom prst="rect">
+            <a:avLst/>
+          </a:prstGeom>
+          <a:noFill/>
+          <a:ln/>
+        </p:spPr>
+        <p:txBody>
+          <a:bodyPr wrap="square" lIns="0" tIns="0" rIns="0" bIns="0" rtlCol="0" anchor="ctr">
+            <a:normAutofit/>
+          </a:bodyPr>
+          <a:lstStyle/>
+          <a:p>
+            <a:pPr indent="0" marL="0">
+              <a:buNone/>
+            </a:pPr>
+            <a:r>
+              <a:rPr lang="en-US" sz="680" dirty="0">
+                <a:solidFill>
+                  <a:srgbClr val="121212"/>
+                </a:solidFill>
+                <a:latin typeface="Microsoft YaHei" pitchFamily="34" charset="0"/>
+                <a:ea typeface="Microsoft YaHei" pitchFamily="34" charset="-122"/>
+                <a:cs typeface="Microsoft YaHei" pitchFamily="34" charset="-120"/>
+              </a:rPr>
+              <a:t>中国电池网</a:t>
+            </a:r>
+            <a:endParaRPr lang="en-US" sz="680" dirty="0"/>
+          </a:p>
+        </p:txBody>
+      </p:sp>
+      <p:sp>
+        <p:nvSpPr>
+          <p:cNvPr id="31" name="Text 29"/>
+          <p:cNvSpPr/>
+          <p:nvPr/>
+        </p:nvSpPr>
+        <p:spPr>
+          <a:xfrm>
+            <a:off x="2487168" y="2450592"/>
+            <a:ext cx="3749040" cy="109728"/>
+          </a:xfrm>
+          <a:prstGeom prst="rect">
+            <a:avLst/>
+          </a:prstGeom>
+          <a:noFill/>
+          <a:ln/>
+        </p:spPr>
+        <p:txBody>
+          <a:bodyPr wrap="square" lIns="0" tIns="0" rIns="0" bIns="0" rtlCol="0" anchor="ctr">
+            <a:normAutofit/>
+          </a:bodyPr>
+          <a:lstStyle/>
+          <a:p>
+            <a:pPr indent="0" marL="0">
+              <a:buNone/>
+            </a:pPr>
+            <a:r>
+              <a:rPr lang="en-US" sz="680" b="1" dirty="0">
+                <a:solidFill>
+                  <a:srgbClr val="121212"/>
+                </a:solidFill>
+                <a:latin typeface="Microsoft YaHei" pitchFamily="34" charset="0"/>
+                <a:ea typeface="Microsoft YaHei" pitchFamily="34" charset="-122"/>
+                <a:cs typeface="Microsoft YaHei" pitchFamily="34" charset="-120"/>
+              </a:rPr>
+              <a:t>【正极材料周报】贵州毕节百万吨级磷酸铁锂项目刷新进展！宁德时代三元材料</a:t>
+            </a:r>
+            <a:endParaRPr lang="en-US" sz="680" dirty="0"/>
+          </a:p>
+        </p:txBody>
+      </p:sp>
+      <p:sp>
+        <p:nvSpPr>
+          <p:cNvPr id="32" name="Text 30"/>
+          <p:cNvSpPr/>
+          <p:nvPr/>
+        </p:nvSpPr>
+        <p:spPr>
+          <a:xfrm>
+            <a:off x="6510528" y="2450592"/>
+            <a:ext cx="4343400" cy="109728"/>
+          </a:xfrm>
+          <a:prstGeom prst="rect">
+            <a:avLst/>
+          </a:prstGeom>
+          <a:noFill/>
+          <a:ln/>
+        </p:spPr>
+        <p:txBody>
+          <a:bodyPr wrap="square" lIns="0" tIns="0" rIns="0" bIns="0" rtlCol="0" anchor="ctr">
+            <a:normAutofit/>
+          </a:bodyPr>
+          <a:lstStyle/>
+          <a:p>
+            <a:pPr indent="0" marL="0">
+              <a:buNone/>
+            </a:pPr>
+            <a:r>
+              <a:rPr lang="en-US" sz="580" dirty="0">
+                <a:solidFill>
+                  <a:srgbClr val="6D756F"/>
+                </a:solidFill>
+                <a:latin typeface="Aptos" pitchFamily="34" charset="0"/>
+                <a:ea typeface="Aptos" pitchFamily="34" charset="-122"/>
+                <a:cs typeface="Aptos" pitchFamily="34" charset="-120"/>
+              </a:rPr>
+              <a:t>https://www.itdcw.com/news/dczk/0F61564b2026.html</a:t>
+            </a:r>
+            <a:endParaRPr lang="en-US" sz="580" dirty="0"/>
+          </a:p>
+        </p:txBody>
+      </p:sp>
+      <p:sp>
+        <p:nvSpPr>
+          <p:cNvPr id="33" name="Shape 31"/>
+          <p:cNvSpPr/>
+          <p:nvPr/>
+        </p:nvSpPr>
+        <p:spPr>
+          <a:xfrm>
+            <a:off x="658368" y="2688336"/>
+            <a:ext cx="10424160" cy="274320"/>
+          </a:xfrm>
+          <a:prstGeom prst="rect">
+            <a:avLst/>
+          </a:prstGeom>
+          <a:solidFill>
+            <a:srgbClr val="FFFFFF"/>
+          </a:solidFill>
+          <a:ln w="5080">
+            <a:solidFill>
+              <a:srgbClr val="DADADA"/>
+            </a:solidFill>
+            <a:prstDash val="solid"/>
+          </a:ln>
+        </p:spPr>
+      </p:sp>
+      <p:sp>
+        <p:nvSpPr>
+          <p:cNvPr id="34" name="Text 32"/>
+          <p:cNvSpPr/>
+          <p:nvPr/>
+        </p:nvSpPr>
+        <p:spPr>
+          <a:xfrm>
+            <a:off x="749808" y="2761488"/>
+            <a:ext cx="411480" cy="109728"/>
+          </a:xfrm>
+          <a:prstGeom prst="rect">
+            <a:avLst/>
+          </a:prstGeom>
+          <a:noFill/>
+          <a:ln/>
+        </p:spPr>
+        <p:txBody>
+          <a:bodyPr wrap="square" lIns="0" tIns="0" rIns="0" bIns="0" rtlCol="0" anchor="ctr"/>
+          <a:lstStyle/>
+          <a:p>
+            <a:pPr indent="0" marL="0">
+              <a:buNone/>
+            </a:pPr>
+            <a:r>
+              <a:rPr lang="en-US" sz="680" b="1" dirty="0">
+                <a:solidFill>
+                  <a:srgbClr val="487052"/>
+                </a:solidFill>
+                <a:latin typeface="Aptos" pitchFamily="34" charset="0"/>
+                <a:ea typeface="Aptos" pitchFamily="34" charset="-122"/>
+                <a:cs typeface="Aptos" pitchFamily="34" charset="-120"/>
+              </a:rPr>
+              <a:t>[4]</a:t>
+            </a:r>
+            <a:endParaRPr lang="en-US" sz="680" dirty="0"/>
+          </a:p>
+        </p:txBody>
+      </p:sp>
+      <p:sp>
+        <p:nvSpPr>
+          <p:cNvPr id="35" name="Text 33"/>
+          <p:cNvSpPr/>
+          <p:nvPr/>
+        </p:nvSpPr>
+        <p:spPr>
+          <a:xfrm>
+            <a:off x="1261872" y="2761488"/>
+            <a:ext cx="1051560" cy="109728"/>
+          </a:xfrm>
+          <a:prstGeom prst="rect">
+            <a:avLst/>
+          </a:prstGeom>
+          <a:noFill/>
+          <a:ln/>
+        </p:spPr>
+        <p:txBody>
+          <a:bodyPr wrap="square" lIns="0" tIns="0" rIns="0" bIns="0" rtlCol="0" anchor="ctr">
+            <a:normAutofit/>
+          </a:bodyPr>
+          <a:lstStyle/>
+          <a:p>
+            <a:pPr indent="0" marL="0">
+              <a:buNone/>
+            </a:pPr>
+            <a:r>
+              <a:rPr lang="en-US" sz="680" dirty="0">
+                <a:solidFill>
+                  <a:srgbClr val="121212"/>
+                </a:solidFill>
+                <a:latin typeface="Microsoft YaHei" pitchFamily="34" charset="0"/>
+                <a:ea typeface="Microsoft YaHei" pitchFamily="34" charset="-122"/>
+                <a:cs typeface="Microsoft YaHei" pitchFamily="34" charset="-120"/>
+              </a:rPr>
+              <a:t>公众号：锂电Plus｜工信</a:t>
+            </a:r>
+            <a:endParaRPr lang="en-US" sz="680" dirty="0"/>
+          </a:p>
+        </p:txBody>
+      </p:sp>
+      <p:sp>
+        <p:nvSpPr>
+          <p:cNvPr id="36" name="Text 34"/>
+          <p:cNvSpPr/>
+          <p:nvPr/>
+        </p:nvSpPr>
+        <p:spPr>
+          <a:xfrm>
+            <a:off x="2487168" y="2761488"/>
+            <a:ext cx="3749040" cy="109728"/>
+          </a:xfrm>
+          <a:prstGeom prst="rect">
+            <a:avLst/>
+          </a:prstGeom>
+          <a:noFill/>
+          <a:ln/>
+        </p:spPr>
+        <p:txBody>
+          <a:bodyPr wrap="square" lIns="0" tIns="0" rIns="0" bIns="0" rtlCol="0" anchor="ctr">
+            <a:normAutofit/>
+          </a:bodyPr>
+          <a:lstStyle/>
+          <a:p>
+            <a:pPr indent="0" marL="0">
+              <a:buNone/>
+            </a:pPr>
+            <a:r>
+              <a:rPr lang="en-US" sz="680" b="1" dirty="0">
+                <a:solidFill>
+                  <a:srgbClr val="121212"/>
+                </a:solidFill>
+                <a:latin typeface="Microsoft YaHei" pitchFamily="34" charset="0"/>
+                <a:ea typeface="Microsoft YaHei" pitchFamily="34" charset="-122"/>
+                <a:cs typeface="Microsoft YaHei" pitchFamily="34" charset="-120"/>
+              </a:rPr>
+              <a:t>公众号：锂电Plus｜工信部：加大固态电池正负极材料、固态电解质攻关</a:t>
+            </a:r>
+            <a:endParaRPr lang="en-US" sz="680" dirty="0"/>
+          </a:p>
+        </p:txBody>
+      </p:sp>
+      <p:sp>
+        <p:nvSpPr>
+          <p:cNvPr id="37" name="Text 35"/>
+          <p:cNvSpPr/>
+          <p:nvPr/>
+        </p:nvSpPr>
+        <p:spPr>
+          <a:xfrm>
+            <a:off x="6510528" y="2761488"/>
+            <a:ext cx="4343400" cy="109728"/>
+          </a:xfrm>
+          <a:prstGeom prst="rect">
+            <a:avLst/>
+          </a:prstGeom>
+          <a:noFill/>
+          <a:ln/>
+        </p:spPr>
+        <p:txBody>
+          <a:bodyPr wrap="square" lIns="0" tIns="0" rIns="0" bIns="0" rtlCol="0" anchor="ctr">
+            <a:normAutofit/>
+          </a:bodyPr>
+          <a:lstStyle/>
+          <a:p>
+            <a:pPr indent="0" marL="0">
+              <a:buNone/>
+            </a:pPr>
+            <a:r>
+              <a:rPr lang="en-US" sz="580" dirty="0">
+                <a:solidFill>
+                  <a:srgbClr val="6D756F"/>
+                </a:solidFill>
+                <a:latin typeface="Aptos" pitchFamily="34" charset="0"/>
+                <a:ea typeface="Aptos" pitchFamily="34" charset="-122"/>
+                <a:cs typeface="Aptos" pitchFamily="34" charset="-120"/>
+              </a:rPr>
+              <a:t>https://mp.weixin.qq.com/s/RcAYFnrXHEDsZVMmOY3jUw</a:t>
+            </a:r>
+            <a:endParaRPr lang="en-US" sz="580" dirty="0"/>
+          </a:p>
+        </p:txBody>
+      </p:sp>
+      <p:sp>
+        <p:nvSpPr>
+          <p:cNvPr id="38" name="Shape 36"/>
+          <p:cNvSpPr/>
+          <p:nvPr/>
+        </p:nvSpPr>
+        <p:spPr>
+          <a:xfrm>
+            <a:off x="658368" y="2999232"/>
+            <a:ext cx="10424160" cy="274320"/>
+          </a:xfrm>
+          <a:prstGeom prst="rect">
+            <a:avLst/>
+          </a:prstGeom>
+          <a:solidFill>
+            <a:srgbClr val="F4FAF6"/>
+          </a:solidFill>
+          <a:ln w="5080">
+            <a:solidFill>
+              <a:srgbClr val="DADADA"/>
+            </a:solidFill>
+            <a:prstDash val="solid"/>
+          </a:ln>
+        </p:spPr>
+      </p:sp>
+      <p:sp>
+        <p:nvSpPr>
+          <p:cNvPr id="39" name="Text 37"/>
+          <p:cNvSpPr/>
+          <p:nvPr/>
+        </p:nvSpPr>
+        <p:spPr>
+          <a:xfrm>
+            <a:off x="749808" y="3072384"/>
+            <a:ext cx="411480" cy="109728"/>
+          </a:xfrm>
+          <a:prstGeom prst="rect">
+            <a:avLst/>
+          </a:prstGeom>
+          <a:noFill/>
+          <a:ln/>
+        </p:spPr>
+        <p:txBody>
+          <a:bodyPr wrap="square" lIns="0" tIns="0" rIns="0" bIns="0" rtlCol="0" anchor="ctr"/>
+          <a:lstStyle/>
+          <a:p>
+            <a:pPr indent="0" marL="0">
+              <a:buNone/>
+            </a:pPr>
+            <a:r>
+              <a:rPr lang="en-US" sz="680" b="1" dirty="0">
+                <a:solidFill>
+                  <a:srgbClr val="487052"/>
+                </a:solidFill>
+                <a:latin typeface="Aptos" pitchFamily="34" charset="0"/>
+                <a:ea typeface="Aptos" pitchFamily="34" charset="-122"/>
+                <a:cs typeface="Aptos" pitchFamily="34" charset="-120"/>
+              </a:rPr>
+              <a:t>[5]</a:t>
+            </a:r>
+            <a:endParaRPr lang="en-US" sz="680" dirty="0"/>
+          </a:p>
+        </p:txBody>
+      </p:sp>
+      <p:sp>
+        <p:nvSpPr>
+          <p:cNvPr id="40" name="Text 38"/>
+          <p:cNvSpPr/>
+          <p:nvPr/>
+        </p:nvSpPr>
+        <p:spPr>
+          <a:xfrm>
+            <a:off x="1261872" y="3072384"/>
+            <a:ext cx="1051560" cy="109728"/>
+          </a:xfrm>
+          <a:prstGeom prst="rect">
+            <a:avLst/>
+          </a:prstGeom>
+          <a:noFill/>
+          <a:ln/>
+        </p:spPr>
+        <p:txBody>
+          <a:bodyPr wrap="square" lIns="0" tIns="0" rIns="0" bIns="0" rtlCol="0" anchor="ctr">
+            <a:normAutofit/>
+          </a:bodyPr>
+          <a:lstStyle/>
+          <a:p>
+            <a:pPr indent="0" marL="0">
+              <a:buNone/>
+            </a:pPr>
+            <a:r>
+              <a:rPr lang="en-US" sz="680" dirty="0">
+                <a:solidFill>
+                  <a:srgbClr val="121212"/>
+                </a:solidFill>
+                <a:latin typeface="Microsoft YaHei" pitchFamily="34" charset="0"/>
+                <a:ea typeface="Microsoft YaHei" pitchFamily="34" charset="-122"/>
+                <a:cs typeface="Microsoft YaHei" pitchFamily="34" charset="-120"/>
+              </a:rPr>
+              <a:t>工业和信息化部</a:t>
+            </a:r>
+            <a:endParaRPr lang="en-US" sz="680" dirty="0"/>
+          </a:p>
+        </p:txBody>
+      </p:sp>
+      <p:sp>
+        <p:nvSpPr>
+          <p:cNvPr id="41" name="Text 39"/>
+          <p:cNvSpPr/>
+          <p:nvPr/>
+        </p:nvSpPr>
+        <p:spPr>
+          <a:xfrm>
+            <a:off x="2487168" y="3072384"/>
+            <a:ext cx="3749040" cy="109728"/>
+          </a:xfrm>
+          <a:prstGeom prst="rect">
+            <a:avLst/>
+          </a:prstGeom>
+          <a:noFill/>
+          <a:ln/>
+        </p:spPr>
+        <p:txBody>
+          <a:bodyPr wrap="square" lIns="0" tIns="0" rIns="0" bIns="0" rtlCol="0" anchor="ctr">
+            <a:normAutofit/>
+          </a:bodyPr>
+          <a:lstStyle/>
+          <a:p>
+            <a:pPr indent="0" marL="0">
+              <a:buNone/>
+            </a:pPr>
+            <a:r>
+              <a:rPr lang="en-US" sz="680" b="1" dirty="0">
+                <a:solidFill>
+                  <a:srgbClr val="121212"/>
+                </a:solidFill>
+                <a:latin typeface="Microsoft YaHei" pitchFamily="34" charset="0"/>
+                <a:ea typeface="Microsoft YaHei" pitchFamily="34" charset="-122"/>
+                <a:cs typeface="Microsoft YaHei" pitchFamily="34" charset="-120"/>
+              </a:rPr>
+              <a:t>公开征求《车用动力电池拆解破碎安全要求》等两项强制性国家标准的意见</a:t>
+            </a:r>
+            <a:endParaRPr lang="en-US" sz="680" dirty="0"/>
+          </a:p>
+        </p:txBody>
+      </p:sp>
+      <p:sp>
+        <p:nvSpPr>
+          <p:cNvPr id="42" name="Text 40"/>
+          <p:cNvSpPr/>
+          <p:nvPr/>
+        </p:nvSpPr>
+        <p:spPr>
+          <a:xfrm>
+            <a:off x="6510528" y="3072384"/>
+            <a:ext cx="4343400" cy="109728"/>
+          </a:xfrm>
+          <a:prstGeom prst="rect">
+            <a:avLst/>
+          </a:prstGeom>
+          <a:noFill/>
+          <a:ln/>
+        </p:spPr>
+        <p:txBody>
+          <a:bodyPr wrap="square" lIns="0" tIns="0" rIns="0" bIns="0" rtlCol="0" anchor="ctr">
+            <a:normAutofit/>
+          </a:bodyPr>
+          <a:lstStyle/>
+          <a:p>
+            <a:pPr indent="0" marL="0">
+              <a:buNone/>
+            </a:pPr>
+            <a:r>
+              <a:rPr lang="en-US" sz="580" dirty="0">
+                <a:solidFill>
+                  <a:srgbClr val="6D756F"/>
+                </a:solidFill>
+                <a:latin typeface="Aptos" pitchFamily="34" charset="0"/>
+                <a:ea typeface="Aptos" pitchFamily="34" charset="-122"/>
+                <a:cs typeface="Aptos" pitchFamily="34" charset="-120"/>
+              </a:rPr>
+              <a:t>https://www.miit.gov.cn/gzcy/yjzj/art/2026/art_6ee188a6acf34735a568af7ebdc507b5.html</a:t>
+            </a:r>
+            <a:endParaRPr lang="en-US" sz="580" dirty="0"/>
+          </a:p>
+        </p:txBody>
+      </p:sp>
+      <p:sp>
+        <p:nvSpPr>
+          <p:cNvPr id="43" name="Shape 41"/>
+          <p:cNvSpPr/>
+          <p:nvPr/>
+        </p:nvSpPr>
+        <p:spPr>
+          <a:xfrm>
+            <a:off x="658368" y="3310128"/>
+            <a:ext cx="10424160" cy="274320"/>
+          </a:xfrm>
+          <a:prstGeom prst="rect">
+            <a:avLst/>
+          </a:prstGeom>
+          <a:solidFill>
+            <a:srgbClr val="FFFFFF"/>
+          </a:solidFill>
+          <a:ln w="5080">
+            <a:solidFill>
+              <a:srgbClr val="DADADA"/>
+            </a:solidFill>
+            <a:prstDash val="solid"/>
+          </a:ln>
+        </p:spPr>
+      </p:sp>
+      <p:sp>
+        <p:nvSpPr>
+          <p:cNvPr id="44" name="Text 42"/>
+          <p:cNvSpPr/>
+          <p:nvPr/>
+        </p:nvSpPr>
+        <p:spPr>
+          <a:xfrm>
+            <a:off x="749808" y="3383280"/>
+            <a:ext cx="411480" cy="109728"/>
+          </a:xfrm>
+          <a:prstGeom prst="rect">
+            <a:avLst/>
+          </a:prstGeom>
+          <a:noFill/>
+          <a:ln/>
+        </p:spPr>
+        <p:txBody>
+          <a:bodyPr wrap="square" lIns="0" tIns="0" rIns="0" bIns="0" rtlCol="0" anchor="ctr"/>
+          <a:lstStyle/>
+          <a:p>
+            <a:pPr indent="0" marL="0">
+              <a:buNone/>
+            </a:pPr>
+            <a:r>
+              <a:rPr lang="en-US" sz="680" b="1" dirty="0">
+                <a:solidFill>
+                  <a:srgbClr val="487052"/>
+                </a:solidFill>
+                <a:latin typeface="Aptos" pitchFamily="34" charset="0"/>
+                <a:ea typeface="Aptos" pitchFamily="34" charset="-122"/>
+                <a:cs typeface="Aptos" pitchFamily="34" charset="-120"/>
+              </a:rPr>
+              <a:t>[6]</a:t>
+            </a:r>
+            <a:endParaRPr lang="en-US" sz="680" dirty="0"/>
+          </a:p>
+        </p:txBody>
+      </p:sp>
+      <p:sp>
+        <p:nvSpPr>
+          <p:cNvPr id="45" name="Text 43"/>
+          <p:cNvSpPr/>
+          <p:nvPr/>
+        </p:nvSpPr>
+        <p:spPr>
+          <a:xfrm>
+            <a:off x="1261872" y="3383280"/>
+            <a:ext cx="1051560" cy="109728"/>
+          </a:xfrm>
+          <a:prstGeom prst="rect">
+            <a:avLst/>
+          </a:prstGeom>
+          <a:noFill/>
+          <a:ln/>
+        </p:spPr>
+        <p:txBody>
+          <a:bodyPr wrap="square" lIns="0" tIns="0" rIns="0" bIns="0" rtlCol="0" anchor="ctr">
+            <a:normAutofit/>
+          </a:bodyPr>
+          <a:lstStyle/>
+          <a:p>
+            <a:pPr indent="0" marL="0">
+              <a:buNone/>
+            </a:pPr>
+            <a:r>
+              <a:rPr lang="en-US" sz="680" dirty="0">
+                <a:solidFill>
+                  <a:srgbClr val="121212"/>
+                </a:solidFill>
+                <a:latin typeface="Microsoft YaHei" pitchFamily="34" charset="0"/>
+                <a:ea typeface="Microsoft YaHei" pitchFamily="34" charset="-122"/>
+                <a:cs typeface="Microsoft YaHei" pitchFamily="34" charset="-120"/>
+              </a:rPr>
+              <a:t>公众号：Mysteel动力</a:t>
+            </a:r>
+            <a:endParaRPr lang="en-US" sz="680" dirty="0"/>
+          </a:p>
+        </p:txBody>
+      </p:sp>
+      <p:sp>
+        <p:nvSpPr>
+          <p:cNvPr id="46" name="Text 44"/>
+          <p:cNvSpPr/>
+          <p:nvPr/>
+        </p:nvSpPr>
+        <p:spPr>
+          <a:xfrm>
+            <a:off x="2487168" y="3383280"/>
+            <a:ext cx="3749040" cy="109728"/>
+          </a:xfrm>
+          <a:prstGeom prst="rect">
+            <a:avLst/>
+          </a:prstGeom>
+          <a:noFill/>
+          <a:ln/>
+        </p:spPr>
+        <p:txBody>
+          <a:bodyPr wrap="square" lIns="0" tIns="0" rIns="0" bIns="0" rtlCol="0" anchor="ctr">
+            <a:normAutofit/>
+          </a:bodyPr>
+          <a:lstStyle/>
+          <a:p>
+            <a:pPr indent="0" marL="0">
+              <a:buNone/>
+            </a:pPr>
+            <a:r>
+              <a:rPr lang="en-US" sz="680" b="1" dirty="0">
+                <a:solidFill>
+                  <a:srgbClr val="121212"/>
+                </a:solidFill>
+                <a:latin typeface="Microsoft YaHei" pitchFamily="34" charset="0"/>
+                <a:ea typeface="Microsoft YaHei" pitchFamily="34" charset="-122"/>
+                <a:cs typeface="Microsoft YaHei" pitchFamily="34" charset="-120"/>
+              </a:rPr>
+              <a:t>公众号：Mysteel动力电池回收｜欧盟黑粉出口禁令倒计时：全球锂电回</a:t>
+            </a:r>
+            <a:endParaRPr lang="en-US" sz="680" dirty="0"/>
+          </a:p>
+        </p:txBody>
+      </p:sp>
+      <p:sp>
+        <p:nvSpPr>
+          <p:cNvPr id="47" name="Text 45"/>
+          <p:cNvSpPr/>
+          <p:nvPr/>
+        </p:nvSpPr>
+        <p:spPr>
+          <a:xfrm>
+            <a:off x="6510528" y="3383280"/>
+            <a:ext cx="4343400" cy="109728"/>
+          </a:xfrm>
+          <a:prstGeom prst="rect">
+            <a:avLst/>
+          </a:prstGeom>
+          <a:noFill/>
+          <a:ln/>
+        </p:spPr>
+        <p:txBody>
+          <a:bodyPr wrap="square" lIns="0" tIns="0" rIns="0" bIns="0" rtlCol="0" anchor="ctr">
+            <a:normAutofit/>
+          </a:bodyPr>
+          <a:lstStyle/>
+          <a:p>
+            <a:pPr indent="0" marL="0">
+              <a:buNone/>
+            </a:pPr>
+            <a:r>
+              <a:rPr lang="en-US" sz="580" dirty="0">
+                <a:solidFill>
+                  <a:srgbClr val="6D756F"/>
+                </a:solidFill>
+                <a:latin typeface="Aptos" pitchFamily="34" charset="0"/>
+                <a:ea typeface="Aptos" pitchFamily="34" charset="-122"/>
+                <a:cs typeface="Aptos" pitchFamily="34" charset="-120"/>
+              </a:rPr>
+              <a:t>https://mp.weixin.qq.com/s/2ViyLHByi8TGnU6oFVn8pw</a:t>
+            </a:r>
+            <a:endParaRPr lang="en-US" sz="580" dirty="0"/>
+          </a:p>
+        </p:txBody>
+      </p:sp>
+      <p:sp>
+        <p:nvSpPr>
+          <p:cNvPr id="48" name="Shape 46"/>
+          <p:cNvSpPr/>
+          <p:nvPr/>
+        </p:nvSpPr>
+        <p:spPr>
+          <a:xfrm>
+            <a:off x="658368" y="3621024"/>
+            <a:ext cx="10424160" cy="274320"/>
+          </a:xfrm>
+          <a:prstGeom prst="rect">
+            <a:avLst/>
+          </a:prstGeom>
+          <a:solidFill>
+            <a:srgbClr val="F4FAF6"/>
+          </a:solidFill>
+          <a:ln w="5080">
+            <a:solidFill>
+              <a:srgbClr val="DADADA"/>
+            </a:solidFill>
+            <a:prstDash val="solid"/>
+          </a:ln>
+        </p:spPr>
+      </p:sp>
+      <p:sp>
+        <p:nvSpPr>
+          <p:cNvPr id="49" name="Text 47"/>
+          <p:cNvSpPr/>
+          <p:nvPr/>
+        </p:nvSpPr>
+        <p:spPr>
+          <a:xfrm>
+            <a:off x="749808" y="3694176"/>
+            <a:ext cx="411480" cy="109728"/>
+          </a:xfrm>
+          <a:prstGeom prst="rect">
+            <a:avLst/>
+          </a:prstGeom>
+          <a:noFill/>
+          <a:ln/>
+        </p:spPr>
+        <p:txBody>
+          <a:bodyPr wrap="square" lIns="0" tIns="0" rIns="0" bIns="0" rtlCol="0" anchor="ctr"/>
+          <a:lstStyle/>
+          <a:p>
+            <a:pPr indent="0" marL="0">
+              <a:buNone/>
+            </a:pPr>
+            <a:r>
+              <a:rPr lang="en-US" sz="680" b="1" dirty="0">
+                <a:solidFill>
+                  <a:srgbClr val="487052"/>
+                </a:solidFill>
+                <a:latin typeface="Aptos" pitchFamily="34" charset="0"/>
+                <a:ea typeface="Aptos" pitchFamily="34" charset="-122"/>
+                <a:cs typeface="Aptos" pitchFamily="34" charset="-120"/>
+              </a:rPr>
+              <a:t>[7]</a:t>
+            </a:r>
+            <a:endParaRPr lang="en-US" sz="680" dirty="0"/>
+          </a:p>
+        </p:txBody>
+      </p:sp>
+      <p:sp>
+        <p:nvSpPr>
+          <p:cNvPr id="50" name="Text 48"/>
+          <p:cNvSpPr/>
+          <p:nvPr/>
+        </p:nvSpPr>
+        <p:spPr>
+          <a:xfrm>
+            <a:off x="1261872" y="3694176"/>
+            <a:ext cx="1051560" cy="109728"/>
+          </a:xfrm>
+          <a:prstGeom prst="rect">
+            <a:avLst/>
+          </a:prstGeom>
+          <a:noFill/>
+          <a:ln/>
+        </p:spPr>
+        <p:txBody>
+          <a:bodyPr wrap="square" lIns="0" tIns="0" rIns="0" bIns="0" rtlCol="0" anchor="ctr">
+            <a:normAutofit/>
+          </a:bodyPr>
+          <a:lstStyle/>
+          <a:p>
+            <a:pPr indent="0" marL="0">
+              <a:buNone/>
+            </a:pPr>
+            <a:r>
+              <a:rPr lang="en-US" sz="680" dirty="0">
+                <a:solidFill>
+                  <a:srgbClr val="121212"/>
+                </a:solidFill>
+                <a:latin typeface="Microsoft YaHei" pitchFamily="34" charset="0"/>
+                <a:ea typeface="Microsoft YaHei" pitchFamily="34" charset="-122"/>
+                <a:cs typeface="Microsoft YaHei" pitchFamily="34" charset="-120"/>
+              </a:rPr>
+              <a:t>公众号：PHY正极材料｜协</a:t>
+            </a:r>
+            <a:endParaRPr lang="en-US" sz="680" dirty="0"/>
+          </a:p>
+        </p:txBody>
+      </p:sp>
+      <p:sp>
+        <p:nvSpPr>
+          <p:cNvPr id="51" name="Text 49"/>
+          <p:cNvSpPr/>
+          <p:nvPr/>
+        </p:nvSpPr>
+        <p:spPr>
+          <a:xfrm>
+            <a:off x="2487168" y="3694176"/>
+            <a:ext cx="3749040" cy="109728"/>
+          </a:xfrm>
+          <a:prstGeom prst="rect">
+            <a:avLst/>
+          </a:prstGeom>
+          <a:noFill/>
+          <a:ln/>
+        </p:spPr>
+        <p:txBody>
+          <a:bodyPr wrap="square" lIns="0" tIns="0" rIns="0" bIns="0" rtlCol="0" anchor="ctr">
+            <a:normAutofit/>
+          </a:bodyPr>
+          <a:lstStyle/>
+          <a:p>
+            <a:pPr indent="0" marL="0">
+              <a:buNone/>
+            </a:pPr>
+            <a:r>
+              <a:rPr lang="en-US" sz="680" b="1" dirty="0">
+                <a:solidFill>
+                  <a:srgbClr val="121212"/>
+                </a:solidFill>
+                <a:latin typeface="Microsoft YaHei" pitchFamily="34" charset="0"/>
+                <a:ea typeface="Microsoft YaHei" pitchFamily="34" charset="-122"/>
+                <a:cs typeface="Microsoft YaHei" pitchFamily="34" charset="-120"/>
+              </a:rPr>
+              <a:t>公众号：PHY正极材料｜协鑫锂电C18第五代LFP亮相SNEC峰会，释</a:t>
+            </a:r>
+            <a:endParaRPr lang="en-US" sz="680" dirty="0"/>
+          </a:p>
+        </p:txBody>
+      </p:sp>
+      <p:sp>
+        <p:nvSpPr>
+          <p:cNvPr id="52" name="Text 50"/>
+          <p:cNvSpPr/>
+          <p:nvPr/>
+        </p:nvSpPr>
+        <p:spPr>
+          <a:xfrm>
+            <a:off x="6510528" y="3694176"/>
+            <a:ext cx="4343400" cy="109728"/>
+          </a:xfrm>
+          <a:prstGeom prst="rect">
+            <a:avLst/>
+          </a:prstGeom>
+          <a:noFill/>
+          <a:ln/>
+        </p:spPr>
+        <p:txBody>
+          <a:bodyPr wrap="square" lIns="0" tIns="0" rIns="0" bIns="0" rtlCol="0" anchor="ctr">
+            <a:normAutofit/>
+          </a:bodyPr>
+          <a:lstStyle/>
+          <a:p>
+            <a:pPr indent="0" marL="0">
+              <a:buNone/>
+            </a:pPr>
+            <a:r>
+              <a:rPr lang="en-US" sz="580" dirty="0">
+                <a:solidFill>
+                  <a:srgbClr val="6D756F"/>
+                </a:solidFill>
+                <a:latin typeface="Aptos" pitchFamily="34" charset="0"/>
+                <a:ea typeface="Aptos" pitchFamily="34" charset="-122"/>
+                <a:cs typeface="Aptos" pitchFamily="34" charset="-120"/>
+              </a:rPr>
+              <a:t>https://mp.weixin.qq.com/s/TVkyNhi60jozHMXfv6KjUA</a:t>
+            </a:r>
+            <a:endParaRPr lang="en-US" sz="580" dirty="0"/>
+          </a:p>
+        </p:txBody>
+      </p:sp>
+      <p:sp>
+        <p:nvSpPr>
+          <p:cNvPr id="53" name="Shape 51"/>
+          <p:cNvSpPr/>
+          <p:nvPr/>
+        </p:nvSpPr>
+        <p:spPr>
+          <a:xfrm>
+            <a:off x="658368" y="3931920"/>
+            <a:ext cx="10424160" cy="274320"/>
+          </a:xfrm>
+          <a:prstGeom prst="rect">
+            <a:avLst/>
+          </a:prstGeom>
+          <a:solidFill>
+            <a:srgbClr val="FFFFFF"/>
+          </a:solidFill>
+          <a:ln w="5080">
+            <a:solidFill>
+              <a:srgbClr val="DADADA"/>
+            </a:solidFill>
+            <a:prstDash val="solid"/>
+          </a:ln>
+        </p:spPr>
+      </p:sp>
+      <p:sp>
+        <p:nvSpPr>
+          <p:cNvPr id="54" name="Text 52"/>
+          <p:cNvSpPr/>
+          <p:nvPr/>
+        </p:nvSpPr>
+        <p:spPr>
+          <a:xfrm>
+            <a:off x="749808" y="4005072"/>
+            <a:ext cx="411480" cy="109728"/>
+          </a:xfrm>
+          <a:prstGeom prst="rect">
+            <a:avLst/>
+          </a:prstGeom>
+          <a:noFill/>
+          <a:ln/>
+        </p:spPr>
+        <p:txBody>
+          <a:bodyPr wrap="square" lIns="0" tIns="0" rIns="0" bIns="0" rtlCol="0" anchor="ctr"/>
+          <a:lstStyle/>
+          <a:p>
+            <a:pPr indent="0" marL="0">
+              <a:buNone/>
+            </a:pPr>
+            <a:r>
+              <a:rPr lang="en-US" sz="680" b="1" dirty="0">
+                <a:solidFill>
+                  <a:srgbClr val="487052"/>
+                </a:solidFill>
+                <a:latin typeface="Aptos" pitchFamily="34" charset="0"/>
+                <a:ea typeface="Aptos" pitchFamily="34" charset="-122"/>
+                <a:cs typeface="Aptos" pitchFamily="34" charset="-120"/>
+              </a:rPr>
+              <a:t>[8]</a:t>
+            </a:r>
+            <a:endParaRPr lang="en-US" sz="680" dirty="0"/>
+          </a:p>
+        </p:txBody>
+      </p:sp>
+      <p:sp>
+        <p:nvSpPr>
+          <p:cNvPr id="55" name="Text 53"/>
+          <p:cNvSpPr/>
+          <p:nvPr/>
+        </p:nvSpPr>
+        <p:spPr>
+          <a:xfrm>
+            <a:off x="1261872" y="4005072"/>
+            <a:ext cx="1051560" cy="109728"/>
+          </a:xfrm>
+          <a:prstGeom prst="rect">
+            <a:avLst/>
+          </a:prstGeom>
+          <a:noFill/>
+          <a:ln/>
+        </p:spPr>
+        <p:txBody>
+          <a:bodyPr wrap="square" lIns="0" tIns="0" rIns="0" bIns="0" rtlCol="0" anchor="ctr">
+            <a:normAutofit/>
+          </a:bodyPr>
+          <a:lstStyle/>
+          <a:p>
+            <a:pPr indent="0" marL="0">
+              <a:buNone/>
+            </a:pPr>
+            <a:r>
+              <a:rPr lang="en-US" sz="680" dirty="0">
+                <a:solidFill>
+                  <a:srgbClr val="121212"/>
+                </a:solidFill>
+                <a:latin typeface="Microsoft YaHei" pitchFamily="34" charset="0"/>
+                <a:ea typeface="Microsoft YaHei" pitchFamily="34" charset="-122"/>
+                <a:cs typeface="Microsoft YaHei" pitchFamily="34" charset="-120"/>
+              </a:rPr>
+              <a:t>公众号：锂电行业动态｜26</a:t>
+            </a:r>
+            <a:endParaRPr lang="en-US" sz="680" dirty="0"/>
+          </a:p>
+        </p:txBody>
+      </p:sp>
+      <p:sp>
+        <p:nvSpPr>
+          <p:cNvPr id="56" name="Text 54"/>
+          <p:cNvSpPr/>
+          <p:nvPr/>
+        </p:nvSpPr>
+        <p:spPr>
+          <a:xfrm>
+            <a:off x="2487168" y="4005072"/>
+            <a:ext cx="3749040" cy="109728"/>
+          </a:xfrm>
+          <a:prstGeom prst="rect">
+            <a:avLst/>
+          </a:prstGeom>
+          <a:noFill/>
+          <a:ln/>
+        </p:spPr>
+        <p:txBody>
+          <a:bodyPr wrap="square" lIns="0" tIns="0" rIns="0" bIns="0" rtlCol="0" anchor="ctr">
+            <a:normAutofit/>
+          </a:bodyPr>
+          <a:lstStyle/>
+          <a:p>
+            <a:pPr indent="0" marL="0">
+              <a:buNone/>
+            </a:pPr>
+            <a:r>
+              <a:rPr lang="en-US" sz="680" b="1" dirty="0">
+                <a:solidFill>
+                  <a:srgbClr val="121212"/>
+                </a:solidFill>
+                <a:latin typeface="Microsoft YaHei" pitchFamily="34" charset="0"/>
+                <a:ea typeface="Microsoft YaHei" pitchFamily="34" charset="-122"/>
+                <a:cs typeface="Microsoft YaHei" pitchFamily="34" charset="-120"/>
+              </a:rPr>
+              <a:t>公众号：锂电行业动态｜26亿！年产10万吨磷酸锰铁锂材料项目落户辽宁</a:t>
+            </a:r>
+            <a:endParaRPr lang="en-US" sz="680" dirty="0"/>
+          </a:p>
+        </p:txBody>
+      </p:sp>
+      <p:sp>
+        <p:nvSpPr>
+          <p:cNvPr id="57" name="Text 55"/>
+          <p:cNvSpPr/>
+          <p:nvPr/>
+        </p:nvSpPr>
+        <p:spPr>
+          <a:xfrm>
+            <a:off x="6510528" y="4005072"/>
+            <a:ext cx="4343400" cy="109728"/>
+          </a:xfrm>
+          <a:prstGeom prst="rect">
+            <a:avLst/>
+          </a:prstGeom>
+          <a:noFill/>
+          <a:ln/>
+        </p:spPr>
+        <p:txBody>
+          <a:bodyPr wrap="square" lIns="0" tIns="0" rIns="0" bIns="0" rtlCol="0" anchor="ctr">
+            <a:normAutofit/>
+          </a:bodyPr>
+          <a:lstStyle/>
+          <a:p>
+            <a:pPr indent="0" marL="0">
+              <a:buNone/>
+            </a:pPr>
+            <a:r>
+              <a:rPr lang="en-US" sz="580" dirty="0">
+                <a:solidFill>
+                  <a:srgbClr val="6D756F"/>
+                </a:solidFill>
+                <a:latin typeface="Aptos" pitchFamily="34" charset="0"/>
+                <a:ea typeface="Aptos" pitchFamily="34" charset="-122"/>
+                <a:cs typeface="Aptos" pitchFamily="34" charset="-120"/>
+              </a:rPr>
+              <a:t>https://mp.weixin.qq.com/s/LxqnDD8grMuV3aSbUDKgyw</a:t>
+            </a:r>
+            <a:endParaRPr lang="en-US" sz="580" dirty="0"/>
+          </a:p>
+        </p:txBody>
+      </p:sp>
+      <p:sp>
+        <p:nvSpPr>
+          <p:cNvPr id="58" name="Shape 56"/>
+          <p:cNvSpPr/>
+          <p:nvPr/>
+        </p:nvSpPr>
+        <p:spPr>
+          <a:xfrm>
+            <a:off x="658368" y="4242816"/>
+            <a:ext cx="10424160" cy="274320"/>
+          </a:xfrm>
+          <a:prstGeom prst="rect">
+            <a:avLst/>
+          </a:prstGeom>
+          <a:solidFill>
+            <a:srgbClr val="F4FAF6"/>
+          </a:solidFill>
+          <a:ln w="5080">
+            <a:solidFill>
+              <a:srgbClr val="DADADA"/>
+            </a:solidFill>
+            <a:prstDash val="solid"/>
+          </a:ln>
+        </p:spPr>
+      </p:sp>
+      <p:sp>
+        <p:nvSpPr>
+          <p:cNvPr id="59" name="Text 57"/>
+          <p:cNvSpPr/>
+          <p:nvPr/>
+        </p:nvSpPr>
+        <p:spPr>
+          <a:xfrm>
+            <a:off x="749808" y="4315968"/>
+            <a:ext cx="411480" cy="109728"/>
+          </a:xfrm>
+          <a:prstGeom prst="rect">
+            <a:avLst/>
+          </a:prstGeom>
+          <a:noFill/>
+          <a:ln/>
+        </p:spPr>
+        <p:txBody>
+          <a:bodyPr wrap="square" lIns="0" tIns="0" rIns="0" bIns="0" rtlCol="0" anchor="ctr"/>
+          <a:lstStyle/>
+          <a:p>
+            <a:pPr indent="0" marL="0">
+              <a:buNone/>
+            </a:pPr>
+            <a:r>
+              <a:rPr lang="en-US" sz="680" b="1" dirty="0">
+                <a:solidFill>
+                  <a:srgbClr val="487052"/>
+                </a:solidFill>
+                <a:latin typeface="Aptos" pitchFamily="34" charset="0"/>
+                <a:ea typeface="Aptos" pitchFamily="34" charset="-122"/>
+                <a:cs typeface="Aptos" pitchFamily="34" charset="-120"/>
+              </a:rPr>
+              <a:t>[9]</a:t>
+            </a:r>
+            <a:endParaRPr lang="en-US" sz="680" dirty="0"/>
+          </a:p>
+        </p:txBody>
+      </p:sp>
+      <p:sp>
+        <p:nvSpPr>
+          <p:cNvPr id="60" name="Text 58"/>
+          <p:cNvSpPr/>
+          <p:nvPr/>
+        </p:nvSpPr>
+        <p:spPr>
+          <a:xfrm>
+            <a:off x="1261872" y="4315968"/>
+            <a:ext cx="1051560" cy="109728"/>
+          </a:xfrm>
+          <a:prstGeom prst="rect">
+            <a:avLst/>
+          </a:prstGeom>
+          <a:noFill/>
+          <a:ln/>
+        </p:spPr>
+        <p:txBody>
+          <a:bodyPr wrap="square" lIns="0" tIns="0" rIns="0" bIns="0" rtlCol="0" anchor="ctr">
+            <a:normAutofit/>
+          </a:bodyPr>
+          <a:lstStyle/>
+          <a:p>
+            <a:pPr indent="0" marL="0">
+              <a:buNone/>
+            </a:pPr>
+            <a:r>
+              <a:rPr lang="en-US" sz="680" dirty="0">
+                <a:solidFill>
+                  <a:srgbClr val="121212"/>
+                </a:solidFill>
+                <a:latin typeface="Microsoft YaHei" pitchFamily="34" charset="0"/>
+                <a:ea typeface="Microsoft YaHei" pitchFamily="34" charset="-122"/>
+                <a:cs typeface="Microsoft YaHei" pitchFamily="34" charset="-120"/>
+              </a:rPr>
+              <a:t>公众号：锂电Plus｜我国</a:t>
+            </a:r>
+            <a:endParaRPr lang="en-US" sz="680" dirty="0"/>
+          </a:p>
+        </p:txBody>
+      </p:sp>
+      <p:sp>
+        <p:nvSpPr>
+          <p:cNvPr id="61" name="Text 59"/>
+          <p:cNvSpPr/>
+          <p:nvPr/>
+        </p:nvSpPr>
+        <p:spPr>
+          <a:xfrm>
+            <a:off x="2487168" y="4315968"/>
+            <a:ext cx="3749040" cy="109728"/>
+          </a:xfrm>
+          <a:prstGeom prst="rect">
+            <a:avLst/>
+          </a:prstGeom>
+          <a:noFill/>
+          <a:ln/>
+        </p:spPr>
+        <p:txBody>
+          <a:bodyPr wrap="square" lIns="0" tIns="0" rIns="0" bIns="0" rtlCol="0" anchor="ctr">
+            <a:normAutofit/>
+          </a:bodyPr>
+          <a:lstStyle/>
+          <a:p>
+            <a:pPr indent="0" marL="0">
+              <a:buNone/>
+            </a:pPr>
+            <a:r>
+              <a:rPr lang="en-US" sz="680" b="1" dirty="0">
+                <a:solidFill>
+                  <a:srgbClr val="121212"/>
+                </a:solidFill>
+                <a:latin typeface="Microsoft YaHei" pitchFamily="34" charset="0"/>
+                <a:ea typeface="Microsoft YaHei" pitchFamily="34" charset="-122"/>
+                <a:cs typeface="Microsoft YaHei" pitchFamily="34" charset="-120"/>
+              </a:rPr>
+              <a:t>公众号：锂电Plus｜我国磷酸锰铁锂技术专利分析与产业前景展望</a:t>
+            </a:r>
+            <a:endParaRPr lang="en-US" sz="680" dirty="0"/>
+          </a:p>
+        </p:txBody>
+      </p:sp>
+      <p:sp>
+        <p:nvSpPr>
+          <p:cNvPr id="62" name="Text 60"/>
+          <p:cNvSpPr/>
+          <p:nvPr/>
+        </p:nvSpPr>
+        <p:spPr>
+          <a:xfrm>
+            <a:off x="6510528" y="4315968"/>
+            <a:ext cx="4343400" cy="109728"/>
+          </a:xfrm>
+          <a:prstGeom prst="rect">
+            <a:avLst/>
+          </a:prstGeom>
+          <a:noFill/>
+          <a:ln/>
+        </p:spPr>
+        <p:txBody>
+          <a:bodyPr wrap="square" lIns="0" tIns="0" rIns="0" bIns="0" rtlCol="0" anchor="ctr">
+            <a:normAutofit/>
+          </a:bodyPr>
+          <a:lstStyle/>
+          <a:p>
+            <a:pPr indent="0" marL="0">
+              <a:buNone/>
+            </a:pPr>
+            <a:r>
+              <a:rPr lang="en-US" sz="580" dirty="0">
+                <a:solidFill>
+                  <a:srgbClr val="6D756F"/>
+                </a:solidFill>
+                <a:latin typeface="Aptos" pitchFamily="34" charset="0"/>
+                <a:ea typeface="Aptos" pitchFamily="34" charset="-122"/>
+                <a:cs typeface="Aptos" pitchFamily="34" charset="-120"/>
+              </a:rPr>
+              <a:t>https://mp.weixin.qq.com/s/BDLWrLG8jbvba8_mtYKbew</a:t>
+            </a:r>
+            <a:endParaRPr lang="en-US" sz="580" dirty="0"/>
+          </a:p>
+        </p:txBody>
+      </p:sp>
+      <p:sp>
+        <p:nvSpPr>
+          <p:cNvPr id="63" name="Shape 61"/>
+          <p:cNvSpPr/>
+          <p:nvPr/>
+        </p:nvSpPr>
+        <p:spPr>
+          <a:xfrm>
+            <a:off x="658368" y="4553712"/>
+            <a:ext cx="10424160" cy="274320"/>
+          </a:xfrm>
+          <a:prstGeom prst="rect">
+            <a:avLst/>
+          </a:prstGeom>
+          <a:solidFill>
+            <a:srgbClr val="FFFFFF"/>
+          </a:solidFill>
+          <a:ln w="5080">
+            <a:solidFill>
+              <a:srgbClr val="DADADA"/>
+            </a:solidFill>
+            <a:prstDash val="solid"/>
+          </a:ln>
+        </p:spPr>
+      </p:sp>
+      <p:sp>
+        <p:nvSpPr>
+          <p:cNvPr id="64" name="Text 62"/>
+          <p:cNvSpPr/>
+          <p:nvPr/>
+        </p:nvSpPr>
+        <p:spPr>
+          <a:xfrm>
+            <a:off x="749808" y="4626864"/>
+            <a:ext cx="411480" cy="109728"/>
+          </a:xfrm>
+          <a:prstGeom prst="rect">
+            <a:avLst/>
+          </a:prstGeom>
+          <a:noFill/>
+          <a:ln/>
+        </p:spPr>
+        <p:txBody>
+          <a:bodyPr wrap="square" lIns="0" tIns="0" rIns="0" bIns="0" rtlCol="0" anchor="ctr"/>
+          <a:lstStyle/>
+          <a:p>
+            <a:pPr indent="0" marL="0">
+              <a:buNone/>
+            </a:pPr>
+            <a:r>
+              <a:rPr lang="en-US" sz="680" b="1" dirty="0">
+                <a:solidFill>
+                  <a:srgbClr val="487052"/>
+                </a:solidFill>
+                <a:latin typeface="Aptos" pitchFamily="34" charset="0"/>
+                <a:ea typeface="Aptos" pitchFamily="34" charset="-122"/>
+                <a:cs typeface="Aptos" pitchFamily="34" charset="-120"/>
+              </a:rPr>
+              <a:t>[10]</a:t>
+            </a:r>
+            <a:endParaRPr lang="en-US" sz="680" dirty="0"/>
+          </a:p>
+        </p:txBody>
+      </p:sp>
+      <p:sp>
+        <p:nvSpPr>
+          <p:cNvPr id="65" name="Text 63"/>
+          <p:cNvSpPr/>
+          <p:nvPr/>
+        </p:nvSpPr>
+        <p:spPr>
+          <a:xfrm>
+            <a:off x="1261872" y="4626864"/>
+            <a:ext cx="1051560" cy="109728"/>
+          </a:xfrm>
+          <a:prstGeom prst="rect">
+            <a:avLst/>
+          </a:prstGeom>
+          <a:noFill/>
+          <a:ln/>
+        </p:spPr>
+        <p:txBody>
+          <a:bodyPr wrap="square" lIns="0" tIns="0" rIns="0" bIns="0" rtlCol="0" anchor="ctr">
+            <a:normAutofit/>
+          </a:bodyPr>
+          <a:lstStyle/>
+          <a:p>
+            <a:pPr indent="0" marL="0">
+              <a:buNone/>
+            </a:pPr>
+            <a:r>
+              <a:rPr lang="en-US" sz="680" dirty="0">
+                <a:solidFill>
+                  <a:srgbClr val="121212"/>
+                </a:solidFill>
+                <a:latin typeface="Microsoft YaHei" pitchFamily="34" charset="0"/>
+                <a:ea typeface="Microsoft YaHei" pitchFamily="34" charset="-122"/>
+                <a:cs typeface="Microsoft YaHei" pitchFamily="34" charset="-120"/>
+              </a:rPr>
+              <a:t>公众号：锂电行业动态｜总投</a:t>
+            </a:r>
+            <a:endParaRPr lang="en-US" sz="680" dirty="0"/>
+          </a:p>
+        </p:txBody>
+      </p:sp>
+      <p:sp>
+        <p:nvSpPr>
+          <p:cNvPr id="66" name="Text 64"/>
+          <p:cNvSpPr/>
+          <p:nvPr/>
+        </p:nvSpPr>
+        <p:spPr>
+          <a:xfrm>
+            <a:off x="2487168" y="4626864"/>
+            <a:ext cx="3749040" cy="109728"/>
+          </a:xfrm>
+          <a:prstGeom prst="rect">
+            <a:avLst/>
+          </a:prstGeom>
+          <a:noFill/>
+          <a:ln/>
+        </p:spPr>
+        <p:txBody>
+          <a:bodyPr wrap="square" lIns="0" tIns="0" rIns="0" bIns="0" rtlCol="0" anchor="ctr">
+            <a:normAutofit/>
+          </a:bodyPr>
+          <a:lstStyle/>
+          <a:p>
+            <a:pPr indent="0" marL="0">
+              <a:buNone/>
+            </a:pPr>
+            <a:r>
+              <a:rPr lang="en-US" sz="680" b="1" dirty="0">
+                <a:solidFill>
+                  <a:srgbClr val="121212"/>
+                </a:solidFill>
+                <a:latin typeface="Microsoft YaHei" pitchFamily="34" charset="0"/>
+                <a:ea typeface="Microsoft YaHei" pitchFamily="34" charset="-122"/>
+                <a:cs typeface="Microsoft YaHei" pitchFamily="34" charset="-120"/>
+              </a:rPr>
+              <a:t>公众号：锂电行业动态｜总投资73.23亿元！贵州毕节百万吨级磷酸铁锂项</a:t>
+            </a:r>
+            <a:endParaRPr lang="en-US" sz="680" dirty="0"/>
+          </a:p>
+        </p:txBody>
+      </p:sp>
+      <p:sp>
+        <p:nvSpPr>
+          <p:cNvPr id="67" name="Text 65"/>
+          <p:cNvSpPr/>
+          <p:nvPr/>
+        </p:nvSpPr>
+        <p:spPr>
+          <a:xfrm>
+            <a:off x="6510528" y="4626864"/>
+            <a:ext cx="4343400" cy="109728"/>
+          </a:xfrm>
+          <a:prstGeom prst="rect">
+            <a:avLst/>
+          </a:prstGeom>
+          <a:noFill/>
+          <a:ln/>
+        </p:spPr>
+        <p:txBody>
+          <a:bodyPr wrap="square" lIns="0" tIns="0" rIns="0" bIns="0" rtlCol="0" anchor="ctr">
+            <a:normAutofit/>
+          </a:bodyPr>
+          <a:lstStyle/>
+          <a:p>
+            <a:pPr indent="0" marL="0">
+              <a:buNone/>
+            </a:pPr>
+            <a:r>
+              <a:rPr lang="en-US" sz="580" dirty="0">
+                <a:solidFill>
+                  <a:srgbClr val="6D756F"/>
+                </a:solidFill>
+                <a:latin typeface="Aptos" pitchFamily="34" charset="0"/>
+                <a:ea typeface="Aptos" pitchFamily="34" charset="-122"/>
+                <a:cs typeface="Aptos" pitchFamily="34" charset="-120"/>
+              </a:rPr>
+              <a:t>https://mp.weixin.qq.com/s/T8NoqoIwc4eukgLynjThCA</a:t>
+            </a:r>
+            <a:endParaRPr lang="en-US" sz="580" dirty="0"/>
+          </a:p>
+        </p:txBody>
+      </p:sp>
+      <p:sp>
+        <p:nvSpPr>
+          <p:cNvPr id="68" name="Shape 66"/>
+          <p:cNvSpPr/>
+          <p:nvPr/>
+        </p:nvSpPr>
+        <p:spPr>
+          <a:xfrm>
+            <a:off x="658368" y="4864608"/>
+            <a:ext cx="10424160" cy="274320"/>
+          </a:xfrm>
+          <a:prstGeom prst="rect">
+            <a:avLst/>
+          </a:prstGeom>
+          <a:solidFill>
+            <a:srgbClr val="F4FAF6"/>
+          </a:solidFill>
+          <a:ln w="5080">
+            <a:solidFill>
+              <a:srgbClr val="DADADA"/>
+            </a:solidFill>
+            <a:prstDash val="solid"/>
+          </a:ln>
+        </p:spPr>
+      </p:sp>
+      <p:sp>
+        <p:nvSpPr>
+          <p:cNvPr id="69" name="Text 67"/>
+          <p:cNvSpPr/>
+          <p:nvPr/>
+        </p:nvSpPr>
+        <p:spPr>
+          <a:xfrm>
+            <a:off x="749808" y="4937760"/>
+            <a:ext cx="411480" cy="109728"/>
+          </a:xfrm>
+          <a:prstGeom prst="rect">
+            <a:avLst/>
+          </a:prstGeom>
+          <a:noFill/>
+          <a:ln/>
+        </p:spPr>
+        <p:txBody>
+          <a:bodyPr wrap="square" lIns="0" tIns="0" rIns="0" bIns="0" rtlCol="0" anchor="ctr"/>
+          <a:lstStyle/>
+          <a:p>
+            <a:pPr indent="0" marL="0">
+              <a:buNone/>
+            </a:pPr>
+            <a:r>
+              <a:rPr lang="en-US" sz="680" b="1" dirty="0">
+                <a:solidFill>
+                  <a:srgbClr val="487052"/>
+                </a:solidFill>
+                <a:latin typeface="Aptos" pitchFamily="34" charset="0"/>
+                <a:ea typeface="Aptos" pitchFamily="34" charset="-122"/>
+                <a:cs typeface="Aptos" pitchFamily="34" charset="-120"/>
+              </a:rPr>
+              <a:t>[11]</a:t>
+            </a:r>
+            <a:endParaRPr lang="en-US" sz="680" dirty="0"/>
+          </a:p>
+        </p:txBody>
+      </p:sp>
+      <p:sp>
+        <p:nvSpPr>
+          <p:cNvPr id="70" name="Text 68"/>
+          <p:cNvSpPr/>
+          <p:nvPr/>
+        </p:nvSpPr>
+        <p:spPr>
+          <a:xfrm>
+            <a:off x="1261872" y="4937760"/>
+            <a:ext cx="1051560" cy="109728"/>
+          </a:xfrm>
+          <a:prstGeom prst="rect">
+            <a:avLst/>
+          </a:prstGeom>
+          <a:noFill/>
+          <a:ln/>
+        </p:spPr>
+        <p:txBody>
+          <a:bodyPr wrap="square" lIns="0" tIns="0" rIns="0" bIns="0" rtlCol="0" anchor="ctr">
+            <a:normAutofit/>
+          </a:bodyPr>
+          <a:lstStyle/>
+          <a:p>
+            <a:pPr indent="0" marL="0">
+              <a:buNone/>
+            </a:pPr>
+            <a:r>
+              <a:rPr lang="en-US" sz="680" dirty="0">
+                <a:solidFill>
+                  <a:srgbClr val="121212"/>
+                </a:solidFill>
+                <a:latin typeface="Microsoft YaHei" pitchFamily="34" charset="0"/>
+                <a:ea typeface="Microsoft YaHei" pitchFamily="34" charset="-122"/>
+                <a:cs typeface="Microsoft YaHei" pitchFamily="34" charset="-120"/>
+              </a:rPr>
+              <a:t>公众号：锂电行业动态｜拟募</a:t>
+            </a:r>
+            <a:endParaRPr lang="en-US" sz="680" dirty="0"/>
+          </a:p>
+        </p:txBody>
+      </p:sp>
+      <p:sp>
+        <p:nvSpPr>
+          <p:cNvPr id="71" name="Text 69"/>
+          <p:cNvSpPr/>
+          <p:nvPr/>
+        </p:nvSpPr>
+        <p:spPr>
+          <a:xfrm>
+            <a:off x="2487168" y="4937760"/>
+            <a:ext cx="3749040" cy="109728"/>
+          </a:xfrm>
+          <a:prstGeom prst="rect">
+            <a:avLst/>
+          </a:prstGeom>
+          <a:noFill/>
+          <a:ln/>
+        </p:spPr>
+        <p:txBody>
+          <a:bodyPr wrap="square" lIns="0" tIns="0" rIns="0" bIns="0" rtlCol="0" anchor="ctr">
+            <a:normAutofit/>
+          </a:bodyPr>
+          <a:lstStyle/>
+          <a:p>
+            <a:pPr indent="0" marL="0">
+              <a:buNone/>
+            </a:pPr>
+            <a:r>
+              <a:rPr lang="en-US" sz="680" b="1" dirty="0">
+                <a:solidFill>
+                  <a:srgbClr val="121212"/>
+                </a:solidFill>
+                <a:latin typeface="Microsoft YaHei" pitchFamily="34" charset="0"/>
+                <a:ea typeface="Microsoft YaHei" pitchFamily="34" charset="-122"/>
+                <a:cs typeface="Microsoft YaHei" pitchFamily="34" charset="-120"/>
+              </a:rPr>
+              <a:t>公众号：锂电行业动态｜拟募资37.8亿元加码50万吨磷酸铁锂产能！金川</a:t>
+            </a:r>
+            <a:endParaRPr lang="en-US" sz="680" dirty="0"/>
+          </a:p>
+        </p:txBody>
+      </p:sp>
+      <p:sp>
+        <p:nvSpPr>
+          <p:cNvPr id="72" name="Text 70"/>
+          <p:cNvSpPr/>
+          <p:nvPr/>
+        </p:nvSpPr>
+        <p:spPr>
+          <a:xfrm>
+            <a:off x="6510528" y="4937760"/>
+            <a:ext cx="4343400" cy="109728"/>
+          </a:xfrm>
+          <a:prstGeom prst="rect">
+            <a:avLst/>
+          </a:prstGeom>
+          <a:noFill/>
+          <a:ln/>
+        </p:spPr>
+        <p:txBody>
+          <a:bodyPr wrap="square" lIns="0" tIns="0" rIns="0" bIns="0" rtlCol="0" anchor="ctr">
+            <a:normAutofit/>
+          </a:bodyPr>
+          <a:lstStyle/>
+          <a:p>
+            <a:pPr indent="0" marL="0">
+              <a:buNone/>
+            </a:pPr>
+            <a:r>
+              <a:rPr lang="en-US" sz="580" dirty="0">
+                <a:solidFill>
+                  <a:srgbClr val="6D756F"/>
+                </a:solidFill>
+                <a:latin typeface="Aptos" pitchFamily="34" charset="0"/>
+                <a:ea typeface="Aptos" pitchFamily="34" charset="-122"/>
+                <a:cs typeface="Aptos" pitchFamily="34" charset="-120"/>
+              </a:rPr>
+              <a:t>https://mp.weixin.qq.com/s/Q_ZcGhqARBALMj5u7ZhNNw</a:t>
+            </a:r>
+            <a:endParaRPr lang="en-US" sz="580" dirty="0"/>
+          </a:p>
+        </p:txBody>
+      </p:sp>
+      <p:sp>
+        <p:nvSpPr>
+          <p:cNvPr id="73" name="Shape 71"/>
+          <p:cNvSpPr/>
+          <p:nvPr/>
+        </p:nvSpPr>
+        <p:spPr>
+          <a:xfrm>
+            <a:off x="658368" y="5175504"/>
+            <a:ext cx="10424160" cy="274320"/>
+          </a:xfrm>
+          <a:prstGeom prst="rect">
+            <a:avLst/>
+          </a:prstGeom>
+          <a:solidFill>
+            <a:srgbClr val="FFFFFF"/>
+          </a:solidFill>
+          <a:ln w="5080">
+            <a:solidFill>
+              <a:srgbClr val="DADADA"/>
+            </a:solidFill>
+            <a:prstDash val="solid"/>
+          </a:ln>
+        </p:spPr>
+      </p:sp>
+      <p:sp>
+        <p:nvSpPr>
+          <p:cNvPr id="74" name="Text 72"/>
+          <p:cNvSpPr/>
+          <p:nvPr/>
+        </p:nvSpPr>
+        <p:spPr>
+          <a:xfrm>
+            <a:off x="749808" y="5248656"/>
+            <a:ext cx="411480" cy="109728"/>
+          </a:xfrm>
+          <a:prstGeom prst="rect">
+            <a:avLst/>
+          </a:prstGeom>
+          <a:noFill/>
+          <a:ln/>
+        </p:spPr>
+        <p:txBody>
+          <a:bodyPr wrap="square" lIns="0" tIns="0" rIns="0" bIns="0" rtlCol="0" anchor="ctr"/>
+          <a:lstStyle/>
+          <a:p>
+            <a:pPr indent="0" marL="0">
+              <a:buNone/>
+            </a:pPr>
+            <a:r>
+              <a:rPr lang="en-US" sz="680" b="1" dirty="0">
+                <a:solidFill>
+                  <a:srgbClr val="487052"/>
+                </a:solidFill>
+                <a:latin typeface="Aptos" pitchFamily="34" charset="0"/>
+                <a:ea typeface="Aptos" pitchFamily="34" charset="-122"/>
+                <a:cs typeface="Aptos" pitchFamily="34" charset="-120"/>
+              </a:rPr>
+              <a:t>[12]</a:t>
+            </a:r>
+            <a:endParaRPr lang="en-US" sz="680" dirty="0"/>
+          </a:p>
+        </p:txBody>
+      </p:sp>
+      <p:sp>
+        <p:nvSpPr>
+          <p:cNvPr id="75" name="Text 73"/>
+          <p:cNvSpPr/>
+          <p:nvPr/>
+        </p:nvSpPr>
+        <p:spPr>
+          <a:xfrm>
+            <a:off x="1261872" y="5248656"/>
+            <a:ext cx="1051560" cy="109728"/>
+          </a:xfrm>
+          <a:prstGeom prst="rect">
+            <a:avLst/>
+          </a:prstGeom>
+          <a:noFill/>
+          <a:ln/>
+        </p:spPr>
+        <p:txBody>
+          <a:bodyPr wrap="square" lIns="0" tIns="0" rIns="0" bIns="0" rtlCol="0" anchor="ctr">
+            <a:normAutofit/>
+          </a:bodyPr>
+          <a:lstStyle/>
+          <a:p>
+            <a:pPr indent="0" marL="0">
+              <a:buNone/>
+            </a:pPr>
+            <a:r>
+              <a:rPr lang="en-US" sz="680" dirty="0">
+                <a:solidFill>
+                  <a:srgbClr val="121212"/>
+                </a:solidFill>
+                <a:latin typeface="Microsoft YaHei" pitchFamily="34" charset="0"/>
+                <a:ea typeface="Microsoft YaHei" pitchFamily="34" charset="-122"/>
+                <a:cs typeface="Microsoft YaHei" pitchFamily="34" charset="-120"/>
+              </a:rPr>
+              <a:t>公众号：锂电行业动态｜总投</a:t>
+            </a:r>
+            <a:endParaRPr lang="en-US" sz="680" dirty="0"/>
+          </a:p>
+        </p:txBody>
+      </p:sp>
+      <p:sp>
+        <p:nvSpPr>
+          <p:cNvPr id="76" name="Text 74"/>
+          <p:cNvSpPr/>
+          <p:nvPr/>
+        </p:nvSpPr>
+        <p:spPr>
+          <a:xfrm>
+            <a:off x="2487168" y="5248656"/>
+            <a:ext cx="3749040" cy="109728"/>
+          </a:xfrm>
+          <a:prstGeom prst="rect">
+            <a:avLst/>
+          </a:prstGeom>
+          <a:noFill/>
+          <a:ln/>
+        </p:spPr>
+        <p:txBody>
+          <a:bodyPr wrap="square" lIns="0" tIns="0" rIns="0" bIns="0" rtlCol="0" anchor="ctr">
+            <a:normAutofit/>
+          </a:bodyPr>
+          <a:lstStyle/>
+          <a:p>
+            <a:pPr indent="0" marL="0">
+              <a:buNone/>
+            </a:pPr>
+            <a:r>
+              <a:rPr lang="en-US" sz="680" b="1" dirty="0">
+                <a:solidFill>
+                  <a:srgbClr val="121212"/>
+                </a:solidFill>
+                <a:latin typeface="Microsoft YaHei" pitchFamily="34" charset="0"/>
+                <a:ea typeface="Microsoft YaHei" pitchFamily="34" charset="-122"/>
+                <a:cs typeface="Microsoft YaHei" pitchFamily="34" charset="-120"/>
+              </a:rPr>
+              <a:t>公众号：锂电行业动态｜总投资4.5亿元！厦钨新能拟在马来西亚投建年产1</a:t>
+            </a:r>
+            <a:endParaRPr lang="en-US" sz="680" dirty="0"/>
+          </a:p>
+        </p:txBody>
+      </p:sp>
+      <p:sp>
+        <p:nvSpPr>
+          <p:cNvPr id="77" name="Text 75"/>
+          <p:cNvSpPr/>
+          <p:nvPr/>
+        </p:nvSpPr>
+        <p:spPr>
+          <a:xfrm>
+            <a:off x="6510528" y="5248656"/>
+            <a:ext cx="4343400" cy="109728"/>
+          </a:xfrm>
+          <a:prstGeom prst="rect">
+            <a:avLst/>
+          </a:prstGeom>
+          <a:noFill/>
+          <a:ln/>
+        </p:spPr>
+        <p:txBody>
+          <a:bodyPr wrap="square" lIns="0" tIns="0" rIns="0" bIns="0" rtlCol="0" anchor="ctr">
+            <a:normAutofit/>
+          </a:bodyPr>
+          <a:lstStyle/>
+          <a:p>
+            <a:pPr indent="0" marL="0">
+              <a:buNone/>
+            </a:pPr>
+            <a:r>
+              <a:rPr lang="en-US" sz="580" dirty="0">
+                <a:solidFill>
+                  <a:srgbClr val="6D756F"/>
+                </a:solidFill>
+                <a:latin typeface="Aptos" pitchFamily="34" charset="0"/>
+                <a:ea typeface="Aptos" pitchFamily="34" charset="-122"/>
+                <a:cs typeface="Aptos" pitchFamily="34" charset="-120"/>
+              </a:rPr>
+              <a:t>https://mp.weixin.qq.com/s/l7syIS-H-T1xvUKY3bqwdw</a:t>
+            </a:r>
+            <a:endParaRPr lang="en-US" sz="580" dirty="0"/>
+          </a:p>
+        </p:txBody>
+      </p:sp>
+      <p:sp>
+        <p:nvSpPr>
+          <p:cNvPr id="78" name="Shape 76"/>
           <p:cNvSpPr/>
           <p:nvPr/>
         </p:nvSpPr>
@@ -7899,7 +10014,7 @@
       </p:sp>
       <p:sp>
         <p:nvSpPr>
-          <p:cNvPr id="15" name="Text 13"/>
+          <p:cNvPr id="79" name="Text 77"/>
           <p:cNvSpPr/>
           <p:nvPr/>
         </p:nvSpPr>
@@ -7930,7 +10045,7 @@
                 <a:ea typeface="Microsoft YaHei" pitchFamily="34" charset="-122"/>
                 <a:cs typeface="Microsoft YaHei" pitchFamily="34" charset="-120"/>
               </a:rPr>
-              <a:t>分页规则</a:t>
+              <a:t>引用规则</a:t>
             </a:r>
             <a:endParaRPr lang="en-US" sz="780" dirty="0"/>
           </a:p>
@@ -7938,7 +10053,7 @@
       </p:sp>
       <p:sp>
         <p:nvSpPr>
-          <p:cNvPr id="16" name="Text 14"/>
+          <p:cNvPr id="80" name="Text 78"/>
           <p:cNvSpPr/>
           <p:nvPr/>
         </p:nvSpPr>
@@ -7971,7 +10086,7 @@
                 <a:ea typeface="Microsoft YaHei" pitchFamily="34" charset="-122"/>
                 <a:cs typeface="Microsoft YaHei" pitchFamily="34" charset="-120"/>
               </a:rPr>
-              <a:t>信息多的板块会自动拆成续页；正文保留引用编号，完整链接集中在来源索引。</a:t>
+              <a:t>正文引用编号与本页来源一一对应，未进入正文的公开来源保留在 JSON 审计记录中。</a:t>
             </a:r>
             <a:endParaRPr lang="en-US" sz="1020" dirty="0"/>
           </a:p>
@@ -8603,7 +10718,7 @@
                 <a:ea typeface="Aptos" pitchFamily="34" charset="-122"/>
                 <a:cs typeface="Aptos" pitchFamily="34" charset="-120"/>
               </a:rPr>
-              <a:t>[1]</a:t>
+              <a:t>[13]</a:t>
             </a:r>
             <a:endParaRPr lang="en-US" sz="680" dirty="0"/>
           </a:p>
@@ -8644,7 +10759,7 @@
                 <a:ea typeface="Microsoft YaHei" pitchFamily="34" charset="-122"/>
                 <a:cs typeface="Microsoft YaHei" pitchFamily="34" charset="-120"/>
               </a:rPr>
-              <a:t>中国电池网</a:t>
+              <a:t>公众号：锂电Plus｜美国</a:t>
             </a:r>
             <a:endParaRPr lang="en-US" sz="680" dirty="0"/>
           </a:p>
@@ -8685,7 +10800,7 @@
                 <a:ea typeface="Microsoft YaHei" pitchFamily="34" charset="-122"/>
                 <a:cs typeface="Microsoft YaHei" pitchFamily="34" charset="-120"/>
               </a:rPr>
-              <a:t>同体积容量击穿行业纪录！多氟多两款大圆柱磷酸铁锂换电方案发布_电池网</a:t>
+              <a:t>公众号：锂电Plus｜美国首个由车企全资的磷酸铁锂电池工厂投产</a:t>
             </a:r>
             <a:endParaRPr lang="en-US" sz="680" dirty="0"/>
           </a:p>
@@ -8726,7 +10841,7 @@
                 <a:ea typeface="Aptos" pitchFamily="34" charset="-122"/>
                 <a:cs typeface="Aptos" pitchFamily="34" charset="-120"/>
               </a:rPr>
-              <a:t>https://www.itdcw.com/news/chanpinxinwen/06251562M2026.html</a:t>
+              <a:t>https://mp.weixin.qq.com/s/HZGwuCl1muimY8T7K73m_Q</a:t>
             </a:r>
             <a:endParaRPr lang="en-US" sz="580" dirty="0"/>
           </a:p>
@@ -8790,7 +10905,7 @@
                 <a:ea typeface="Aptos" pitchFamily="34" charset="-122"/>
                 <a:cs typeface="Aptos" pitchFamily="34" charset="-120"/>
               </a:rPr>
-              <a:t>[2]</a:t>
+              <a:t>[14]</a:t>
             </a:r>
             <a:endParaRPr lang="en-US" sz="680" dirty="0"/>
           </a:p>
@@ -8831,7 +10946,7 @@
                 <a:ea typeface="Microsoft YaHei" pitchFamily="34" charset="-122"/>
                 <a:cs typeface="Microsoft YaHei" pitchFamily="34" charset="-120"/>
               </a:rPr>
-              <a:t>中国电池网</a:t>
+              <a:t>公众号：新能源材料｜今日锂</a:t>
             </a:r>
             <a:endParaRPr lang="en-US" sz="680" dirty="0"/>
           </a:p>
@@ -8872,7 +10987,7 @@
                 <a:ea typeface="Microsoft YaHei" pitchFamily="34" charset="-122"/>
                 <a:cs typeface="Microsoft YaHei" pitchFamily="34" charset="-120"/>
               </a:rPr>
-              <a:t>【正极材料周报】贵州毕节百万吨级磷酸铁锂项目刷新进展！宁德时代三元材料</a:t>
+              <a:t>公众号：新能源材料｜今日锂电动态综述</a:t>
             </a:r>
             <a:endParaRPr lang="en-US" sz="680" dirty="0"/>
           </a:p>
@@ -8913,7 +11028,7 @@
                 <a:ea typeface="Aptos" pitchFamily="34" charset="-122"/>
                 <a:cs typeface="Aptos" pitchFamily="34" charset="-120"/>
               </a:rPr>
-              <a:t>https://www.itdcw.com/news/dczk/0F61564b2026.html</a:t>
+              <a:t>https://mp.weixin.qq.com/s/K1uhSOUF-Y-TBPH25L2WAg</a:t>
             </a:r>
             <a:endParaRPr lang="en-US" sz="580" dirty="0"/>
           </a:p>
@@ -8977,7 +11092,7 @@
                 <a:ea typeface="Aptos" pitchFamily="34" charset="-122"/>
                 <a:cs typeface="Aptos" pitchFamily="34" charset="-120"/>
               </a:rPr>
-              <a:t>[3]</a:t>
+              <a:t>[15]</a:t>
             </a:r>
             <a:endParaRPr lang="en-US" sz="680" dirty="0"/>
           </a:p>
@@ -9018,7 +11133,7 @@
                 <a:ea typeface="Microsoft YaHei" pitchFamily="34" charset="-122"/>
                 <a:cs typeface="Microsoft YaHei" pitchFamily="34" charset="-120"/>
               </a:rPr>
-              <a:t>公众号：动力电池ZM｜10</a:t>
+              <a:t>公众号：磷酸铁钠NFPP电</a:t>
             </a:r>
             <a:endParaRPr lang="en-US" sz="680" dirty="0"/>
           </a:p>
@@ -9059,7 +11174,7 @@
                 <a:ea typeface="Microsoft YaHei" pitchFamily="34" charset="-122"/>
                 <a:cs typeface="Microsoft YaHei" pitchFamily="34" charset="-120"/>
               </a:rPr>
-              <a:t>公众号：动力电池ZM｜10万吨磷酸铁锂项目被叫停！</a:t>
+              <a:t>公众号：磷酸铁钠NFPP电池产业基地｜磷酸铁锂“半壁江山”集体挺价</a:t>
             </a:r>
             <a:endParaRPr lang="en-US" sz="680" dirty="0"/>
           </a:p>
@@ -9100,7 +11215,7 @@
                 <a:ea typeface="Aptos" pitchFamily="34" charset="-122"/>
                 <a:cs typeface="Aptos" pitchFamily="34" charset="-120"/>
               </a:rPr>
-              <a:t>https://mp.weixin.qq.com/s/LnH18MJGr6OtkonOTxk4ig</a:t>
+              <a:t>https://mp.weixin.qq.com/s/SQxrgkUv1sAUSTlEY38rvA</a:t>
             </a:r>
             <a:endParaRPr lang="en-US" sz="580" dirty="0"/>
           </a:p>
@@ -9164,7 +11279,7 @@
                 <a:ea typeface="Aptos" pitchFamily="34" charset="-122"/>
                 <a:cs typeface="Aptos" pitchFamily="34" charset="-120"/>
               </a:rPr>
-              <a:t>[4]</a:t>
+              <a:t>[16]</a:t>
             </a:r>
             <a:endParaRPr lang="en-US" sz="680" dirty="0"/>
           </a:p>
@@ -9205,7 +11320,7 @@
                 <a:ea typeface="Microsoft YaHei" pitchFamily="34" charset="-122"/>
                 <a:cs typeface="Microsoft YaHei" pitchFamily="34" charset="-120"/>
               </a:rPr>
-              <a:t>公众号：磷酸铁钠NFPP电</a:t>
+              <a:t>公众号：动力电池ZM｜七部</a:t>
             </a:r>
             <a:endParaRPr lang="en-US" sz="680" dirty="0"/>
           </a:p>
@@ -9246,7 +11361,7 @@
                 <a:ea typeface="Microsoft YaHei" pitchFamily="34" charset="-122"/>
                 <a:cs typeface="Microsoft YaHei" pitchFamily="34" charset="-120"/>
               </a:rPr>
-              <a:t>公众号：磷酸铁钠NFPP电池产业基地｜磷酸铁锂“半壁江山”集体挺价</a:t>
+              <a:t>公众号：动力电池ZM｜七部门联合出手！报废机动车非法回收拆解专项整治启</a:t>
             </a:r>
             <a:endParaRPr lang="en-US" sz="680" dirty="0"/>
           </a:p>
@@ -9287,7 +11402,7 @@
                 <a:ea typeface="Aptos" pitchFamily="34" charset="-122"/>
                 <a:cs typeface="Aptos" pitchFamily="34" charset="-120"/>
               </a:rPr>
-              <a:t>https://mp.weixin.qq.com/s/SQxrgkUv1sAUSTlEY38rvA</a:t>
+              <a:t>https://mp.weixin.qq.com/s/O0DHCEfWX6GID9tg_PtaeA</a:t>
             </a:r>
             <a:endParaRPr lang="en-US" sz="580" dirty="0"/>
           </a:p>
@@ -9351,7 +11466,7 @@
                 <a:ea typeface="Aptos" pitchFamily="34" charset="-122"/>
                 <a:cs typeface="Aptos" pitchFamily="34" charset="-120"/>
               </a:rPr>
-              <a:t>[5]</a:t>
+              <a:t>[17]</a:t>
             </a:r>
             <a:endParaRPr lang="en-US" sz="680" dirty="0"/>
           </a:p>
@@ -9392,7 +11507,7 @@
                 <a:ea typeface="Microsoft YaHei" pitchFamily="34" charset="-122"/>
                 <a:cs typeface="Microsoft YaHei" pitchFamily="34" charset="-120"/>
               </a:rPr>
-              <a:t>公众号：PHY正极材料｜“</a:t>
+              <a:t>公众号：Mysteel动力</a:t>
             </a:r>
             <a:endParaRPr lang="en-US" sz="680" dirty="0"/>
           </a:p>
@@ -9433,7 +11548,7 @@
                 <a:ea typeface="Microsoft YaHei" pitchFamily="34" charset="-122"/>
                 <a:cs typeface="Microsoft YaHei" pitchFamily="34" charset="-120"/>
               </a:rPr>
-              <a:t>公众号：PHY正极材料｜“一步”登顶！协鑫锂电一步物理干法荣膺“技术卓</a:t>
+              <a:t>公众号：Mysteel动力电池回收｜2026年两批资金已全部下达，20</a:t>
             </a:r>
             <a:endParaRPr lang="en-US" sz="680" dirty="0"/>
           </a:p>
@@ -9474,7 +11589,7 @@
                 <a:ea typeface="Aptos" pitchFamily="34" charset="-122"/>
                 <a:cs typeface="Aptos" pitchFamily="34" charset="-120"/>
               </a:rPr>
-              <a:t>https://mp.weixin.qq.com/s/YF_FIO3hdrNlCK3l2RAdZg</a:t>
+              <a:t>https://mp.weixin.qq.com/s/_Vy09DJoQHdSecG8GIWo4A</a:t>
             </a:r>
             <a:endParaRPr lang="en-US" sz="580" dirty="0"/>
           </a:p>
@@ -9538,7 +11653,7 @@
                 <a:ea typeface="Aptos" pitchFamily="34" charset="-122"/>
                 <a:cs typeface="Aptos" pitchFamily="34" charset="-120"/>
               </a:rPr>
-              <a:t>[6]</a:t>
+              <a:t>[18]</a:t>
             </a:r>
             <a:endParaRPr lang="en-US" sz="680" dirty="0"/>
           </a:p>
@@ -9579,7 +11694,7 @@
                 <a:ea typeface="Microsoft YaHei" pitchFamily="34" charset="-122"/>
                 <a:cs typeface="Microsoft YaHei" pitchFamily="34" charset="-120"/>
               </a:rPr>
-              <a:t>公众号：锂电Plus｜我国</a:t>
+              <a:t>公众号：江西赣锋锂电科技股</a:t>
             </a:r>
             <a:endParaRPr lang="en-US" sz="680" dirty="0"/>
           </a:p>
@@ -9620,7 +11735,7 @@
                 <a:ea typeface="Microsoft YaHei" pitchFamily="34" charset="-122"/>
                 <a:cs typeface="Microsoft YaHei" pitchFamily="34" charset="-120"/>
               </a:rPr>
-              <a:t>公众号：锂电Plus｜我国磷酸锰铁锂技术专利分析与产业前景展望</a:t>
+              <a:t>公众号：江西赣锋锂电科技股份有限公司｜赣锋锂电入选彭博新能源财经（BN</a:t>
             </a:r>
             <a:endParaRPr lang="en-US" sz="680" dirty="0"/>
           </a:p>
@@ -9661,7 +11776,7 @@
                 <a:ea typeface="Aptos" pitchFamily="34" charset="-122"/>
                 <a:cs typeface="Aptos" pitchFamily="34" charset="-120"/>
               </a:rPr>
-              <a:t>https://mp.weixin.qq.com/s/BDLWrLG8jbvba8_mtYKbew</a:t>
+              <a:t>https://mp.weixin.qq.com/s/Khf4S4AdWTyUQMs6JUR-4A</a:t>
             </a:r>
             <a:endParaRPr lang="en-US" sz="580" dirty="0"/>
           </a:p>
@@ -9725,7 +11840,7 @@
                 <a:ea typeface="Aptos" pitchFamily="34" charset="-122"/>
                 <a:cs typeface="Aptos" pitchFamily="34" charset="-120"/>
               </a:rPr>
-              <a:t>[7]</a:t>
+              <a:t>[19]</a:t>
             </a:r>
             <a:endParaRPr lang="en-US" sz="680" dirty="0"/>
           </a:p>
@@ -9766,7 +11881,7 @@
                 <a:ea typeface="Microsoft YaHei" pitchFamily="34" charset="-122"/>
                 <a:cs typeface="Microsoft YaHei" pitchFamily="34" charset="-120"/>
               </a:rPr>
-              <a:t>公众号：锂电Plus｜工信</a:t>
+              <a:t>公众号：PHY正极材料｜“</a:t>
             </a:r>
             <a:endParaRPr lang="en-US" sz="680" dirty="0"/>
           </a:p>
@@ -9807,7 +11922,7 @@
                 <a:ea typeface="Microsoft YaHei" pitchFamily="34" charset="-122"/>
                 <a:cs typeface="Microsoft YaHei" pitchFamily="34" charset="-120"/>
               </a:rPr>
-              <a:t>公众号：锂电Plus｜工信部：加大固态电池正负极材料、固态电解质攻关</a:t>
+              <a:t>公众号：PHY正极材料｜“一步”登顶！协鑫锂电一步物理干法荣膺“技术卓</a:t>
             </a:r>
             <a:endParaRPr lang="en-US" sz="680" dirty="0"/>
           </a:p>
@@ -9848,7 +11963,7 @@
                 <a:ea typeface="Aptos" pitchFamily="34" charset="-122"/>
                 <a:cs typeface="Aptos" pitchFamily="34" charset="-120"/>
               </a:rPr>
-              <a:t>https://mp.weixin.qq.com/s/RcAYFnrXHEDsZVMmOY3jUw</a:t>
+              <a:t>https://mp.weixin.qq.com/s/YF_FIO3hdrNlCK3l2RAdZg</a:t>
             </a:r>
             <a:endParaRPr lang="en-US" sz="580" dirty="0"/>
           </a:p>
@@ -9912,7 +12027,7 @@
                 <a:ea typeface="Aptos" pitchFamily="34" charset="-122"/>
                 <a:cs typeface="Aptos" pitchFamily="34" charset="-120"/>
               </a:rPr>
-              <a:t>[8]</a:t>
+              <a:t>[20]</a:t>
             </a:r>
             <a:endParaRPr lang="en-US" sz="680" dirty="0"/>
           </a:p>
@@ -9953,7 +12068,7 @@
                 <a:ea typeface="Microsoft YaHei" pitchFamily="34" charset="-122"/>
                 <a:cs typeface="Microsoft YaHei" pitchFamily="34" charset="-120"/>
               </a:rPr>
-              <a:t>公众号：锂电行业动态｜总投</a:t>
+              <a:t>公众号：当升科技｜矿冶集团</a:t>
             </a:r>
             <a:endParaRPr lang="en-US" sz="680" dirty="0"/>
           </a:p>
@@ -9994,7 +12109,7 @@
                 <a:ea typeface="Microsoft YaHei" pitchFamily="34" charset="-122"/>
                 <a:cs typeface="Microsoft YaHei" pitchFamily="34" charset="-120"/>
               </a:rPr>
-              <a:t>公众号：锂电行业动态｜总投资73.23亿元！贵州毕节百万吨级磷酸铁锂项</a:t>
+              <a:t>公众号：当升科技｜矿冶集团当升科技荣登2026年《财富》中国科技50强</a:t>
             </a:r>
             <a:endParaRPr lang="en-US" sz="680" dirty="0"/>
           </a:p>
@@ -10035,7 +12150,7 @@
                 <a:ea typeface="Aptos" pitchFamily="34" charset="-122"/>
                 <a:cs typeface="Aptos" pitchFamily="34" charset="-120"/>
               </a:rPr>
-              <a:t>https://mp.weixin.qq.com/s/T8NoqoIwc4eukgLynjThCA</a:t>
+              <a:t>https://mp.weixin.qq.com/s/evX4irOq-Q5bdvjiNfiATg</a:t>
             </a:r>
             <a:endParaRPr lang="en-US" sz="580" dirty="0"/>
           </a:p>
@@ -10099,7 +12214,7 @@
                 <a:ea typeface="Aptos" pitchFamily="34" charset="-122"/>
                 <a:cs typeface="Aptos" pitchFamily="34" charset="-120"/>
               </a:rPr>
-              <a:t>[9]</a:t>
+              <a:t>[21]</a:t>
             </a:r>
             <a:endParaRPr lang="en-US" sz="680" dirty="0"/>
           </a:p>
@@ -10140,7 +12255,7 @@
                 <a:ea typeface="Microsoft YaHei" pitchFamily="34" charset="-122"/>
                 <a:cs typeface="Microsoft YaHei" pitchFamily="34" charset="-120"/>
               </a:rPr>
-              <a:t>公众号：动力电池ZM｜5万</a:t>
+              <a:t>公众号：万润新能源｜万润新</a:t>
             </a:r>
             <a:endParaRPr lang="en-US" sz="680" dirty="0"/>
           </a:p>
@@ -10181,7 +12296,7 @@
                 <a:ea typeface="Microsoft YaHei" pitchFamily="34" charset="-122"/>
                 <a:cs typeface="Microsoft YaHei" pitchFamily="34" charset="-120"/>
               </a:rPr>
-              <a:t>公众号：动力电池ZM｜5万吨高压实磷酸铁锂项目落地山西大同！</a:t>
+              <a:t>公众号：万润新能源｜万润新能荣获【金锂杯】供应链卓越贡献奖</a:t>
             </a:r>
             <a:endParaRPr lang="en-US" sz="680" dirty="0"/>
           </a:p>
@@ -10222,7 +12337,7 @@
                 <a:ea typeface="Aptos" pitchFamily="34" charset="-122"/>
                 <a:cs typeface="Aptos" pitchFamily="34" charset="-120"/>
               </a:rPr>
-              <a:t>https://mp.weixin.qq.com/s/KG8A_zJAoVwG1n1SkfgVQg</a:t>
+              <a:t>https://mp.weixin.qq.com/s/xfhknGqQjDY7HFw1IM2few</a:t>
             </a:r>
             <a:endParaRPr lang="en-US" sz="580" dirty="0"/>
           </a:p>
@@ -10286,7 +12401,7 @@
                 <a:ea typeface="Aptos" pitchFamily="34" charset="-122"/>
                 <a:cs typeface="Aptos" pitchFamily="34" charset="-120"/>
               </a:rPr>
-              <a:t>[10]</a:t>
+              <a:t>[22]</a:t>
             </a:r>
             <a:endParaRPr lang="en-US" sz="680" dirty="0"/>
           </a:p>
@@ -10327,7 +12442,7 @@
                 <a:ea typeface="Microsoft YaHei" pitchFamily="34" charset="-122"/>
                 <a:cs typeface="Microsoft YaHei" pitchFamily="34" charset="-120"/>
               </a:rPr>
-              <a:t>公众号：锂电行业动态｜拟募</a:t>
+              <a:t>公众号：超威电池｜领跑两轮</a:t>
             </a:r>
             <a:endParaRPr lang="en-US" sz="680" dirty="0"/>
           </a:p>
@@ -10368,7 +12483,7 @@
                 <a:ea typeface="Microsoft YaHei" pitchFamily="34" charset="-122"/>
                 <a:cs typeface="Microsoft YaHei" pitchFamily="34" charset="-120"/>
               </a:rPr>
-              <a:t>公众号：锂电行业动态｜拟募资37.8亿元加码50万吨磷酸铁锂产能！金川</a:t>
+              <a:t>公众号：超威电池｜领跑两轮钠电行业新赛道！超威集团安庆钠离子电池一期项</a:t>
             </a:r>
             <a:endParaRPr lang="en-US" sz="680" dirty="0"/>
           </a:p>
@@ -10409,7 +12524,7 @@
                 <a:ea typeface="Aptos" pitchFamily="34" charset="-122"/>
                 <a:cs typeface="Aptos" pitchFamily="34" charset="-120"/>
               </a:rPr>
-              <a:t>https://mp.weixin.qq.com/s/Q_ZcGhqARBALMj5u7ZhNNw</a:t>
+              <a:t>https://mp.weixin.qq.com/s/bkL_Aw5G9ANOdoltQN57Hw</a:t>
             </a:r>
             <a:endParaRPr lang="en-US" sz="580" dirty="0"/>
           </a:p>
@@ -10473,7 +12588,7 @@
                 <a:ea typeface="Aptos" pitchFamily="34" charset="-122"/>
                 <a:cs typeface="Aptos" pitchFamily="34" charset="-120"/>
               </a:rPr>
-              <a:t>[11]</a:t>
+              <a:t>[23]</a:t>
             </a:r>
             <a:endParaRPr lang="en-US" sz="680" dirty="0"/>
           </a:p>
@@ -10514,7 +12629,7 @@
                 <a:ea typeface="Microsoft YaHei" pitchFamily="34" charset="-122"/>
                 <a:cs typeface="Microsoft YaHei" pitchFamily="34" charset="-120"/>
               </a:rPr>
-              <a:t>公众号：今日锂电｜蝉联全球</a:t>
+              <a:t>公众号：锂想之路｜深度解读</a:t>
             </a:r>
             <a:endParaRPr lang="en-US" sz="680" dirty="0"/>
           </a:p>
@@ -10555,7 +12670,7 @@
                 <a:ea typeface="Microsoft YaHei" pitchFamily="34" charset="-122"/>
                 <a:cs typeface="Microsoft YaHei" pitchFamily="34" charset="-120"/>
               </a:rPr>
-              <a:t>公众号：今日锂电｜蝉联全球第九！蜂巢能源1-5月动力电池装车量增速达3</a:t>
+              <a:t>公众号：锂想之路｜深度解读欧盟22国承诺储能装机量增加30-35GW</a:t>
             </a:r>
             <a:endParaRPr lang="en-US" sz="680" dirty="0"/>
           </a:p>
@@ -10596,7 +12711,7 @@
                 <a:ea typeface="Aptos" pitchFamily="34" charset="-122"/>
                 <a:cs typeface="Aptos" pitchFamily="34" charset="-120"/>
               </a:rPr>
-              <a:t>https://mp.weixin.qq.com/s/bjSstXL8ks5qqcn3xKrb3w</a:t>
+              <a:t>https://mp.weixin.qq.com/s/kZkcCy5ObmDUy-A12QQXqw</a:t>
             </a:r>
             <a:endParaRPr lang="en-US" sz="580" dirty="0"/>
           </a:p>
@@ -10660,7 +12775,7 @@
                 <a:ea typeface="Aptos" pitchFamily="34" charset="-122"/>
                 <a:cs typeface="Aptos" pitchFamily="34" charset="-120"/>
               </a:rPr>
-              <a:t>[12]</a:t>
+              <a:t>[24]</a:t>
             </a:r>
             <a:endParaRPr lang="en-US" sz="680" dirty="0"/>
           </a:p>
@@ -10701,7 +12816,7 @@
                 <a:ea typeface="Microsoft YaHei" pitchFamily="34" charset="-122"/>
                 <a:cs typeface="Microsoft YaHei" pitchFamily="34" charset="-120"/>
               </a:rPr>
-              <a:t>公众号：新能源材料｜今日锂</a:t>
+              <a:t>公众号：Mysteel动力</a:t>
             </a:r>
             <a:endParaRPr lang="en-US" sz="680" dirty="0"/>
           </a:p>
@@ -10742,7 +12857,7 @@
                 <a:ea typeface="Microsoft YaHei" pitchFamily="34" charset="-122"/>
                 <a:cs typeface="Microsoft YaHei" pitchFamily="34" charset="-120"/>
               </a:rPr>
-              <a:t>公众号：新能源材料｜今日锂电动态综述</a:t>
+              <a:t>公众号：Mysteel动力电池回收｜重磅！五部门联合执法！全国废旧动力</a:t>
             </a:r>
             <a:endParaRPr lang="en-US" sz="680" dirty="0"/>
           </a:p>
@@ -10783,2924 +12898,7 @@
                 <a:ea typeface="Aptos" pitchFamily="34" charset="-122"/>
                 <a:cs typeface="Aptos" pitchFamily="34" charset="-120"/>
               </a:rPr>
-              <a:t>https://mp.weixin.qq.com/s/K1uhSOUF-Y-TBPH25L2WAg</a:t>
-            </a:r>
-            <a:endParaRPr lang="en-US" sz="580" dirty="0"/>
-          </a:p>
-        </p:txBody>
-      </p:sp>
-      <p:sp>
-        <p:nvSpPr>
-          <p:cNvPr id="78" name="Shape 76"/>
-          <p:cNvSpPr/>
-          <p:nvPr/>
-        </p:nvSpPr>
-        <p:spPr>
-          <a:xfrm>
-            <a:off x="658368" y="5779008"/>
-            <a:ext cx="1463040" cy="292608"/>
-          </a:xfrm>
-          <a:prstGeom prst="rect">
-            <a:avLst/>
-          </a:prstGeom>
-          <a:solidFill>
-            <a:srgbClr val="121212"/>
-          </a:solidFill>
-          <a:ln w="12700">
-            <a:solidFill>
-              <a:srgbClr val="121212"/>
-            </a:solidFill>
-            <a:prstDash val="solid"/>
-          </a:ln>
-        </p:spPr>
-      </p:sp>
-      <p:sp>
-        <p:nvSpPr>
-          <p:cNvPr id="79" name="Text 77"/>
-          <p:cNvSpPr/>
-          <p:nvPr/>
-        </p:nvSpPr>
-        <p:spPr>
-          <a:xfrm>
-            <a:off x="804672" y="5870448"/>
-            <a:ext cx="1188720" cy="109728"/>
-          </a:xfrm>
-          <a:prstGeom prst="rect">
-            <a:avLst/>
-          </a:prstGeom>
-          <a:noFill/>
-          <a:ln/>
-        </p:spPr>
-        <p:txBody>
-          <a:bodyPr wrap="square" lIns="0" tIns="0" rIns="0" bIns="0" rtlCol="0" anchor="ctr"/>
-          <a:lstStyle/>
-          <a:p>
-            <a:pPr indent="0" marL="0">
-              <a:buNone/>
-            </a:pPr>
-            <a:r>
-              <a:rPr lang="en-US" sz="780" b="1" dirty="0">
-                <a:solidFill>
-                  <a:srgbClr val="FFFFFF"/>
-                </a:solidFill>
-                <a:latin typeface="Microsoft YaHei" pitchFamily="34" charset="0"/>
-                <a:ea typeface="Microsoft YaHei" pitchFamily="34" charset="-122"/>
-                <a:cs typeface="Microsoft YaHei" pitchFamily="34" charset="-120"/>
-              </a:rPr>
-              <a:t>引用规则</a:t>
-            </a:r>
-            <a:endParaRPr lang="en-US" sz="780" dirty="0"/>
-          </a:p>
-        </p:txBody>
-      </p:sp>
-      <p:sp>
-        <p:nvSpPr>
-          <p:cNvPr id="80" name="Text 78"/>
-          <p:cNvSpPr/>
-          <p:nvPr/>
-        </p:nvSpPr>
-        <p:spPr>
-          <a:xfrm>
-            <a:off x="2286000" y="5843016"/>
-            <a:ext cx="8778240" cy="164592"/>
-          </a:xfrm>
-          <a:prstGeom prst="rect">
-            <a:avLst/>
-          </a:prstGeom>
-          <a:noFill/>
-          <a:ln/>
-        </p:spPr>
-        <p:txBody>
-          <a:bodyPr wrap="square" lIns="0" tIns="0" rIns="0" bIns="0" rtlCol="0" anchor="ctr">
-            <a:normAutofit/>
-          </a:bodyPr>
-          <a:lstStyle/>
-          <a:p>
-            <a:pPr indent="0" marL="0">
-              <a:buNone/>
-            </a:pPr>
-            <a:r>
-              <a:rPr lang="en-US" sz="1020" b="1" dirty="0">
-                <a:solidFill>
-                  <a:srgbClr val="121212"/>
-                </a:solidFill>
-                <a:latin typeface="Microsoft YaHei" pitchFamily="34" charset="0"/>
-                <a:ea typeface="Microsoft YaHei" pitchFamily="34" charset="-122"/>
-                <a:cs typeface="Microsoft YaHei" pitchFamily="34" charset="-120"/>
-              </a:rPr>
-              <a:t>正文引用编号与本页来源一一对应，未进入正文的公开来源保留在 JSON 审计记录中。</a:t>
-            </a:r>
-            <a:endParaRPr lang="en-US" sz="1020" dirty="0"/>
-          </a:p>
-        </p:txBody>
-      </p:sp>
-    </p:spTree>
-  </p:cSld>
-  <p:clrMapOvr>
-    <a:masterClrMapping/>
-  </p:clrMapOvr>
-</p:sld>
-</file>
-
-<file path=ppt/slides/slide9.xml><?xml version="1.0" encoding="utf-8"?>
-<p:sld xmlns:a="http://schemas.openxmlformats.org/drawingml/2006/main" xmlns:r="http://schemas.openxmlformats.org/officeDocument/2006/relationships" xmlns:p="http://schemas.openxmlformats.org/presentationml/2006/main">
-  <p:cSld name="Slide 9">
-    <p:bg>
-      <p:bgPr>
-        <a:solidFill>
-          <a:srgbClr val="FFFFFF"/>
-        </a:solidFill>
-      </p:bgPr>
-    </p:bg>
-    <p:spTree>
-      <p:nvGrpSpPr>
-        <p:cNvPr id="1" name=""/>
-        <p:cNvGrpSpPr/>
-        <p:nvPr/>
-      </p:nvGrpSpPr>
-      <p:grpSpPr>
-        <a:xfrm>
-          <a:off x="0" y="0"/>
-          <a:ext cx="0" cy="0"/>
-          <a:chOff x="0" y="0"/>
-          <a:chExt cx="0" cy="0"/>
-        </a:xfrm>
-      </p:grpSpPr>
-      <p:sp>
-        <p:nvSpPr>
-          <p:cNvPr id="2" name="Text 0"/>
-          <p:cNvSpPr/>
-          <p:nvPr/>
-        </p:nvSpPr>
-        <p:spPr>
-          <a:xfrm>
-            <a:off x="502920" y="347472"/>
-            <a:ext cx="594360" cy="411480"/>
-          </a:xfrm>
-          <a:prstGeom prst="rect">
-            <a:avLst/>
-          </a:prstGeom>
-          <a:noFill/>
-          <a:ln/>
-        </p:spPr>
-        <p:txBody>
-          <a:bodyPr wrap="square" lIns="0" tIns="0" rIns="0" bIns="0" rtlCol="0" anchor="ctr"/>
-          <a:lstStyle/>
-          <a:p>
-            <a:pPr indent="0" marL="0">
-              <a:buNone/>
-            </a:pPr>
-            <a:r>
-              <a:rPr lang="en-US" sz="2200" b="1" dirty="0">
-                <a:solidFill>
-                  <a:srgbClr val="121212"/>
-                </a:solidFill>
-                <a:latin typeface="Aptos" pitchFamily="34" charset="0"/>
-                <a:ea typeface="Aptos" pitchFamily="34" charset="-122"/>
-                <a:cs typeface="Aptos" pitchFamily="34" charset="-120"/>
-              </a:rPr>
-              <a:t>9.</a:t>
-            </a:r>
-            <a:endParaRPr lang="en-US" sz="2200" dirty="0"/>
-          </a:p>
-        </p:txBody>
-      </p:sp>
-      <p:sp>
-        <p:nvSpPr>
-          <p:cNvPr id="3" name="Text 1"/>
-          <p:cNvSpPr/>
-          <p:nvPr/>
-        </p:nvSpPr>
-        <p:spPr>
-          <a:xfrm>
-            <a:off x="1143000" y="393192"/>
-            <a:ext cx="4754880" cy="256032"/>
-          </a:xfrm>
-          <a:prstGeom prst="rect">
-            <a:avLst/>
-          </a:prstGeom>
-          <a:noFill/>
-          <a:ln/>
-        </p:spPr>
-        <p:txBody>
-          <a:bodyPr wrap="square" lIns="0" tIns="0" rIns="0" bIns="0" rtlCol="0" anchor="ctr"/>
-          <a:lstStyle/>
-          <a:p>
-            <a:pPr indent="0" marL="0">
-              <a:buNone/>
-            </a:pPr>
-            <a:r>
-              <a:rPr lang="en-US" sz="850" b="1" dirty="0">
-                <a:solidFill>
-                  <a:srgbClr val="487052"/>
-                </a:solidFill>
-                <a:latin typeface="Aptos" pitchFamily="34" charset="0"/>
-                <a:ea typeface="Aptos" pitchFamily="34" charset="-122"/>
-                <a:cs typeface="Aptos" pitchFamily="34" charset="-120"/>
-              </a:rPr>
-              <a:t>SOURCE INDEX</a:t>
-            </a:r>
-            <a:endParaRPr lang="en-US" sz="850" dirty="0"/>
-          </a:p>
-        </p:txBody>
-      </p:sp>
-      <p:sp>
-        <p:nvSpPr>
-          <p:cNvPr id="4" name="Text 2"/>
-          <p:cNvSpPr/>
-          <p:nvPr/>
-        </p:nvSpPr>
-        <p:spPr>
-          <a:xfrm>
-            <a:off x="10287000" y="393192"/>
-            <a:ext cx="1371600" cy="219456"/>
-          </a:xfrm>
-          <a:prstGeom prst="rect">
-            <a:avLst/>
-          </a:prstGeom>
-          <a:noFill/>
-          <a:ln/>
-        </p:spPr>
-        <p:txBody>
-          <a:bodyPr wrap="square" lIns="0" tIns="0" rIns="0" bIns="0" rtlCol="0" anchor="ctr"/>
-          <a:lstStyle/>
-          <a:p>
-            <a:pPr algn="r" indent="0" marL="0">
-              <a:buNone/>
-            </a:pPr>
-            <a:r>
-              <a:rPr lang="en-US" sz="800" dirty="0">
-                <a:solidFill>
-                  <a:srgbClr val="6D756F"/>
-                </a:solidFill>
-                <a:latin typeface="Aptos" pitchFamily="34" charset="0"/>
-                <a:ea typeface="Aptos" pitchFamily="34" charset="-122"/>
-                <a:cs typeface="Aptos" pitchFamily="34" charset="-120"/>
-              </a:rPr>
-              <a:t>2026-07-07</a:t>
-            </a:r>
-            <a:endParaRPr lang="en-US" sz="800" dirty="0"/>
-          </a:p>
-        </p:txBody>
-      </p:sp>
-      <p:sp>
-        <p:nvSpPr>
-          <p:cNvPr id="5" name="Shape 3"/>
-          <p:cNvSpPr/>
-          <p:nvPr/>
-        </p:nvSpPr>
-        <p:spPr>
-          <a:xfrm>
-            <a:off x="502920" y="786384"/>
-            <a:ext cx="11201400" cy="0"/>
-          </a:xfrm>
-          <a:prstGeom prst="line">
-            <a:avLst/>
-          </a:prstGeom>
-          <a:noFill/>
-          <a:ln w="10160">
-            <a:solidFill>
-              <a:srgbClr val="DADADA"/>
-            </a:solidFill>
-            <a:prstDash val="solid"/>
-          </a:ln>
-        </p:spPr>
-      </p:sp>
-      <p:sp>
-        <p:nvSpPr>
-          <p:cNvPr id="6" name="Shape 4"/>
-          <p:cNvSpPr/>
-          <p:nvPr/>
-        </p:nvSpPr>
-        <p:spPr>
-          <a:xfrm>
-            <a:off x="502920" y="6327648"/>
-            <a:ext cx="11201400" cy="0"/>
-          </a:xfrm>
-          <a:prstGeom prst="line">
-            <a:avLst/>
-          </a:prstGeom>
-          <a:noFill/>
-          <a:ln w="8890">
-            <a:solidFill>
-              <a:srgbClr val="DADADA"/>
-            </a:solidFill>
-            <a:prstDash val="solid"/>
-          </a:ln>
-        </p:spPr>
-      </p:sp>
-      <p:sp>
-        <p:nvSpPr>
-          <p:cNvPr id="7" name="Text 5"/>
-          <p:cNvSpPr/>
-          <p:nvPr/>
-        </p:nvSpPr>
-        <p:spPr>
-          <a:xfrm>
-            <a:off x="502920" y="6437376"/>
-            <a:ext cx="8046720" cy="182880"/>
-          </a:xfrm>
-          <a:prstGeom prst="rect">
-            <a:avLst/>
-          </a:prstGeom>
-          <a:noFill/>
-          <a:ln/>
-        </p:spPr>
-        <p:txBody>
-          <a:bodyPr wrap="square" lIns="0" tIns="0" rIns="0" bIns="0" rtlCol="0" anchor="ctr"/>
-          <a:lstStyle/>
-          <a:p>
-            <a:pPr indent="0" marL="0">
-              <a:buNone/>
-            </a:pPr>
-            <a:r>
-              <a:rPr lang="en-US" sz="730" dirty="0">
-                <a:solidFill>
-                  <a:srgbClr val="6D756F"/>
-                </a:solidFill>
-                <a:latin typeface="Microsoft YaHei" pitchFamily="34" charset="0"/>
-                <a:ea typeface="Microsoft YaHei" pitchFamily="34" charset="-122"/>
-                <a:cs typeface="Microsoft YaHei" pitchFamily="34" charset="-120"/>
-              </a:rPr>
-              <a:t>磷酸铁锂行业早报｜公开来源自动生成｜仅作行业观察，不构成投资建议</a:t>
-            </a:r>
-            <a:endParaRPr lang="en-US" sz="730" dirty="0"/>
-          </a:p>
-        </p:txBody>
-      </p:sp>
-      <p:sp>
-        <p:nvSpPr>
-          <p:cNvPr id="8" name="Text 6"/>
-          <p:cNvSpPr/>
-          <p:nvPr/>
-        </p:nvSpPr>
-        <p:spPr>
-          <a:xfrm>
-            <a:off x="11201400" y="6419088"/>
-            <a:ext cx="502920" cy="201168"/>
-          </a:xfrm>
-          <a:prstGeom prst="rect">
-            <a:avLst/>
-          </a:prstGeom>
-          <a:noFill/>
-          <a:ln/>
-        </p:spPr>
-        <p:txBody>
-          <a:bodyPr wrap="square" lIns="0" tIns="0" rIns="0" bIns="0" rtlCol="0" anchor="ctr"/>
-          <a:lstStyle/>
-          <a:p>
-            <a:pPr algn="r" indent="0" marL="0">
-              <a:buNone/>
-            </a:pPr>
-            <a:r>
-              <a:rPr lang="en-US" sz="730" dirty="0">
-                <a:solidFill>
-                  <a:srgbClr val="6D756F"/>
-                </a:solidFill>
-                <a:latin typeface="Aptos" pitchFamily="34" charset="0"/>
-                <a:ea typeface="Aptos" pitchFamily="34" charset="-122"/>
-                <a:cs typeface="Aptos" pitchFamily="34" charset="-120"/>
-              </a:rPr>
-              <a:t>09</a:t>
-            </a:r>
-            <a:endParaRPr lang="en-US" sz="730" dirty="0"/>
-          </a:p>
-        </p:txBody>
-      </p:sp>
-      <p:sp>
-        <p:nvSpPr>
-          <p:cNvPr id="9" name="Text 7"/>
-          <p:cNvSpPr/>
-          <p:nvPr/>
-        </p:nvSpPr>
-        <p:spPr>
-          <a:xfrm>
-            <a:off x="1143000" y="932688"/>
-            <a:ext cx="4114800" cy="384048"/>
-          </a:xfrm>
-          <a:prstGeom prst="rect">
-            <a:avLst/>
-          </a:prstGeom>
-          <a:noFill/>
-          <a:ln/>
-        </p:spPr>
-        <p:txBody>
-          <a:bodyPr wrap="square" lIns="0" tIns="0" rIns="0" bIns="0" rtlCol="0" anchor="ctr"/>
-          <a:lstStyle/>
-          <a:p>
-            <a:pPr indent="0" marL="0">
-              <a:buNone/>
-            </a:pPr>
-            <a:r>
-              <a:rPr lang="en-US" sz="2000" b="1" dirty="0">
-                <a:solidFill>
-                  <a:srgbClr val="121212"/>
-                </a:solidFill>
-                <a:latin typeface="Microsoft YaHei" pitchFamily="34" charset="0"/>
-                <a:ea typeface="Microsoft YaHei" pitchFamily="34" charset="-122"/>
-                <a:cs typeface="Microsoft YaHei" pitchFamily="34" charset="-120"/>
-              </a:rPr>
-              <a:t>来源索引与可追溯性</a:t>
-            </a:r>
-            <a:endParaRPr lang="en-US" sz="2000" dirty="0"/>
-          </a:p>
-        </p:txBody>
-      </p:sp>
-      <p:sp>
-        <p:nvSpPr>
-          <p:cNvPr id="10" name="Shape 8"/>
-          <p:cNvSpPr/>
-          <p:nvPr/>
-        </p:nvSpPr>
-        <p:spPr>
-          <a:xfrm>
-            <a:off x="658368" y="1444752"/>
-            <a:ext cx="566928" cy="310896"/>
-          </a:xfrm>
-          <a:prstGeom prst="rect">
-            <a:avLst/>
-          </a:prstGeom>
-          <a:solidFill>
-            <a:srgbClr val="121212"/>
-          </a:solidFill>
-          <a:ln w="6350">
-            <a:solidFill>
-              <a:srgbClr val="DADADA"/>
-            </a:solidFill>
-            <a:prstDash val="solid"/>
-          </a:ln>
-        </p:spPr>
-      </p:sp>
-      <p:sp>
-        <p:nvSpPr>
-          <p:cNvPr id="11" name="Text 9"/>
-          <p:cNvSpPr/>
-          <p:nvPr/>
-        </p:nvSpPr>
-        <p:spPr>
-          <a:xfrm>
-            <a:off x="731520" y="1536192"/>
-            <a:ext cx="420624" cy="128016"/>
-          </a:xfrm>
-          <a:prstGeom prst="rect">
-            <a:avLst/>
-          </a:prstGeom>
-          <a:noFill/>
-          <a:ln/>
-        </p:spPr>
-        <p:txBody>
-          <a:bodyPr wrap="square" lIns="0" tIns="0" rIns="0" bIns="0" rtlCol="0" anchor="ctr"/>
-          <a:lstStyle/>
-          <a:p>
-            <a:pPr indent="0" marL="0">
-              <a:buNone/>
-            </a:pPr>
-            <a:r>
-              <a:rPr lang="en-US" sz="780" b="1" dirty="0">
-                <a:solidFill>
-                  <a:srgbClr val="FFFFFF"/>
-                </a:solidFill>
-                <a:latin typeface="Microsoft YaHei" pitchFamily="34" charset="0"/>
-                <a:ea typeface="Microsoft YaHei" pitchFamily="34" charset="-122"/>
-                <a:cs typeface="Microsoft YaHei" pitchFamily="34" charset="-120"/>
-              </a:rPr>
-              <a:t>编号</a:t>
-            </a:r>
-            <a:endParaRPr lang="en-US" sz="780" dirty="0"/>
-          </a:p>
-        </p:txBody>
-      </p:sp>
-      <p:sp>
-        <p:nvSpPr>
-          <p:cNvPr id="12" name="Shape 10"/>
-          <p:cNvSpPr/>
-          <p:nvPr/>
-        </p:nvSpPr>
-        <p:spPr>
-          <a:xfrm>
-            <a:off x="1225296" y="1444752"/>
-            <a:ext cx="1234440" cy="310896"/>
-          </a:xfrm>
-          <a:prstGeom prst="rect">
-            <a:avLst/>
-          </a:prstGeom>
-          <a:solidFill>
-            <a:srgbClr val="DDEBE0"/>
-          </a:solidFill>
-          <a:ln w="6350">
-            <a:solidFill>
-              <a:srgbClr val="DADADA"/>
-            </a:solidFill>
-            <a:prstDash val="solid"/>
-          </a:ln>
-        </p:spPr>
-      </p:sp>
-      <p:sp>
-        <p:nvSpPr>
-          <p:cNvPr id="13" name="Text 11"/>
-          <p:cNvSpPr/>
-          <p:nvPr/>
-        </p:nvSpPr>
-        <p:spPr>
-          <a:xfrm>
-            <a:off x="1298448" y="1536192"/>
-            <a:ext cx="1088136" cy="128016"/>
-          </a:xfrm>
-          <a:prstGeom prst="rect">
-            <a:avLst/>
-          </a:prstGeom>
-          <a:noFill/>
-          <a:ln/>
-        </p:spPr>
-        <p:txBody>
-          <a:bodyPr wrap="square" lIns="0" tIns="0" rIns="0" bIns="0" rtlCol="0" anchor="ctr"/>
-          <a:lstStyle/>
-          <a:p>
-            <a:pPr indent="0" marL="0">
-              <a:buNone/>
-            </a:pPr>
-            <a:r>
-              <a:rPr lang="en-US" sz="780" b="1" dirty="0">
-                <a:solidFill>
-                  <a:srgbClr val="121212"/>
-                </a:solidFill>
-                <a:latin typeface="Microsoft YaHei" pitchFamily="34" charset="0"/>
-                <a:ea typeface="Microsoft YaHei" pitchFamily="34" charset="-122"/>
-                <a:cs typeface="Microsoft YaHei" pitchFamily="34" charset="-120"/>
-              </a:rPr>
-              <a:t>来源</a:t>
-            </a:r>
-            <a:endParaRPr lang="en-US" sz="780" dirty="0"/>
-          </a:p>
-        </p:txBody>
-      </p:sp>
-      <p:sp>
-        <p:nvSpPr>
-          <p:cNvPr id="14" name="Shape 12"/>
-          <p:cNvSpPr/>
-          <p:nvPr/>
-        </p:nvSpPr>
-        <p:spPr>
-          <a:xfrm>
-            <a:off x="2459736" y="1444752"/>
-            <a:ext cx="3977640" cy="310896"/>
-          </a:xfrm>
-          <a:prstGeom prst="rect">
-            <a:avLst/>
-          </a:prstGeom>
-          <a:solidFill>
-            <a:srgbClr val="DDEBE0"/>
-          </a:solidFill>
-          <a:ln w="6350">
-            <a:solidFill>
-              <a:srgbClr val="DADADA"/>
-            </a:solidFill>
-            <a:prstDash val="solid"/>
-          </a:ln>
-        </p:spPr>
-      </p:sp>
-      <p:sp>
-        <p:nvSpPr>
-          <p:cNvPr id="15" name="Text 13"/>
-          <p:cNvSpPr/>
-          <p:nvPr/>
-        </p:nvSpPr>
-        <p:spPr>
-          <a:xfrm>
-            <a:off x="2532888" y="1536192"/>
-            <a:ext cx="3831336" cy="128016"/>
-          </a:xfrm>
-          <a:prstGeom prst="rect">
-            <a:avLst/>
-          </a:prstGeom>
-          <a:noFill/>
-          <a:ln/>
-        </p:spPr>
-        <p:txBody>
-          <a:bodyPr wrap="square" lIns="0" tIns="0" rIns="0" bIns="0" rtlCol="0" anchor="ctr"/>
-          <a:lstStyle/>
-          <a:p>
-            <a:pPr indent="0" marL="0">
-              <a:buNone/>
-            </a:pPr>
-            <a:r>
-              <a:rPr lang="en-US" sz="780" b="1" dirty="0">
-                <a:solidFill>
-                  <a:srgbClr val="121212"/>
-                </a:solidFill>
-                <a:latin typeface="Microsoft YaHei" pitchFamily="34" charset="0"/>
-                <a:ea typeface="Microsoft YaHei" pitchFamily="34" charset="-122"/>
-                <a:cs typeface="Microsoft YaHei" pitchFamily="34" charset="-120"/>
-              </a:rPr>
-              <a:t>标题</a:t>
-            </a:r>
-            <a:endParaRPr lang="en-US" sz="780" dirty="0"/>
-          </a:p>
-        </p:txBody>
-      </p:sp>
-      <p:sp>
-        <p:nvSpPr>
-          <p:cNvPr id="16" name="Shape 14"/>
-          <p:cNvSpPr/>
-          <p:nvPr/>
-        </p:nvSpPr>
-        <p:spPr>
-          <a:xfrm>
-            <a:off x="6437376" y="1444752"/>
-            <a:ext cx="4645152" cy="310896"/>
-          </a:xfrm>
-          <a:prstGeom prst="rect">
-            <a:avLst/>
-          </a:prstGeom>
-          <a:solidFill>
-            <a:srgbClr val="DDEBE0"/>
-          </a:solidFill>
-          <a:ln w="6350">
-            <a:solidFill>
-              <a:srgbClr val="DADADA"/>
-            </a:solidFill>
-            <a:prstDash val="solid"/>
-          </a:ln>
-        </p:spPr>
-      </p:sp>
-      <p:sp>
-        <p:nvSpPr>
-          <p:cNvPr id="17" name="Text 15"/>
-          <p:cNvSpPr/>
-          <p:nvPr/>
-        </p:nvSpPr>
-        <p:spPr>
-          <a:xfrm>
-            <a:off x="6510528" y="1536192"/>
-            <a:ext cx="4498848" cy="128016"/>
-          </a:xfrm>
-          <a:prstGeom prst="rect">
-            <a:avLst/>
-          </a:prstGeom>
-          <a:noFill/>
-          <a:ln/>
-        </p:spPr>
-        <p:txBody>
-          <a:bodyPr wrap="square" lIns="0" tIns="0" rIns="0" bIns="0" rtlCol="0" anchor="ctr"/>
-          <a:lstStyle/>
-          <a:p>
-            <a:pPr indent="0" marL="0">
-              <a:buNone/>
-            </a:pPr>
-            <a:r>
-              <a:rPr lang="en-US" sz="780" b="1" dirty="0">
-                <a:solidFill>
-                  <a:srgbClr val="121212"/>
-                </a:solidFill>
-                <a:latin typeface="Microsoft YaHei" pitchFamily="34" charset="0"/>
-                <a:ea typeface="Microsoft YaHei" pitchFamily="34" charset="-122"/>
-                <a:cs typeface="Microsoft YaHei" pitchFamily="34" charset="-120"/>
-              </a:rPr>
-              <a:t>链接</a:t>
-            </a:r>
-            <a:endParaRPr lang="en-US" sz="780" dirty="0"/>
-          </a:p>
-        </p:txBody>
-      </p:sp>
-      <p:sp>
-        <p:nvSpPr>
-          <p:cNvPr id="18" name="Shape 16"/>
-          <p:cNvSpPr/>
-          <p:nvPr/>
-        </p:nvSpPr>
-        <p:spPr>
-          <a:xfrm>
-            <a:off x="658368" y="1755648"/>
-            <a:ext cx="10424160" cy="274320"/>
-          </a:xfrm>
-          <a:prstGeom prst="rect">
-            <a:avLst/>
-          </a:prstGeom>
-          <a:solidFill>
-            <a:srgbClr val="F4FAF6"/>
-          </a:solidFill>
-          <a:ln w="5080">
-            <a:solidFill>
-              <a:srgbClr val="DADADA"/>
-            </a:solidFill>
-            <a:prstDash val="solid"/>
-          </a:ln>
-        </p:spPr>
-      </p:sp>
-      <p:sp>
-        <p:nvSpPr>
-          <p:cNvPr id="19" name="Text 17"/>
-          <p:cNvSpPr/>
-          <p:nvPr/>
-        </p:nvSpPr>
-        <p:spPr>
-          <a:xfrm>
-            <a:off x="749808" y="1828800"/>
-            <a:ext cx="411480" cy="109728"/>
-          </a:xfrm>
-          <a:prstGeom prst="rect">
-            <a:avLst/>
-          </a:prstGeom>
-          <a:noFill/>
-          <a:ln/>
-        </p:spPr>
-        <p:txBody>
-          <a:bodyPr wrap="square" lIns="0" tIns="0" rIns="0" bIns="0" rtlCol="0" anchor="ctr"/>
-          <a:lstStyle/>
-          <a:p>
-            <a:pPr indent="0" marL="0">
-              <a:buNone/>
-            </a:pPr>
-            <a:r>
-              <a:rPr lang="en-US" sz="680" b="1" dirty="0">
-                <a:solidFill>
-                  <a:srgbClr val="487052"/>
-                </a:solidFill>
-                <a:latin typeface="Aptos" pitchFamily="34" charset="0"/>
-                <a:ea typeface="Aptos" pitchFamily="34" charset="-122"/>
-                <a:cs typeface="Aptos" pitchFamily="34" charset="-120"/>
-              </a:rPr>
-              <a:t>[13]</a:t>
-            </a:r>
-            <a:endParaRPr lang="en-US" sz="680" dirty="0"/>
-          </a:p>
-        </p:txBody>
-      </p:sp>
-      <p:sp>
-        <p:nvSpPr>
-          <p:cNvPr id="20" name="Text 18"/>
-          <p:cNvSpPr/>
-          <p:nvPr/>
-        </p:nvSpPr>
-        <p:spPr>
-          <a:xfrm>
-            <a:off x="1261872" y="1828800"/>
-            <a:ext cx="1051560" cy="109728"/>
-          </a:xfrm>
-          <a:prstGeom prst="rect">
-            <a:avLst/>
-          </a:prstGeom>
-          <a:noFill/>
-          <a:ln/>
-        </p:spPr>
-        <p:txBody>
-          <a:bodyPr wrap="square" lIns="0" tIns="0" rIns="0" bIns="0" rtlCol="0" anchor="ctr">
-            <a:normAutofit/>
-          </a:bodyPr>
-          <a:lstStyle/>
-          <a:p>
-            <a:pPr indent="0" marL="0">
-              <a:buNone/>
-            </a:pPr>
-            <a:r>
-              <a:rPr lang="en-US" sz="680" dirty="0">
-                <a:solidFill>
-                  <a:srgbClr val="121212"/>
-                </a:solidFill>
-                <a:latin typeface="Microsoft YaHei" pitchFamily="34" charset="0"/>
-                <a:ea typeface="Microsoft YaHei" pitchFamily="34" charset="-122"/>
-                <a:cs typeface="Microsoft YaHei" pitchFamily="34" charset="-120"/>
-              </a:rPr>
-              <a:t>公众号：电池关键材料｜最高</a:t>
-            </a:r>
-            <a:endParaRPr lang="en-US" sz="680" dirty="0"/>
-          </a:p>
-        </p:txBody>
-      </p:sp>
-      <p:sp>
-        <p:nvSpPr>
-          <p:cNvPr id="21" name="Text 19"/>
-          <p:cNvSpPr/>
-          <p:nvPr/>
-        </p:nvSpPr>
-        <p:spPr>
-          <a:xfrm>
-            <a:off x="2487168" y="1828800"/>
-            <a:ext cx="3749040" cy="109728"/>
-          </a:xfrm>
-          <a:prstGeom prst="rect">
-            <a:avLst/>
-          </a:prstGeom>
-          <a:noFill/>
-          <a:ln/>
-        </p:spPr>
-        <p:txBody>
-          <a:bodyPr wrap="square" lIns="0" tIns="0" rIns="0" bIns="0" rtlCol="0" anchor="ctr">
-            <a:normAutofit/>
-          </a:bodyPr>
-          <a:lstStyle/>
-          <a:p>
-            <a:pPr indent="0" marL="0">
-              <a:buNone/>
-            </a:pPr>
-            <a:r>
-              <a:rPr lang="en-US" sz="680" b="1" dirty="0">
-                <a:solidFill>
-                  <a:srgbClr val="121212"/>
-                </a:solidFill>
-                <a:latin typeface="Microsoft YaHei" pitchFamily="34" charset="0"/>
-                <a:ea typeface="Microsoft YaHei" pitchFamily="34" charset="-122"/>
-                <a:cs typeface="Microsoft YaHei" pitchFamily="34" charset="-120"/>
-              </a:rPr>
-              <a:t>公众号：电池关键材料｜最高预增 1245%！永太科技半年业绩预告出炉，</a:t>
-            </a:r>
-            <a:endParaRPr lang="en-US" sz="680" dirty="0"/>
-          </a:p>
-        </p:txBody>
-      </p:sp>
-      <p:sp>
-        <p:nvSpPr>
-          <p:cNvPr id="22" name="Text 20"/>
-          <p:cNvSpPr/>
-          <p:nvPr/>
-        </p:nvSpPr>
-        <p:spPr>
-          <a:xfrm>
-            <a:off x="6510528" y="1828800"/>
-            <a:ext cx="4343400" cy="109728"/>
-          </a:xfrm>
-          <a:prstGeom prst="rect">
-            <a:avLst/>
-          </a:prstGeom>
-          <a:noFill/>
-          <a:ln/>
-        </p:spPr>
-        <p:txBody>
-          <a:bodyPr wrap="square" lIns="0" tIns="0" rIns="0" bIns="0" rtlCol="0" anchor="ctr">
-            <a:normAutofit/>
-          </a:bodyPr>
-          <a:lstStyle/>
-          <a:p>
-            <a:pPr indent="0" marL="0">
-              <a:buNone/>
-            </a:pPr>
-            <a:r>
-              <a:rPr lang="en-US" sz="580" dirty="0">
-                <a:solidFill>
-                  <a:srgbClr val="6D756F"/>
-                </a:solidFill>
-                <a:latin typeface="Aptos" pitchFamily="34" charset="0"/>
-                <a:ea typeface="Aptos" pitchFamily="34" charset="-122"/>
-                <a:cs typeface="Aptos" pitchFamily="34" charset="-120"/>
-              </a:rPr>
-              <a:t>https://mp.weixin.qq.com/s/Kjode9zmQi8kM2r3y3sDKg</a:t>
-            </a:r>
-            <a:endParaRPr lang="en-US" sz="580" dirty="0"/>
-          </a:p>
-        </p:txBody>
-      </p:sp>
-      <p:sp>
-        <p:nvSpPr>
-          <p:cNvPr id="23" name="Shape 21"/>
-          <p:cNvSpPr/>
-          <p:nvPr/>
-        </p:nvSpPr>
-        <p:spPr>
-          <a:xfrm>
-            <a:off x="658368" y="2066544"/>
-            <a:ext cx="10424160" cy="274320"/>
-          </a:xfrm>
-          <a:prstGeom prst="rect">
-            <a:avLst/>
-          </a:prstGeom>
-          <a:solidFill>
-            <a:srgbClr val="FFFFFF"/>
-          </a:solidFill>
-          <a:ln w="5080">
-            <a:solidFill>
-              <a:srgbClr val="DADADA"/>
-            </a:solidFill>
-            <a:prstDash val="solid"/>
-          </a:ln>
-        </p:spPr>
-      </p:sp>
-      <p:sp>
-        <p:nvSpPr>
-          <p:cNvPr id="24" name="Text 22"/>
-          <p:cNvSpPr/>
-          <p:nvPr/>
-        </p:nvSpPr>
-        <p:spPr>
-          <a:xfrm>
-            <a:off x="749808" y="2139696"/>
-            <a:ext cx="411480" cy="109728"/>
-          </a:xfrm>
-          <a:prstGeom prst="rect">
-            <a:avLst/>
-          </a:prstGeom>
-          <a:noFill/>
-          <a:ln/>
-        </p:spPr>
-        <p:txBody>
-          <a:bodyPr wrap="square" lIns="0" tIns="0" rIns="0" bIns="0" rtlCol="0" anchor="ctr"/>
-          <a:lstStyle/>
-          <a:p>
-            <a:pPr indent="0" marL="0">
-              <a:buNone/>
-            </a:pPr>
-            <a:r>
-              <a:rPr lang="en-US" sz="680" b="1" dirty="0">
-                <a:solidFill>
-                  <a:srgbClr val="487052"/>
-                </a:solidFill>
-                <a:latin typeface="Aptos" pitchFamily="34" charset="0"/>
-                <a:ea typeface="Aptos" pitchFamily="34" charset="-122"/>
-                <a:cs typeface="Aptos" pitchFamily="34" charset="-120"/>
-              </a:rPr>
-              <a:t>[14]</a:t>
-            </a:r>
-            <a:endParaRPr lang="en-US" sz="680" dirty="0"/>
-          </a:p>
-        </p:txBody>
-      </p:sp>
-      <p:sp>
-        <p:nvSpPr>
-          <p:cNvPr id="25" name="Text 23"/>
-          <p:cNvSpPr/>
-          <p:nvPr/>
-        </p:nvSpPr>
-        <p:spPr>
-          <a:xfrm>
-            <a:off x="1261872" y="2139696"/>
-            <a:ext cx="1051560" cy="109728"/>
-          </a:xfrm>
-          <a:prstGeom prst="rect">
-            <a:avLst/>
-          </a:prstGeom>
-          <a:noFill/>
-          <a:ln/>
-        </p:spPr>
-        <p:txBody>
-          <a:bodyPr wrap="square" lIns="0" tIns="0" rIns="0" bIns="0" rtlCol="0" anchor="ctr">
-            <a:normAutofit/>
-          </a:bodyPr>
-          <a:lstStyle/>
-          <a:p>
-            <a:pPr indent="0" marL="0">
-              <a:buNone/>
-            </a:pPr>
-            <a:r>
-              <a:rPr lang="en-US" sz="680" dirty="0">
-                <a:solidFill>
-                  <a:srgbClr val="121212"/>
-                </a:solidFill>
-                <a:latin typeface="Microsoft YaHei" pitchFamily="34" charset="0"/>
-                <a:ea typeface="Microsoft YaHei" pitchFamily="34" charset="-122"/>
-                <a:cs typeface="Microsoft YaHei" pitchFamily="34" charset="-120"/>
-              </a:rPr>
-              <a:t>工业和信息化部</a:t>
-            </a:r>
-            <a:endParaRPr lang="en-US" sz="680" dirty="0"/>
-          </a:p>
-        </p:txBody>
-      </p:sp>
-      <p:sp>
-        <p:nvSpPr>
-          <p:cNvPr id="26" name="Text 24"/>
-          <p:cNvSpPr/>
-          <p:nvPr/>
-        </p:nvSpPr>
-        <p:spPr>
-          <a:xfrm>
-            <a:off x="2487168" y="2139696"/>
-            <a:ext cx="3749040" cy="109728"/>
-          </a:xfrm>
-          <a:prstGeom prst="rect">
-            <a:avLst/>
-          </a:prstGeom>
-          <a:noFill/>
-          <a:ln/>
-        </p:spPr>
-        <p:txBody>
-          <a:bodyPr wrap="square" lIns="0" tIns="0" rIns="0" bIns="0" rtlCol="0" anchor="ctr">
-            <a:normAutofit/>
-          </a:bodyPr>
-          <a:lstStyle/>
-          <a:p>
-            <a:pPr indent="0" marL="0">
-              <a:buNone/>
-            </a:pPr>
-            <a:r>
-              <a:rPr lang="en-US" sz="680" b="1" dirty="0">
-                <a:solidFill>
-                  <a:srgbClr val="121212"/>
-                </a:solidFill>
-                <a:latin typeface="Microsoft YaHei" pitchFamily="34" charset="0"/>
-                <a:ea typeface="Microsoft YaHei" pitchFamily="34" charset="-122"/>
-                <a:cs typeface="Microsoft YaHei" pitchFamily="34" charset="-120"/>
-              </a:rPr>
-              <a:t>公开征求《车用动力电池拆解破碎安全要求》等两项强制性国家标准的意见</a:t>
-            </a:r>
-            <a:endParaRPr lang="en-US" sz="680" dirty="0"/>
-          </a:p>
-        </p:txBody>
-      </p:sp>
-      <p:sp>
-        <p:nvSpPr>
-          <p:cNvPr id="27" name="Text 25"/>
-          <p:cNvSpPr/>
-          <p:nvPr/>
-        </p:nvSpPr>
-        <p:spPr>
-          <a:xfrm>
-            <a:off x="6510528" y="2139696"/>
-            <a:ext cx="4343400" cy="109728"/>
-          </a:xfrm>
-          <a:prstGeom prst="rect">
-            <a:avLst/>
-          </a:prstGeom>
-          <a:noFill/>
-          <a:ln/>
-        </p:spPr>
-        <p:txBody>
-          <a:bodyPr wrap="square" lIns="0" tIns="0" rIns="0" bIns="0" rtlCol="0" anchor="ctr">
-            <a:normAutofit/>
-          </a:bodyPr>
-          <a:lstStyle/>
-          <a:p>
-            <a:pPr indent="0" marL="0">
-              <a:buNone/>
-            </a:pPr>
-            <a:r>
-              <a:rPr lang="en-US" sz="580" dirty="0">
-                <a:solidFill>
-                  <a:srgbClr val="6D756F"/>
-                </a:solidFill>
-                <a:latin typeface="Aptos" pitchFamily="34" charset="0"/>
-                <a:ea typeface="Aptos" pitchFamily="34" charset="-122"/>
-                <a:cs typeface="Aptos" pitchFamily="34" charset="-120"/>
-              </a:rPr>
-              <a:t>https://www.miit.gov.cn/gzcy/yjzj/art/2026/art_6ee188a6acf34735a568af7ebdc507b5.html</a:t>
-            </a:r>
-            <a:endParaRPr lang="en-US" sz="580" dirty="0"/>
-          </a:p>
-        </p:txBody>
-      </p:sp>
-      <p:sp>
-        <p:nvSpPr>
-          <p:cNvPr id="28" name="Shape 26"/>
-          <p:cNvSpPr/>
-          <p:nvPr/>
-        </p:nvSpPr>
-        <p:spPr>
-          <a:xfrm>
-            <a:off x="658368" y="2377440"/>
-            <a:ext cx="10424160" cy="274320"/>
-          </a:xfrm>
-          <a:prstGeom prst="rect">
-            <a:avLst/>
-          </a:prstGeom>
-          <a:solidFill>
-            <a:srgbClr val="F4FAF6"/>
-          </a:solidFill>
-          <a:ln w="5080">
-            <a:solidFill>
-              <a:srgbClr val="DADADA"/>
-            </a:solidFill>
-            <a:prstDash val="solid"/>
-          </a:ln>
-        </p:spPr>
-      </p:sp>
-      <p:sp>
-        <p:nvSpPr>
-          <p:cNvPr id="29" name="Text 27"/>
-          <p:cNvSpPr/>
-          <p:nvPr/>
-        </p:nvSpPr>
-        <p:spPr>
-          <a:xfrm>
-            <a:off x="749808" y="2450592"/>
-            <a:ext cx="411480" cy="109728"/>
-          </a:xfrm>
-          <a:prstGeom prst="rect">
-            <a:avLst/>
-          </a:prstGeom>
-          <a:noFill/>
-          <a:ln/>
-        </p:spPr>
-        <p:txBody>
-          <a:bodyPr wrap="square" lIns="0" tIns="0" rIns="0" bIns="0" rtlCol="0" anchor="ctr"/>
-          <a:lstStyle/>
-          <a:p>
-            <a:pPr indent="0" marL="0">
-              <a:buNone/>
-            </a:pPr>
-            <a:r>
-              <a:rPr lang="en-US" sz="680" b="1" dirty="0">
-                <a:solidFill>
-                  <a:srgbClr val="487052"/>
-                </a:solidFill>
-                <a:latin typeface="Aptos" pitchFamily="34" charset="0"/>
-                <a:ea typeface="Aptos" pitchFamily="34" charset="-122"/>
-                <a:cs typeface="Aptos" pitchFamily="34" charset="-120"/>
-              </a:rPr>
-              <a:t>[15]</a:t>
-            </a:r>
-            <a:endParaRPr lang="en-US" sz="680" dirty="0"/>
-          </a:p>
-        </p:txBody>
-      </p:sp>
-      <p:sp>
-        <p:nvSpPr>
-          <p:cNvPr id="30" name="Text 28"/>
-          <p:cNvSpPr/>
-          <p:nvPr/>
-        </p:nvSpPr>
-        <p:spPr>
-          <a:xfrm>
-            <a:off x="1261872" y="2450592"/>
-            <a:ext cx="1051560" cy="109728"/>
-          </a:xfrm>
-          <a:prstGeom prst="rect">
-            <a:avLst/>
-          </a:prstGeom>
-          <a:noFill/>
-          <a:ln/>
-        </p:spPr>
-        <p:txBody>
-          <a:bodyPr wrap="square" lIns="0" tIns="0" rIns="0" bIns="0" rtlCol="0" anchor="ctr">
-            <a:normAutofit/>
-          </a:bodyPr>
-          <a:lstStyle/>
-          <a:p>
-            <a:pPr indent="0" marL="0">
-              <a:buNone/>
-            </a:pPr>
-            <a:r>
-              <a:rPr lang="en-US" sz="680" dirty="0">
-                <a:solidFill>
-                  <a:srgbClr val="121212"/>
-                </a:solidFill>
-                <a:latin typeface="Microsoft YaHei" pitchFamily="34" charset="0"/>
-                <a:ea typeface="Microsoft YaHei" pitchFamily="34" charset="-122"/>
-                <a:cs typeface="Microsoft YaHei" pitchFamily="34" charset="-120"/>
-              </a:rPr>
-              <a:t>公众号：动力电池ZM｜七部</a:t>
-            </a:r>
-            <a:endParaRPr lang="en-US" sz="680" dirty="0"/>
-          </a:p>
-        </p:txBody>
-      </p:sp>
-      <p:sp>
-        <p:nvSpPr>
-          <p:cNvPr id="31" name="Text 29"/>
-          <p:cNvSpPr/>
-          <p:nvPr/>
-        </p:nvSpPr>
-        <p:spPr>
-          <a:xfrm>
-            <a:off x="2487168" y="2450592"/>
-            <a:ext cx="3749040" cy="109728"/>
-          </a:xfrm>
-          <a:prstGeom prst="rect">
-            <a:avLst/>
-          </a:prstGeom>
-          <a:noFill/>
-          <a:ln/>
-        </p:spPr>
-        <p:txBody>
-          <a:bodyPr wrap="square" lIns="0" tIns="0" rIns="0" bIns="0" rtlCol="0" anchor="ctr">
-            <a:normAutofit/>
-          </a:bodyPr>
-          <a:lstStyle/>
-          <a:p>
-            <a:pPr indent="0" marL="0">
-              <a:buNone/>
-            </a:pPr>
-            <a:r>
-              <a:rPr lang="en-US" sz="680" b="1" dirty="0">
-                <a:solidFill>
-                  <a:srgbClr val="121212"/>
-                </a:solidFill>
-                <a:latin typeface="Microsoft YaHei" pitchFamily="34" charset="0"/>
-                <a:ea typeface="Microsoft YaHei" pitchFamily="34" charset="-122"/>
-                <a:cs typeface="Microsoft YaHei" pitchFamily="34" charset="-120"/>
-              </a:rPr>
-              <a:t>公众号：动力电池ZM｜七部门联合出手！报废机动车非法回收拆解专项整治启</a:t>
-            </a:r>
-            <a:endParaRPr lang="en-US" sz="680" dirty="0"/>
-          </a:p>
-        </p:txBody>
-      </p:sp>
-      <p:sp>
-        <p:nvSpPr>
-          <p:cNvPr id="32" name="Text 30"/>
-          <p:cNvSpPr/>
-          <p:nvPr/>
-        </p:nvSpPr>
-        <p:spPr>
-          <a:xfrm>
-            <a:off x="6510528" y="2450592"/>
-            <a:ext cx="4343400" cy="109728"/>
-          </a:xfrm>
-          <a:prstGeom prst="rect">
-            <a:avLst/>
-          </a:prstGeom>
-          <a:noFill/>
-          <a:ln/>
-        </p:spPr>
-        <p:txBody>
-          <a:bodyPr wrap="square" lIns="0" tIns="0" rIns="0" bIns="0" rtlCol="0" anchor="ctr">
-            <a:normAutofit/>
-          </a:bodyPr>
-          <a:lstStyle/>
-          <a:p>
-            <a:pPr indent="0" marL="0">
-              <a:buNone/>
-            </a:pPr>
-            <a:r>
-              <a:rPr lang="en-US" sz="580" dirty="0">
-                <a:solidFill>
-                  <a:srgbClr val="6D756F"/>
-                </a:solidFill>
-                <a:latin typeface="Aptos" pitchFamily="34" charset="0"/>
-                <a:ea typeface="Aptos" pitchFamily="34" charset="-122"/>
-                <a:cs typeface="Aptos" pitchFamily="34" charset="-120"/>
-              </a:rPr>
-              <a:t>https://mp.weixin.qq.com/s/O0DHCEfWX6GID9tg_PtaeA</a:t>
-            </a:r>
-            <a:endParaRPr lang="en-US" sz="580" dirty="0"/>
-          </a:p>
-        </p:txBody>
-      </p:sp>
-      <p:sp>
-        <p:nvSpPr>
-          <p:cNvPr id="33" name="Shape 31"/>
-          <p:cNvSpPr/>
-          <p:nvPr/>
-        </p:nvSpPr>
-        <p:spPr>
-          <a:xfrm>
-            <a:off x="658368" y="2688336"/>
-            <a:ext cx="10424160" cy="274320"/>
-          </a:xfrm>
-          <a:prstGeom prst="rect">
-            <a:avLst/>
-          </a:prstGeom>
-          <a:solidFill>
-            <a:srgbClr val="FFFFFF"/>
-          </a:solidFill>
-          <a:ln w="5080">
-            <a:solidFill>
-              <a:srgbClr val="DADADA"/>
-            </a:solidFill>
-            <a:prstDash val="solid"/>
-          </a:ln>
-        </p:spPr>
-      </p:sp>
-      <p:sp>
-        <p:nvSpPr>
-          <p:cNvPr id="34" name="Text 32"/>
-          <p:cNvSpPr/>
-          <p:nvPr/>
-        </p:nvSpPr>
-        <p:spPr>
-          <a:xfrm>
-            <a:off x="749808" y="2761488"/>
-            <a:ext cx="411480" cy="109728"/>
-          </a:xfrm>
-          <a:prstGeom prst="rect">
-            <a:avLst/>
-          </a:prstGeom>
-          <a:noFill/>
-          <a:ln/>
-        </p:spPr>
-        <p:txBody>
-          <a:bodyPr wrap="square" lIns="0" tIns="0" rIns="0" bIns="0" rtlCol="0" anchor="ctr"/>
-          <a:lstStyle/>
-          <a:p>
-            <a:pPr indent="0" marL="0">
-              <a:buNone/>
-            </a:pPr>
-            <a:r>
-              <a:rPr lang="en-US" sz="680" b="1" dirty="0">
-                <a:solidFill>
-                  <a:srgbClr val="487052"/>
-                </a:solidFill>
-                <a:latin typeface="Aptos" pitchFamily="34" charset="0"/>
-                <a:ea typeface="Aptos" pitchFamily="34" charset="-122"/>
-                <a:cs typeface="Aptos" pitchFamily="34" charset="-120"/>
-              </a:rPr>
-              <a:t>[16]</a:t>
-            </a:r>
-            <a:endParaRPr lang="en-US" sz="680" dirty="0"/>
-          </a:p>
-        </p:txBody>
-      </p:sp>
-      <p:sp>
-        <p:nvSpPr>
-          <p:cNvPr id="35" name="Text 33"/>
-          <p:cNvSpPr/>
-          <p:nvPr/>
-        </p:nvSpPr>
-        <p:spPr>
-          <a:xfrm>
-            <a:off x="1261872" y="2761488"/>
-            <a:ext cx="1051560" cy="109728"/>
-          </a:xfrm>
-          <a:prstGeom prst="rect">
-            <a:avLst/>
-          </a:prstGeom>
-          <a:noFill/>
-          <a:ln/>
-        </p:spPr>
-        <p:txBody>
-          <a:bodyPr wrap="square" lIns="0" tIns="0" rIns="0" bIns="0" rtlCol="0" anchor="ctr">
-            <a:normAutofit/>
-          </a:bodyPr>
-          <a:lstStyle/>
-          <a:p>
-            <a:pPr indent="0" marL="0">
-              <a:buNone/>
-            </a:pPr>
-            <a:r>
-              <a:rPr lang="en-US" sz="680" dirty="0">
-                <a:solidFill>
-                  <a:srgbClr val="121212"/>
-                </a:solidFill>
-                <a:latin typeface="Microsoft YaHei" pitchFamily="34" charset="0"/>
-                <a:ea typeface="Microsoft YaHei" pitchFamily="34" charset="-122"/>
-                <a:cs typeface="Microsoft YaHei" pitchFamily="34" charset="-120"/>
-              </a:rPr>
-              <a:t>公众号：Mysteel动力</a:t>
-            </a:r>
-            <a:endParaRPr lang="en-US" sz="680" dirty="0"/>
-          </a:p>
-        </p:txBody>
-      </p:sp>
-      <p:sp>
-        <p:nvSpPr>
-          <p:cNvPr id="36" name="Text 34"/>
-          <p:cNvSpPr/>
-          <p:nvPr/>
-        </p:nvSpPr>
-        <p:spPr>
-          <a:xfrm>
-            <a:off x="2487168" y="2761488"/>
-            <a:ext cx="3749040" cy="109728"/>
-          </a:xfrm>
-          <a:prstGeom prst="rect">
-            <a:avLst/>
-          </a:prstGeom>
-          <a:noFill/>
-          <a:ln/>
-        </p:spPr>
-        <p:txBody>
-          <a:bodyPr wrap="square" lIns="0" tIns="0" rIns="0" bIns="0" rtlCol="0" anchor="ctr">
-            <a:normAutofit/>
-          </a:bodyPr>
-          <a:lstStyle/>
-          <a:p>
-            <a:pPr indent="0" marL="0">
-              <a:buNone/>
-            </a:pPr>
-            <a:r>
-              <a:rPr lang="en-US" sz="680" b="1" dirty="0">
-                <a:solidFill>
-                  <a:srgbClr val="121212"/>
-                </a:solidFill>
-                <a:latin typeface="Microsoft YaHei" pitchFamily="34" charset="0"/>
-                <a:ea typeface="Microsoft YaHei" pitchFamily="34" charset="-122"/>
-                <a:cs typeface="Microsoft YaHei" pitchFamily="34" charset="-120"/>
-              </a:rPr>
-              <a:t>公众号：Mysteel动力电池回收｜欧盟黑粉出口禁令倒计时：全球锂电回</a:t>
-            </a:r>
-            <a:endParaRPr lang="en-US" sz="680" dirty="0"/>
-          </a:p>
-        </p:txBody>
-      </p:sp>
-      <p:sp>
-        <p:nvSpPr>
-          <p:cNvPr id="37" name="Text 35"/>
-          <p:cNvSpPr/>
-          <p:nvPr/>
-        </p:nvSpPr>
-        <p:spPr>
-          <a:xfrm>
-            <a:off x="6510528" y="2761488"/>
-            <a:ext cx="4343400" cy="109728"/>
-          </a:xfrm>
-          <a:prstGeom prst="rect">
-            <a:avLst/>
-          </a:prstGeom>
-          <a:noFill/>
-          <a:ln/>
-        </p:spPr>
-        <p:txBody>
-          <a:bodyPr wrap="square" lIns="0" tIns="0" rIns="0" bIns="0" rtlCol="0" anchor="ctr">
-            <a:normAutofit/>
-          </a:bodyPr>
-          <a:lstStyle/>
-          <a:p>
-            <a:pPr indent="0" marL="0">
-              <a:buNone/>
-            </a:pPr>
-            <a:r>
-              <a:rPr lang="en-US" sz="580" dirty="0">
-                <a:solidFill>
-                  <a:srgbClr val="6D756F"/>
-                </a:solidFill>
-                <a:latin typeface="Aptos" pitchFamily="34" charset="0"/>
-                <a:ea typeface="Aptos" pitchFamily="34" charset="-122"/>
-                <a:cs typeface="Aptos" pitchFamily="34" charset="-120"/>
-              </a:rPr>
-              <a:t>https://mp.weixin.qq.com/s/2ViyLHByi8TGnU6oFVn8pw</a:t>
-            </a:r>
-            <a:endParaRPr lang="en-US" sz="580" dirty="0"/>
-          </a:p>
-        </p:txBody>
-      </p:sp>
-      <p:sp>
-        <p:nvSpPr>
-          <p:cNvPr id="38" name="Shape 36"/>
-          <p:cNvSpPr/>
-          <p:nvPr/>
-        </p:nvSpPr>
-        <p:spPr>
-          <a:xfrm>
-            <a:off x="658368" y="2999232"/>
-            <a:ext cx="10424160" cy="274320"/>
-          </a:xfrm>
-          <a:prstGeom prst="rect">
-            <a:avLst/>
-          </a:prstGeom>
-          <a:solidFill>
-            <a:srgbClr val="F4FAF6"/>
-          </a:solidFill>
-          <a:ln w="5080">
-            <a:solidFill>
-              <a:srgbClr val="DADADA"/>
-            </a:solidFill>
-            <a:prstDash val="solid"/>
-          </a:ln>
-        </p:spPr>
-      </p:sp>
-      <p:sp>
-        <p:nvSpPr>
-          <p:cNvPr id="39" name="Text 37"/>
-          <p:cNvSpPr/>
-          <p:nvPr/>
-        </p:nvSpPr>
-        <p:spPr>
-          <a:xfrm>
-            <a:off x="749808" y="3072384"/>
-            <a:ext cx="411480" cy="109728"/>
-          </a:xfrm>
-          <a:prstGeom prst="rect">
-            <a:avLst/>
-          </a:prstGeom>
-          <a:noFill/>
-          <a:ln/>
-        </p:spPr>
-        <p:txBody>
-          <a:bodyPr wrap="square" lIns="0" tIns="0" rIns="0" bIns="0" rtlCol="0" anchor="ctr"/>
-          <a:lstStyle/>
-          <a:p>
-            <a:pPr indent="0" marL="0">
-              <a:buNone/>
-            </a:pPr>
-            <a:r>
-              <a:rPr lang="en-US" sz="680" b="1" dirty="0">
-                <a:solidFill>
-                  <a:srgbClr val="487052"/>
-                </a:solidFill>
-                <a:latin typeface="Aptos" pitchFamily="34" charset="0"/>
-                <a:ea typeface="Aptos" pitchFamily="34" charset="-122"/>
-                <a:cs typeface="Aptos" pitchFamily="34" charset="-120"/>
-              </a:rPr>
-              <a:t>[17]</a:t>
-            </a:r>
-            <a:endParaRPr lang="en-US" sz="680" dirty="0"/>
-          </a:p>
-        </p:txBody>
-      </p:sp>
-      <p:sp>
-        <p:nvSpPr>
-          <p:cNvPr id="40" name="Text 38"/>
-          <p:cNvSpPr/>
-          <p:nvPr/>
-        </p:nvSpPr>
-        <p:spPr>
-          <a:xfrm>
-            <a:off x="1261872" y="3072384"/>
-            <a:ext cx="1051560" cy="109728"/>
-          </a:xfrm>
-          <a:prstGeom prst="rect">
-            <a:avLst/>
-          </a:prstGeom>
-          <a:noFill/>
-          <a:ln/>
-        </p:spPr>
-        <p:txBody>
-          <a:bodyPr wrap="square" lIns="0" tIns="0" rIns="0" bIns="0" rtlCol="0" anchor="ctr">
-            <a:normAutofit/>
-          </a:bodyPr>
-          <a:lstStyle/>
-          <a:p>
-            <a:pPr indent="0" marL="0">
-              <a:buNone/>
-            </a:pPr>
-            <a:r>
-              <a:rPr lang="en-US" sz="680" dirty="0">
-                <a:solidFill>
-                  <a:srgbClr val="121212"/>
-                </a:solidFill>
-                <a:latin typeface="Microsoft YaHei" pitchFamily="34" charset="0"/>
-                <a:ea typeface="Microsoft YaHei" pitchFamily="34" charset="-122"/>
-                <a:cs typeface="Microsoft YaHei" pitchFamily="34" charset="-120"/>
-              </a:rPr>
-              <a:t>公众号：当升科技｜矿冶集团</a:t>
-            </a:r>
-            <a:endParaRPr lang="en-US" sz="680" dirty="0"/>
-          </a:p>
-        </p:txBody>
-      </p:sp>
-      <p:sp>
-        <p:nvSpPr>
-          <p:cNvPr id="41" name="Text 39"/>
-          <p:cNvSpPr/>
-          <p:nvPr/>
-        </p:nvSpPr>
-        <p:spPr>
-          <a:xfrm>
-            <a:off x="2487168" y="3072384"/>
-            <a:ext cx="3749040" cy="109728"/>
-          </a:xfrm>
-          <a:prstGeom prst="rect">
-            <a:avLst/>
-          </a:prstGeom>
-          <a:noFill/>
-          <a:ln/>
-        </p:spPr>
-        <p:txBody>
-          <a:bodyPr wrap="square" lIns="0" tIns="0" rIns="0" bIns="0" rtlCol="0" anchor="ctr">
-            <a:normAutofit/>
-          </a:bodyPr>
-          <a:lstStyle/>
-          <a:p>
-            <a:pPr indent="0" marL="0">
-              <a:buNone/>
-            </a:pPr>
-            <a:r>
-              <a:rPr lang="en-US" sz="680" b="1" dirty="0">
-                <a:solidFill>
-                  <a:srgbClr val="121212"/>
-                </a:solidFill>
-                <a:latin typeface="Microsoft YaHei" pitchFamily="34" charset="0"/>
-                <a:ea typeface="Microsoft YaHei" pitchFamily="34" charset="-122"/>
-                <a:cs typeface="Microsoft YaHei" pitchFamily="34" charset="-120"/>
-              </a:rPr>
-              <a:t>公众号：当升科技｜矿冶集团当升科技荣登2026年《财富》中国科技50强</a:t>
-            </a:r>
-            <a:endParaRPr lang="en-US" sz="680" dirty="0"/>
-          </a:p>
-        </p:txBody>
-      </p:sp>
-      <p:sp>
-        <p:nvSpPr>
-          <p:cNvPr id="42" name="Text 40"/>
-          <p:cNvSpPr/>
-          <p:nvPr/>
-        </p:nvSpPr>
-        <p:spPr>
-          <a:xfrm>
-            <a:off x="6510528" y="3072384"/>
-            <a:ext cx="4343400" cy="109728"/>
-          </a:xfrm>
-          <a:prstGeom prst="rect">
-            <a:avLst/>
-          </a:prstGeom>
-          <a:noFill/>
-          <a:ln/>
-        </p:spPr>
-        <p:txBody>
-          <a:bodyPr wrap="square" lIns="0" tIns="0" rIns="0" bIns="0" rtlCol="0" anchor="ctr">
-            <a:normAutofit/>
-          </a:bodyPr>
-          <a:lstStyle/>
-          <a:p>
-            <a:pPr indent="0" marL="0">
-              <a:buNone/>
-            </a:pPr>
-            <a:r>
-              <a:rPr lang="en-US" sz="580" dirty="0">
-                <a:solidFill>
-                  <a:srgbClr val="6D756F"/>
-                </a:solidFill>
-                <a:latin typeface="Aptos" pitchFamily="34" charset="0"/>
-                <a:ea typeface="Aptos" pitchFamily="34" charset="-122"/>
-                <a:cs typeface="Aptos" pitchFamily="34" charset="-120"/>
-              </a:rPr>
-              <a:t>https://mp.weixin.qq.com/s/evX4irOq-Q5bdvjiNfiATg</a:t>
-            </a:r>
-            <a:endParaRPr lang="en-US" sz="580" dirty="0"/>
-          </a:p>
-        </p:txBody>
-      </p:sp>
-      <p:sp>
-        <p:nvSpPr>
-          <p:cNvPr id="43" name="Shape 41"/>
-          <p:cNvSpPr/>
-          <p:nvPr/>
-        </p:nvSpPr>
-        <p:spPr>
-          <a:xfrm>
-            <a:off x="658368" y="3310128"/>
-            <a:ext cx="10424160" cy="274320"/>
-          </a:xfrm>
-          <a:prstGeom prst="rect">
-            <a:avLst/>
-          </a:prstGeom>
-          <a:solidFill>
-            <a:srgbClr val="FFFFFF"/>
-          </a:solidFill>
-          <a:ln w="5080">
-            <a:solidFill>
-              <a:srgbClr val="DADADA"/>
-            </a:solidFill>
-            <a:prstDash val="solid"/>
-          </a:ln>
-        </p:spPr>
-      </p:sp>
-      <p:sp>
-        <p:nvSpPr>
-          <p:cNvPr id="44" name="Text 42"/>
-          <p:cNvSpPr/>
-          <p:nvPr/>
-        </p:nvSpPr>
-        <p:spPr>
-          <a:xfrm>
-            <a:off x="749808" y="3383280"/>
-            <a:ext cx="411480" cy="109728"/>
-          </a:xfrm>
-          <a:prstGeom prst="rect">
-            <a:avLst/>
-          </a:prstGeom>
-          <a:noFill/>
-          <a:ln/>
-        </p:spPr>
-        <p:txBody>
-          <a:bodyPr wrap="square" lIns="0" tIns="0" rIns="0" bIns="0" rtlCol="0" anchor="ctr"/>
-          <a:lstStyle/>
-          <a:p>
-            <a:pPr indent="0" marL="0">
-              <a:buNone/>
-            </a:pPr>
-            <a:r>
-              <a:rPr lang="en-US" sz="680" b="1" dirty="0">
-                <a:solidFill>
-                  <a:srgbClr val="487052"/>
-                </a:solidFill>
-                <a:latin typeface="Aptos" pitchFamily="34" charset="0"/>
-                <a:ea typeface="Aptos" pitchFamily="34" charset="-122"/>
-                <a:cs typeface="Aptos" pitchFamily="34" charset="-120"/>
-              </a:rPr>
-              <a:t>[18]</a:t>
-            </a:r>
-            <a:endParaRPr lang="en-US" sz="680" dirty="0"/>
-          </a:p>
-        </p:txBody>
-      </p:sp>
-      <p:sp>
-        <p:nvSpPr>
-          <p:cNvPr id="45" name="Text 43"/>
-          <p:cNvSpPr/>
-          <p:nvPr/>
-        </p:nvSpPr>
-        <p:spPr>
-          <a:xfrm>
-            <a:off x="1261872" y="3383280"/>
-            <a:ext cx="1051560" cy="109728"/>
-          </a:xfrm>
-          <a:prstGeom prst="rect">
-            <a:avLst/>
-          </a:prstGeom>
-          <a:noFill/>
-          <a:ln/>
-        </p:spPr>
-        <p:txBody>
-          <a:bodyPr wrap="square" lIns="0" tIns="0" rIns="0" bIns="0" rtlCol="0" anchor="ctr">
-            <a:normAutofit/>
-          </a:bodyPr>
-          <a:lstStyle/>
-          <a:p>
-            <a:pPr indent="0" marL="0">
-              <a:buNone/>
-            </a:pPr>
-            <a:r>
-              <a:rPr lang="en-US" sz="680" dirty="0">
-                <a:solidFill>
-                  <a:srgbClr val="121212"/>
-                </a:solidFill>
-                <a:latin typeface="Microsoft YaHei" pitchFamily="34" charset="0"/>
-                <a:ea typeface="Microsoft YaHei" pitchFamily="34" charset="-122"/>
-                <a:cs typeface="Microsoft YaHei" pitchFamily="34" charset="-120"/>
-              </a:rPr>
-              <a:t>公众号：万润新能源｜万润新</a:t>
-            </a:r>
-            <a:endParaRPr lang="en-US" sz="680" dirty="0"/>
-          </a:p>
-        </p:txBody>
-      </p:sp>
-      <p:sp>
-        <p:nvSpPr>
-          <p:cNvPr id="46" name="Text 44"/>
-          <p:cNvSpPr/>
-          <p:nvPr/>
-        </p:nvSpPr>
-        <p:spPr>
-          <a:xfrm>
-            <a:off x="2487168" y="3383280"/>
-            <a:ext cx="3749040" cy="109728"/>
-          </a:xfrm>
-          <a:prstGeom prst="rect">
-            <a:avLst/>
-          </a:prstGeom>
-          <a:noFill/>
-          <a:ln/>
-        </p:spPr>
-        <p:txBody>
-          <a:bodyPr wrap="square" lIns="0" tIns="0" rIns="0" bIns="0" rtlCol="0" anchor="ctr">
-            <a:normAutofit/>
-          </a:bodyPr>
-          <a:lstStyle/>
-          <a:p>
-            <a:pPr indent="0" marL="0">
-              <a:buNone/>
-            </a:pPr>
-            <a:r>
-              <a:rPr lang="en-US" sz="680" b="1" dirty="0">
-                <a:solidFill>
-                  <a:srgbClr val="121212"/>
-                </a:solidFill>
-                <a:latin typeface="Microsoft YaHei" pitchFamily="34" charset="0"/>
-                <a:ea typeface="Microsoft YaHei" pitchFamily="34" charset="-122"/>
-                <a:cs typeface="Microsoft YaHei" pitchFamily="34" charset="-120"/>
-              </a:rPr>
-              <a:t>公众号：万润新能源｜万润新能荣获【金锂杯】供应链卓越贡献奖</a:t>
-            </a:r>
-            <a:endParaRPr lang="en-US" sz="680" dirty="0"/>
-          </a:p>
-        </p:txBody>
-      </p:sp>
-      <p:sp>
-        <p:nvSpPr>
-          <p:cNvPr id="47" name="Text 45"/>
-          <p:cNvSpPr/>
-          <p:nvPr/>
-        </p:nvSpPr>
-        <p:spPr>
-          <a:xfrm>
-            <a:off x="6510528" y="3383280"/>
-            <a:ext cx="4343400" cy="109728"/>
-          </a:xfrm>
-          <a:prstGeom prst="rect">
-            <a:avLst/>
-          </a:prstGeom>
-          <a:noFill/>
-          <a:ln/>
-        </p:spPr>
-        <p:txBody>
-          <a:bodyPr wrap="square" lIns="0" tIns="0" rIns="0" bIns="0" rtlCol="0" anchor="ctr">
-            <a:normAutofit/>
-          </a:bodyPr>
-          <a:lstStyle/>
-          <a:p>
-            <a:pPr indent="0" marL="0">
-              <a:buNone/>
-            </a:pPr>
-            <a:r>
-              <a:rPr lang="en-US" sz="580" dirty="0">
-                <a:solidFill>
-                  <a:srgbClr val="6D756F"/>
-                </a:solidFill>
-                <a:latin typeface="Aptos" pitchFamily="34" charset="0"/>
-                <a:ea typeface="Aptos" pitchFamily="34" charset="-122"/>
-                <a:cs typeface="Aptos" pitchFamily="34" charset="-120"/>
-              </a:rPr>
-              <a:t>https://mp.weixin.qq.com/s/xfhknGqQjDY7HFw1IM2few</a:t>
-            </a:r>
-            <a:endParaRPr lang="en-US" sz="580" dirty="0"/>
-          </a:p>
-        </p:txBody>
-      </p:sp>
-      <p:sp>
-        <p:nvSpPr>
-          <p:cNvPr id="48" name="Shape 46"/>
-          <p:cNvSpPr/>
-          <p:nvPr/>
-        </p:nvSpPr>
-        <p:spPr>
-          <a:xfrm>
-            <a:off x="658368" y="3621024"/>
-            <a:ext cx="10424160" cy="274320"/>
-          </a:xfrm>
-          <a:prstGeom prst="rect">
-            <a:avLst/>
-          </a:prstGeom>
-          <a:solidFill>
-            <a:srgbClr val="F4FAF6"/>
-          </a:solidFill>
-          <a:ln w="5080">
-            <a:solidFill>
-              <a:srgbClr val="DADADA"/>
-            </a:solidFill>
-            <a:prstDash val="solid"/>
-          </a:ln>
-        </p:spPr>
-      </p:sp>
-      <p:sp>
-        <p:nvSpPr>
-          <p:cNvPr id="49" name="Text 47"/>
-          <p:cNvSpPr/>
-          <p:nvPr/>
-        </p:nvSpPr>
-        <p:spPr>
-          <a:xfrm>
-            <a:off x="749808" y="3694176"/>
-            <a:ext cx="411480" cy="109728"/>
-          </a:xfrm>
-          <a:prstGeom prst="rect">
-            <a:avLst/>
-          </a:prstGeom>
-          <a:noFill/>
-          <a:ln/>
-        </p:spPr>
-        <p:txBody>
-          <a:bodyPr wrap="square" lIns="0" tIns="0" rIns="0" bIns="0" rtlCol="0" anchor="ctr"/>
-          <a:lstStyle/>
-          <a:p>
-            <a:pPr indent="0" marL="0">
-              <a:buNone/>
-            </a:pPr>
-            <a:r>
-              <a:rPr lang="en-US" sz="680" b="1" dirty="0">
-                <a:solidFill>
-                  <a:srgbClr val="487052"/>
-                </a:solidFill>
-                <a:latin typeface="Aptos" pitchFamily="34" charset="0"/>
-                <a:ea typeface="Aptos" pitchFamily="34" charset="-122"/>
-                <a:cs typeface="Aptos" pitchFamily="34" charset="-120"/>
-              </a:rPr>
-              <a:t>[19]</a:t>
-            </a:r>
-            <a:endParaRPr lang="en-US" sz="680" dirty="0"/>
-          </a:p>
-        </p:txBody>
-      </p:sp>
-      <p:sp>
-        <p:nvSpPr>
-          <p:cNvPr id="50" name="Text 48"/>
-          <p:cNvSpPr/>
-          <p:nvPr/>
-        </p:nvSpPr>
-        <p:spPr>
-          <a:xfrm>
-            <a:off x="1261872" y="3694176"/>
-            <a:ext cx="1051560" cy="109728"/>
-          </a:xfrm>
-          <a:prstGeom prst="rect">
-            <a:avLst/>
-          </a:prstGeom>
-          <a:noFill/>
-          <a:ln/>
-        </p:spPr>
-        <p:txBody>
-          <a:bodyPr wrap="square" lIns="0" tIns="0" rIns="0" bIns="0" rtlCol="0" anchor="ctr">
-            <a:normAutofit/>
-          </a:bodyPr>
-          <a:lstStyle/>
-          <a:p>
-            <a:pPr indent="0" marL="0">
-              <a:buNone/>
-            </a:pPr>
-            <a:r>
-              <a:rPr lang="en-US" sz="680" dirty="0">
-                <a:solidFill>
-                  <a:srgbClr val="121212"/>
-                </a:solidFill>
-                <a:latin typeface="Microsoft YaHei" pitchFamily="34" charset="0"/>
-                <a:ea typeface="Microsoft YaHei" pitchFamily="34" charset="-122"/>
-                <a:cs typeface="Microsoft YaHei" pitchFamily="34" charset="-120"/>
-              </a:rPr>
-              <a:t>中国电池网</a:t>
-            </a:r>
-            <a:endParaRPr lang="en-US" sz="680" dirty="0"/>
-          </a:p>
-        </p:txBody>
-      </p:sp>
-      <p:sp>
-        <p:nvSpPr>
-          <p:cNvPr id="51" name="Text 49"/>
-          <p:cNvSpPr/>
-          <p:nvPr/>
-        </p:nvSpPr>
-        <p:spPr>
-          <a:xfrm>
-            <a:off x="2487168" y="3694176"/>
-            <a:ext cx="3749040" cy="109728"/>
-          </a:xfrm>
-          <a:prstGeom prst="rect">
-            <a:avLst/>
-          </a:prstGeom>
-          <a:noFill/>
-          <a:ln/>
-        </p:spPr>
-        <p:txBody>
-          <a:bodyPr wrap="square" lIns="0" tIns="0" rIns="0" bIns="0" rtlCol="0" anchor="ctr">
-            <a:normAutofit/>
-          </a:bodyPr>
-          <a:lstStyle/>
-          <a:p>
-            <a:pPr indent="0" marL="0">
-              <a:buNone/>
-            </a:pPr>
-            <a:r>
-              <a:rPr lang="en-US" sz="680" b="1" dirty="0">
-                <a:solidFill>
-                  <a:srgbClr val="121212"/>
-                </a:solidFill>
-                <a:latin typeface="Microsoft YaHei" pitchFamily="34" charset="0"/>
-                <a:ea typeface="Microsoft YaHei" pitchFamily="34" charset="-122"/>
-                <a:cs typeface="Microsoft YaHei" pitchFamily="34" charset="-120"/>
-              </a:rPr>
-              <a:t>【正极材料周报】磷酸铁锂项目一边扩产一边叫停！富临精工持续加码前驱体项</a:t>
-            </a:r>
-            <a:endParaRPr lang="en-US" sz="680" dirty="0"/>
-          </a:p>
-        </p:txBody>
-      </p:sp>
-      <p:sp>
-        <p:nvSpPr>
-          <p:cNvPr id="52" name="Text 50"/>
-          <p:cNvSpPr/>
-          <p:nvPr/>
-        </p:nvSpPr>
-        <p:spPr>
-          <a:xfrm>
-            <a:off x="6510528" y="3694176"/>
-            <a:ext cx="4343400" cy="109728"/>
-          </a:xfrm>
-          <a:prstGeom prst="rect">
-            <a:avLst/>
-          </a:prstGeom>
-          <a:noFill/>
-          <a:ln/>
-        </p:spPr>
-        <p:txBody>
-          <a:bodyPr wrap="square" lIns="0" tIns="0" rIns="0" bIns="0" rtlCol="0" anchor="ctr">
-            <a:normAutofit/>
-          </a:bodyPr>
-          <a:lstStyle/>
-          <a:p>
-            <a:pPr indent="0" marL="0">
-              <a:buNone/>
-            </a:pPr>
-            <a:r>
-              <a:rPr lang="en-US" sz="580" dirty="0">
-                <a:solidFill>
-                  <a:srgbClr val="6D756F"/>
-                </a:solidFill>
-                <a:latin typeface="Aptos" pitchFamily="34" charset="0"/>
-                <a:ea typeface="Aptos" pitchFamily="34" charset="-122"/>
-                <a:cs typeface="Aptos" pitchFamily="34" charset="-120"/>
-              </a:rPr>
-              <a:t>https://www.itdcw.com/news/dczk/06291563622026.html</a:t>
-            </a:r>
-            <a:endParaRPr lang="en-US" sz="580" dirty="0"/>
-          </a:p>
-        </p:txBody>
-      </p:sp>
-      <p:sp>
-        <p:nvSpPr>
-          <p:cNvPr id="53" name="Shape 51"/>
-          <p:cNvSpPr/>
-          <p:nvPr/>
-        </p:nvSpPr>
-        <p:spPr>
-          <a:xfrm>
-            <a:off x="658368" y="3931920"/>
-            <a:ext cx="10424160" cy="274320"/>
-          </a:xfrm>
-          <a:prstGeom prst="rect">
-            <a:avLst/>
-          </a:prstGeom>
-          <a:solidFill>
-            <a:srgbClr val="FFFFFF"/>
-          </a:solidFill>
-          <a:ln w="5080">
-            <a:solidFill>
-              <a:srgbClr val="DADADA"/>
-            </a:solidFill>
-            <a:prstDash val="solid"/>
-          </a:ln>
-        </p:spPr>
-      </p:sp>
-      <p:sp>
-        <p:nvSpPr>
-          <p:cNvPr id="54" name="Text 52"/>
-          <p:cNvSpPr/>
-          <p:nvPr/>
-        </p:nvSpPr>
-        <p:spPr>
-          <a:xfrm>
-            <a:off x="749808" y="4005072"/>
-            <a:ext cx="411480" cy="109728"/>
-          </a:xfrm>
-          <a:prstGeom prst="rect">
-            <a:avLst/>
-          </a:prstGeom>
-          <a:noFill/>
-          <a:ln/>
-        </p:spPr>
-        <p:txBody>
-          <a:bodyPr wrap="square" lIns="0" tIns="0" rIns="0" bIns="0" rtlCol="0" anchor="ctr"/>
-          <a:lstStyle/>
-          <a:p>
-            <a:pPr indent="0" marL="0">
-              <a:buNone/>
-            </a:pPr>
-            <a:r>
-              <a:rPr lang="en-US" sz="680" b="1" dirty="0">
-                <a:solidFill>
-                  <a:srgbClr val="487052"/>
-                </a:solidFill>
-                <a:latin typeface="Aptos" pitchFamily="34" charset="0"/>
-                <a:ea typeface="Aptos" pitchFamily="34" charset="-122"/>
-                <a:cs typeface="Aptos" pitchFamily="34" charset="-120"/>
-              </a:rPr>
-              <a:t>[20]</a:t>
-            </a:r>
-            <a:endParaRPr lang="en-US" sz="680" dirty="0"/>
-          </a:p>
-        </p:txBody>
-      </p:sp>
-      <p:sp>
-        <p:nvSpPr>
-          <p:cNvPr id="55" name="Text 53"/>
-          <p:cNvSpPr/>
-          <p:nvPr/>
-        </p:nvSpPr>
-        <p:spPr>
-          <a:xfrm>
-            <a:off x="1261872" y="4005072"/>
-            <a:ext cx="1051560" cy="109728"/>
-          </a:xfrm>
-          <a:prstGeom prst="rect">
-            <a:avLst/>
-          </a:prstGeom>
-          <a:noFill/>
-          <a:ln/>
-        </p:spPr>
-        <p:txBody>
-          <a:bodyPr wrap="square" lIns="0" tIns="0" rIns="0" bIns="0" rtlCol="0" anchor="ctr">
-            <a:normAutofit/>
-          </a:bodyPr>
-          <a:lstStyle/>
-          <a:p>
-            <a:pPr indent="0" marL="0">
-              <a:buNone/>
-            </a:pPr>
-            <a:r>
-              <a:rPr lang="en-US" sz="680" dirty="0">
-                <a:solidFill>
-                  <a:srgbClr val="121212"/>
-                </a:solidFill>
-                <a:latin typeface="Microsoft YaHei" pitchFamily="34" charset="0"/>
-                <a:ea typeface="Microsoft YaHei" pitchFamily="34" charset="-122"/>
-                <a:cs typeface="Microsoft YaHei" pitchFamily="34" charset="-120"/>
-              </a:rPr>
-              <a:t>公众号：磷酸铁钠NFPP电</a:t>
-            </a:r>
-            <a:endParaRPr lang="en-US" sz="680" dirty="0"/>
-          </a:p>
-        </p:txBody>
-      </p:sp>
-      <p:sp>
-        <p:nvSpPr>
-          <p:cNvPr id="56" name="Text 54"/>
-          <p:cNvSpPr/>
-          <p:nvPr/>
-        </p:nvSpPr>
-        <p:spPr>
-          <a:xfrm>
-            <a:off x="2487168" y="4005072"/>
-            <a:ext cx="3749040" cy="109728"/>
-          </a:xfrm>
-          <a:prstGeom prst="rect">
-            <a:avLst/>
-          </a:prstGeom>
-          <a:noFill/>
-          <a:ln/>
-        </p:spPr>
-        <p:txBody>
-          <a:bodyPr wrap="square" lIns="0" tIns="0" rIns="0" bIns="0" rtlCol="0" anchor="ctr">
-            <a:normAutofit/>
-          </a:bodyPr>
-          <a:lstStyle/>
-          <a:p>
-            <a:pPr indent="0" marL="0">
-              <a:buNone/>
-            </a:pPr>
-            <a:r>
-              <a:rPr lang="en-US" sz="680" b="1" dirty="0">
-                <a:solidFill>
-                  <a:srgbClr val="121212"/>
-                </a:solidFill>
-                <a:latin typeface="Microsoft YaHei" pitchFamily="34" charset="0"/>
-                <a:ea typeface="Microsoft YaHei" pitchFamily="34" charset="-122"/>
-                <a:cs typeface="Microsoft YaHei" pitchFamily="34" charset="-120"/>
-              </a:rPr>
-              <a:t>公众号：磷酸铁钠NFPP电池产业基地｜璞钠能源闪耀2025高工钠电年会</a:t>
-            </a:r>
-            <a:endParaRPr lang="en-US" sz="680" dirty="0"/>
-          </a:p>
-        </p:txBody>
-      </p:sp>
-      <p:sp>
-        <p:nvSpPr>
-          <p:cNvPr id="57" name="Text 55"/>
-          <p:cNvSpPr/>
-          <p:nvPr/>
-        </p:nvSpPr>
-        <p:spPr>
-          <a:xfrm>
-            <a:off x="6510528" y="4005072"/>
-            <a:ext cx="4343400" cy="109728"/>
-          </a:xfrm>
-          <a:prstGeom prst="rect">
-            <a:avLst/>
-          </a:prstGeom>
-          <a:noFill/>
-          <a:ln/>
-        </p:spPr>
-        <p:txBody>
-          <a:bodyPr wrap="square" lIns="0" tIns="0" rIns="0" bIns="0" rtlCol="0" anchor="ctr">
-            <a:normAutofit/>
-          </a:bodyPr>
-          <a:lstStyle/>
-          <a:p>
-            <a:pPr indent="0" marL="0">
-              <a:buNone/>
-            </a:pPr>
-            <a:r>
-              <a:rPr lang="en-US" sz="580" dirty="0">
-                <a:solidFill>
-                  <a:srgbClr val="6D756F"/>
-                </a:solidFill>
-                <a:latin typeface="Aptos" pitchFamily="34" charset="0"/>
-                <a:ea typeface="Aptos" pitchFamily="34" charset="-122"/>
-                <a:cs typeface="Aptos" pitchFamily="34" charset="-120"/>
-              </a:rPr>
-              <a:t>https://mp.weixin.qq.com/s/Ik41kyjqI-OhXjivwIrggA</a:t>
-            </a:r>
-            <a:endParaRPr lang="en-US" sz="580" dirty="0"/>
-          </a:p>
-        </p:txBody>
-      </p:sp>
-      <p:sp>
-        <p:nvSpPr>
-          <p:cNvPr id="58" name="Shape 56"/>
-          <p:cNvSpPr/>
-          <p:nvPr/>
-        </p:nvSpPr>
-        <p:spPr>
-          <a:xfrm>
-            <a:off x="658368" y="4242816"/>
-            <a:ext cx="10424160" cy="274320"/>
-          </a:xfrm>
-          <a:prstGeom prst="rect">
-            <a:avLst/>
-          </a:prstGeom>
-          <a:solidFill>
-            <a:srgbClr val="F4FAF6"/>
-          </a:solidFill>
-          <a:ln w="5080">
-            <a:solidFill>
-              <a:srgbClr val="DADADA"/>
-            </a:solidFill>
-            <a:prstDash val="solid"/>
-          </a:ln>
-        </p:spPr>
-      </p:sp>
-      <p:sp>
-        <p:nvSpPr>
-          <p:cNvPr id="59" name="Text 57"/>
-          <p:cNvSpPr/>
-          <p:nvPr/>
-        </p:nvSpPr>
-        <p:spPr>
-          <a:xfrm>
-            <a:off x="749808" y="4315968"/>
-            <a:ext cx="411480" cy="109728"/>
-          </a:xfrm>
-          <a:prstGeom prst="rect">
-            <a:avLst/>
-          </a:prstGeom>
-          <a:noFill/>
-          <a:ln/>
-        </p:spPr>
-        <p:txBody>
-          <a:bodyPr wrap="square" lIns="0" tIns="0" rIns="0" bIns="0" rtlCol="0" anchor="ctr"/>
-          <a:lstStyle/>
-          <a:p>
-            <a:pPr indent="0" marL="0">
-              <a:buNone/>
-            </a:pPr>
-            <a:r>
-              <a:rPr lang="en-US" sz="680" b="1" dirty="0">
-                <a:solidFill>
-                  <a:srgbClr val="487052"/>
-                </a:solidFill>
-                <a:latin typeface="Aptos" pitchFamily="34" charset="0"/>
-                <a:ea typeface="Aptos" pitchFamily="34" charset="-122"/>
-                <a:cs typeface="Aptos" pitchFamily="34" charset="-120"/>
-              </a:rPr>
-              <a:t>[21]</a:t>
-            </a:r>
-            <a:endParaRPr lang="en-US" sz="680" dirty="0"/>
-          </a:p>
-        </p:txBody>
-      </p:sp>
-      <p:sp>
-        <p:nvSpPr>
-          <p:cNvPr id="60" name="Text 58"/>
-          <p:cNvSpPr/>
-          <p:nvPr/>
-        </p:nvSpPr>
-        <p:spPr>
-          <a:xfrm>
-            <a:off x="1261872" y="4315968"/>
-            <a:ext cx="1051560" cy="109728"/>
-          </a:xfrm>
-          <a:prstGeom prst="rect">
-            <a:avLst/>
-          </a:prstGeom>
-          <a:noFill/>
-          <a:ln/>
-        </p:spPr>
-        <p:txBody>
-          <a:bodyPr wrap="square" lIns="0" tIns="0" rIns="0" bIns="0" rtlCol="0" anchor="ctr">
-            <a:normAutofit/>
-          </a:bodyPr>
-          <a:lstStyle/>
-          <a:p>
-            <a:pPr indent="0" marL="0">
-              <a:buNone/>
-            </a:pPr>
-            <a:r>
-              <a:rPr lang="en-US" sz="680" dirty="0">
-                <a:solidFill>
-                  <a:srgbClr val="121212"/>
-                </a:solidFill>
-                <a:latin typeface="Microsoft YaHei" pitchFamily="34" charset="0"/>
-                <a:ea typeface="Microsoft YaHei" pitchFamily="34" charset="-122"/>
-                <a:cs typeface="Microsoft YaHei" pitchFamily="34" charset="-120"/>
-              </a:rPr>
-              <a:t>公众号：锂想之路｜深度解读</a:t>
-            </a:r>
-            <a:endParaRPr lang="en-US" sz="680" dirty="0"/>
-          </a:p>
-        </p:txBody>
-      </p:sp>
-      <p:sp>
-        <p:nvSpPr>
-          <p:cNvPr id="61" name="Text 59"/>
-          <p:cNvSpPr/>
-          <p:nvPr/>
-        </p:nvSpPr>
-        <p:spPr>
-          <a:xfrm>
-            <a:off x="2487168" y="4315968"/>
-            <a:ext cx="3749040" cy="109728"/>
-          </a:xfrm>
-          <a:prstGeom prst="rect">
-            <a:avLst/>
-          </a:prstGeom>
-          <a:noFill/>
-          <a:ln/>
-        </p:spPr>
-        <p:txBody>
-          <a:bodyPr wrap="square" lIns="0" tIns="0" rIns="0" bIns="0" rtlCol="0" anchor="ctr">
-            <a:normAutofit/>
-          </a:bodyPr>
-          <a:lstStyle/>
-          <a:p>
-            <a:pPr indent="0" marL="0">
-              <a:buNone/>
-            </a:pPr>
-            <a:r>
-              <a:rPr lang="en-US" sz="680" b="1" dirty="0">
-                <a:solidFill>
-                  <a:srgbClr val="121212"/>
-                </a:solidFill>
-                <a:latin typeface="Microsoft YaHei" pitchFamily="34" charset="0"/>
-                <a:ea typeface="Microsoft YaHei" pitchFamily="34" charset="-122"/>
-                <a:cs typeface="Microsoft YaHei" pitchFamily="34" charset="-120"/>
-              </a:rPr>
-              <a:t>公众号：锂想之路｜深度解读欧盟22国承诺储能装机量增加30-35GW</a:t>
-            </a:r>
-            <a:endParaRPr lang="en-US" sz="680" dirty="0"/>
-          </a:p>
-        </p:txBody>
-      </p:sp>
-      <p:sp>
-        <p:nvSpPr>
-          <p:cNvPr id="62" name="Text 60"/>
-          <p:cNvSpPr/>
-          <p:nvPr/>
-        </p:nvSpPr>
-        <p:spPr>
-          <a:xfrm>
-            <a:off x="6510528" y="4315968"/>
-            <a:ext cx="4343400" cy="109728"/>
-          </a:xfrm>
-          <a:prstGeom prst="rect">
-            <a:avLst/>
-          </a:prstGeom>
-          <a:noFill/>
-          <a:ln/>
-        </p:spPr>
-        <p:txBody>
-          <a:bodyPr wrap="square" lIns="0" tIns="0" rIns="0" bIns="0" rtlCol="0" anchor="ctr">
-            <a:normAutofit/>
-          </a:bodyPr>
-          <a:lstStyle/>
-          <a:p>
-            <a:pPr indent="0" marL="0">
-              <a:buNone/>
-            </a:pPr>
-            <a:r>
-              <a:rPr lang="en-US" sz="580" dirty="0">
-                <a:solidFill>
-                  <a:srgbClr val="6D756F"/>
-                </a:solidFill>
-                <a:latin typeface="Aptos" pitchFamily="34" charset="0"/>
-                <a:ea typeface="Aptos" pitchFamily="34" charset="-122"/>
-                <a:cs typeface="Aptos" pitchFamily="34" charset="-120"/>
-              </a:rPr>
-              <a:t>https://mp.weixin.qq.com/s/kZkcCy5ObmDUy-A12QQXqw</a:t>
-            </a:r>
-            <a:endParaRPr lang="en-US" sz="580" dirty="0"/>
-          </a:p>
-        </p:txBody>
-      </p:sp>
-      <p:sp>
-        <p:nvSpPr>
-          <p:cNvPr id="63" name="Shape 61"/>
-          <p:cNvSpPr/>
-          <p:nvPr/>
-        </p:nvSpPr>
-        <p:spPr>
-          <a:xfrm>
-            <a:off x="658368" y="4553712"/>
-            <a:ext cx="10424160" cy="274320"/>
-          </a:xfrm>
-          <a:prstGeom prst="rect">
-            <a:avLst/>
-          </a:prstGeom>
-          <a:solidFill>
-            <a:srgbClr val="FFFFFF"/>
-          </a:solidFill>
-          <a:ln w="5080">
-            <a:solidFill>
-              <a:srgbClr val="DADADA"/>
-            </a:solidFill>
-            <a:prstDash val="solid"/>
-          </a:ln>
-        </p:spPr>
-      </p:sp>
-      <p:sp>
-        <p:nvSpPr>
-          <p:cNvPr id="64" name="Text 62"/>
-          <p:cNvSpPr/>
-          <p:nvPr/>
-        </p:nvSpPr>
-        <p:spPr>
-          <a:xfrm>
-            <a:off x="749808" y="4626864"/>
-            <a:ext cx="411480" cy="109728"/>
-          </a:xfrm>
-          <a:prstGeom prst="rect">
-            <a:avLst/>
-          </a:prstGeom>
-          <a:noFill/>
-          <a:ln/>
-        </p:spPr>
-        <p:txBody>
-          <a:bodyPr wrap="square" lIns="0" tIns="0" rIns="0" bIns="0" rtlCol="0" anchor="ctr"/>
-          <a:lstStyle/>
-          <a:p>
-            <a:pPr indent="0" marL="0">
-              <a:buNone/>
-            </a:pPr>
-            <a:r>
-              <a:rPr lang="en-US" sz="680" b="1" dirty="0">
-                <a:solidFill>
-                  <a:srgbClr val="487052"/>
-                </a:solidFill>
-                <a:latin typeface="Aptos" pitchFamily="34" charset="0"/>
-                <a:ea typeface="Aptos" pitchFamily="34" charset="-122"/>
-                <a:cs typeface="Aptos" pitchFamily="34" charset="-120"/>
-              </a:rPr>
-              <a:t>[22]</a:t>
-            </a:r>
-            <a:endParaRPr lang="en-US" sz="680" dirty="0"/>
-          </a:p>
-        </p:txBody>
-      </p:sp>
-      <p:sp>
-        <p:nvSpPr>
-          <p:cNvPr id="65" name="Text 63"/>
-          <p:cNvSpPr/>
-          <p:nvPr/>
-        </p:nvSpPr>
-        <p:spPr>
-          <a:xfrm>
-            <a:off x="1261872" y="4626864"/>
-            <a:ext cx="1051560" cy="109728"/>
-          </a:xfrm>
-          <a:prstGeom prst="rect">
-            <a:avLst/>
-          </a:prstGeom>
-          <a:noFill/>
-          <a:ln/>
-        </p:spPr>
-        <p:txBody>
-          <a:bodyPr wrap="square" lIns="0" tIns="0" rIns="0" bIns="0" rtlCol="0" anchor="ctr">
-            <a:normAutofit/>
-          </a:bodyPr>
-          <a:lstStyle/>
-          <a:p>
-            <a:pPr indent="0" marL="0">
-              <a:buNone/>
-            </a:pPr>
-            <a:r>
-              <a:rPr lang="en-US" sz="680" dirty="0">
-                <a:solidFill>
-                  <a:srgbClr val="121212"/>
-                </a:solidFill>
-                <a:latin typeface="Microsoft YaHei" pitchFamily="34" charset="0"/>
-                <a:ea typeface="Microsoft YaHei" pitchFamily="34" charset="-122"/>
-                <a:cs typeface="Microsoft YaHei" pitchFamily="34" charset="-120"/>
-              </a:rPr>
-              <a:t>中国电池网</a:t>
-            </a:r>
-            <a:endParaRPr lang="en-US" sz="680" dirty="0"/>
-          </a:p>
-        </p:txBody>
-      </p:sp>
-      <p:sp>
-        <p:nvSpPr>
-          <p:cNvPr id="66" name="Text 64"/>
-          <p:cNvSpPr/>
-          <p:nvPr/>
-        </p:nvSpPr>
-        <p:spPr>
-          <a:xfrm>
-            <a:off x="2487168" y="4626864"/>
-            <a:ext cx="3749040" cy="109728"/>
-          </a:xfrm>
-          <a:prstGeom prst="rect">
-            <a:avLst/>
-          </a:prstGeom>
-          <a:noFill/>
-          <a:ln/>
-        </p:spPr>
-        <p:txBody>
-          <a:bodyPr wrap="square" lIns="0" tIns="0" rIns="0" bIns="0" rtlCol="0" anchor="ctr">
-            <a:normAutofit/>
-          </a:bodyPr>
-          <a:lstStyle/>
-          <a:p>
-            <a:pPr indent="0" marL="0">
-              <a:buNone/>
-            </a:pPr>
-            <a:r>
-              <a:rPr lang="en-US" sz="680" b="1" dirty="0">
-                <a:solidFill>
-                  <a:srgbClr val="121212"/>
-                </a:solidFill>
-                <a:latin typeface="Microsoft YaHei" pitchFamily="34" charset="0"/>
-                <a:ea typeface="Microsoft YaHei" pitchFamily="34" charset="-122"/>
-                <a:cs typeface="Microsoft YaHei" pitchFamily="34" charset="-120"/>
-              </a:rPr>
-              <a:t>磷酸铁锂动力型电池与磷酸铁锂储能型电池的区别分析_电池网</a:t>
-            </a:r>
-            <a:endParaRPr lang="en-US" sz="680" dirty="0"/>
-          </a:p>
-        </p:txBody>
-      </p:sp>
-      <p:sp>
-        <p:nvSpPr>
-          <p:cNvPr id="67" name="Text 65"/>
-          <p:cNvSpPr/>
-          <p:nvPr/>
-        </p:nvSpPr>
-        <p:spPr>
-          <a:xfrm>
-            <a:off x="6510528" y="4626864"/>
-            <a:ext cx="4343400" cy="109728"/>
-          </a:xfrm>
-          <a:prstGeom prst="rect">
-            <a:avLst/>
-          </a:prstGeom>
-          <a:noFill/>
-          <a:ln/>
-        </p:spPr>
-        <p:txBody>
-          <a:bodyPr wrap="square" lIns="0" tIns="0" rIns="0" bIns="0" rtlCol="0" anchor="ctr">
-            <a:normAutofit/>
-          </a:bodyPr>
-          <a:lstStyle/>
-          <a:p>
-            <a:pPr indent="0" marL="0">
-              <a:buNone/>
-            </a:pPr>
-            <a:r>
-              <a:rPr lang="en-US" sz="580" dirty="0">
-                <a:solidFill>
-                  <a:srgbClr val="6D756F"/>
-                </a:solidFill>
-                <a:latin typeface="Aptos" pitchFamily="34" charset="0"/>
-                <a:ea typeface="Aptos" pitchFamily="34" charset="-122"/>
-                <a:cs typeface="Aptos" pitchFamily="34" charset="-120"/>
-              </a:rPr>
-              <a:t>https://www.itdcw.com/news/dianchibaike/06301359262023.html</a:t>
-            </a:r>
-            <a:endParaRPr lang="en-US" sz="580" dirty="0"/>
-          </a:p>
-        </p:txBody>
-      </p:sp>
-      <p:sp>
-        <p:nvSpPr>
-          <p:cNvPr id="68" name="Shape 66"/>
-          <p:cNvSpPr/>
-          <p:nvPr/>
-        </p:nvSpPr>
-        <p:spPr>
-          <a:xfrm>
-            <a:off x="658368" y="4864608"/>
-            <a:ext cx="10424160" cy="274320"/>
-          </a:xfrm>
-          <a:prstGeom prst="rect">
-            <a:avLst/>
-          </a:prstGeom>
-          <a:solidFill>
-            <a:srgbClr val="F4FAF6"/>
-          </a:solidFill>
-          <a:ln w="5080">
-            <a:solidFill>
-              <a:srgbClr val="DADADA"/>
-            </a:solidFill>
-            <a:prstDash val="solid"/>
-          </a:ln>
-        </p:spPr>
-      </p:sp>
-      <p:sp>
-        <p:nvSpPr>
-          <p:cNvPr id="69" name="Text 67"/>
-          <p:cNvSpPr/>
-          <p:nvPr/>
-        </p:nvSpPr>
-        <p:spPr>
-          <a:xfrm>
-            <a:off x="749808" y="4937760"/>
-            <a:ext cx="411480" cy="109728"/>
-          </a:xfrm>
-          <a:prstGeom prst="rect">
-            <a:avLst/>
-          </a:prstGeom>
-          <a:noFill/>
-          <a:ln/>
-        </p:spPr>
-        <p:txBody>
-          <a:bodyPr wrap="square" lIns="0" tIns="0" rIns="0" bIns="0" rtlCol="0" anchor="ctr"/>
-          <a:lstStyle/>
-          <a:p>
-            <a:pPr indent="0" marL="0">
-              <a:buNone/>
-            </a:pPr>
-            <a:r>
-              <a:rPr lang="en-US" sz="680" b="1" dirty="0">
-                <a:solidFill>
-                  <a:srgbClr val="487052"/>
-                </a:solidFill>
-                <a:latin typeface="Aptos" pitchFamily="34" charset="0"/>
-                <a:ea typeface="Aptos" pitchFamily="34" charset="-122"/>
-                <a:cs typeface="Aptos" pitchFamily="34" charset="-120"/>
-              </a:rPr>
-              <a:t>[23]</a:t>
-            </a:r>
-            <a:endParaRPr lang="en-US" sz="680" dirty="0"/>
-          </a:p>
-        </p:txBody>
-      </p:sp>
-      <p:sp>
-        <p:nvSpPr>
-          <p:cNvPr id="70" name="Text 68"/>
-          <p:cNvSpPr/>
-          <p:nvPr/>
-        </p:nvSpPr>
-        <p:spPr>
-          <a:xfrm>
-            <a:off x="1261872" y="4937760"/>
-            <a:ext cx="1051560" cy="109728"/>
-          </a:xfrm>
-          <a:prstGeom prst="rect">
-            <a:avLst/>
-          </a:prstGeom>
-          <a:noFill/>
-          <a:ln/>
-        </p:spPr>
-        <p:txBody>
-          <a:bodyPr wrap="square" lIns="0" tIns="0" rIns="0" bIns="0" rtlCol="0" anchor="ctr">
-            <a:normAutofit/>
-          </a:bodyPr>
-          <a:lstStyle/>
-          <a:p>
-            <a:pPr indent="0" marL="0">
-              <a:buNone/>
-            </a:pPr>
-            <a:r>
-              <a:rPr lang="en-US" sz="680" dirty="0">
-                <a:solidFill>
-                  <a:srgbClr val="121212"/>
-                </a:solidFill>
-                <a:latin typeface="Microsoft YaHei" pitchFamily="34" charset="0"/>
-                <a:ea typeface="Microsoft YaHei" pitchFamily="34" charset="-122"/>
-                <a:cs typeface="Microsoft YaHei" pitchFamily="34" charset="-120"/>
-              </a:rPr>
-              <a:t>鑫椤锂电</a:t>
-            </a:r>
-            <a:endParaRPr lang="en-US" sz="680" dirty="0"/>
-          </a:p>
-        </p:txBody>
-      </p:sp>
-      <p:sp>
-        <p:nvSpPr>
-          <p:cNvPr id="71" name="Text 69"/>
-          <p:cNvSpPr/>
-          <p:nvPr/>
-        </p:nvSpPr>
-        <p:spPr>
-          <a:xfrm>
-            <a:off x="2487168" y="4937760"/>
-            <a:ext cx="3749040" cy="109728"/>
-          </a:xfrm>
-          <a:prstGeom prst="rect">
-            <a:avLst/>
-          </a:prstGeom>
-          <a:noFill/>
-          <a:ln/>
-        </p:spPr>
-        <p:txBody>
-          <a:bodyPr wrap="square" lIns="0" tIns="0" rIns="0" bIns="0" rtlCol="0" anchor="ctr">
-            <a:normAutofit/>
-          </a:bodyPr>
-          <a:lstStyle/>
-          <a:p>
-            <a:pPr indent="0" marL="0">
-              <a:buNone/>
-            </a:pPr>
-            <a:r>
-              <a:rPr lang="en-US" sz="680" b="1" dirty="0">
-                <a:solidFill>
-                  <a:srgbClr val="121212"/>
-                </a:solidFill>
-                <a:latin typeface="Microsoft YaHei" pitchFamily="34" charset="0"/>
-                <a:ea typeface="Microsoft YaHei" pitchFamily="34" charset="-122"/>
-                <a:cs typeface="Microsoft YaHei" pitchFamily="34" charset="-120"/>
-              </a:rPr>
-              <a:t>鑫椤锂电</a:t>
-            </a:r>
-            <a:endParaRPr lang="en-US" sz="680" dirty="0"/>
-          </a:p>
-        </p:txBody>
-      </p:sp>
-      <p:sp>
-        <p:nvSpPr>
-          <p:cNvPr id="72" name="Text 70"/>
-          <p:cNvSpPr/>
-          <p:nvPr/>
-        </p:nvSpPr>
-        <p:spPr>
-          <a:xfrm>
-            <a:off x="6510528" y="4937760"/>
-            <a:ext cx="4343400" cy="109728"/>
-          </a:xfrm>
-          <a:prstGeom prst="rect">
-            <a:avLst/>
-          </a:prstGeom>
-          <a:noFill/>
-          <a:ln/>
-        </p:spPr>
-        <p:txBody>
-          <a:bodyPr wrap="square" lIns="0" tIns="0" rIns="0" bIns="0" rtlCol="0" anchor="ctr">
-            <a:normAutofit/>
-          </a:bodyPr>
-          <a:lstStyle/>
-          <a:p>
-            <a:pPr indent="0" marL="0">
-              <a:buNone/>
-            </a:pPr>
-            <a:r>
-              <a:rPr lang="en-US" sz="580" dirty="0">
-                <a:solidFill>
-                  <a:srgbClr val="6D756F"/>
-                </a:solidFill>
-                <a:latin typeface="Aptos" pitchFamily="34" charset="0"/>
-                <a:ea typeface="Aptos" pitchFamily="34" charset="-122"/>
-                <a:cs typeface="Aptos" pitchFamily="34" charset="-120"/>
-              </a:rPr>
-              <a:t>https://www.icbattery.com/</a:t>
-            </a:r>
-            <a:endParaRPr lang="en-US" sz="580" dirty="0"/>
-          </a:p>
-        </p:txBody>
-      </p:sp>
-      <p:sp>
-        <p:nvSpPr>
-          <p:cNvPr id="73" name="Shape 71"/>
-          <p:cNvSpPr/>
-          <p:nvPr/>
-        </p:nvSpPr>
-        <p:spPr>
-          <a:xfrm>
-            <a:off x="658368" y="5175504"/>
-            <a:ext cx="10424160" cy="274320"/>
-          </a:xfrm>
-          <a:prstGeom prst="rect">
-            <a:avLst/>
-          </a:prstGeom>
-          <a:solidFill>
-            <a:srgbClr val="FFFFFF"/>
-          </a:solidFill>
-          <a:ln w="5080">
-            <a:solidFill>
-              <a:srgbClr val="DADADA"/>
-            </a:solidFill>
-            <a:prstDash val="solid"/>
-          </a:ln>
-        </p:spPr>
-      </p:sp>
-      <p:sp>
-        <p:nvSpPr>
-          <p:cNvPr id="74" name="Text 72"/>
-          <p:cNvSpPr/>
-          <p:nvPr/>
-        </p:nvSpPr>
-        <p:spPr>
-          <a:xfrm>
-            <a:off x="749808" y="5248656"/>
-            <a:ext cx="411480" cy="109728"/>
-          </a:xfrm>
-          <a:prstGeom prst="rect">
-            <a:avLst/>
-          </a:prstGeom>
-          <a:noFill/>
-          <a:ln/>
-        </p:spPr>
-        <p:txBody>
-          <a:bodyPr wrap="square" lIns="0" tIns="0" rIns="0" bIns="0" rtlCol="0" anchor="ctr"/>
-          <a:lstStyle/>
-          <a:p>
-            <a:pPr indent="0" marL="0">
-              <a:buNone/>
-            </a:pPr>
-            <a:r>
-              <a:rPr lang="en-US" sz="680" b="1" dirty="0">
-                <a:solidFill>
-                  <a:srgbClr val="487052"/>
-                </a:solidFill>
-                <a:latin typeface="Aptos" pitchFamily="34" charset="0"/>
-                <a:ea typeface="Aptos" pitchFamily="34" charset="-122"/>
-                <a:cs typeface="Aptos" pitchFamily="34" charset="-120"/>
-              </a:rPr>
-              <a:t>[24]</a:t>
-            </a:r>
-            <a:endParaRPr lang="en-US" sz="680" dirty="0"/>
-          </a:p>
-        </p:txBody>
-      </p:sp>
-      <p:sp>
-        <p:nvSpPr>
-          <p:cNvPr id="75" name="Text 73"/>
-          <p:cNvSpPr/>
-          <p:nvPr/>
-        </p:nvSpPr>
-        <p:spPr>
-          <a:xfrm>
-            <a:off x="1261872" y="5248656"/>
-            <a:ext cx="1051560" cy="109728"/>
-          </a:xfrm>
-          <a:prstGeom prst="rect">
-            <a:avLst/>
-          </a:prstGeom>
-          <a:noFill/>
-          <a:ln/>
-        </p:spPr>
-        <p:txBody>
-          <a:bodyPr wrap="square" lIns="0" tIns="0" rIns="0" bIns="0" rtlCol="0" anchor="ctr">
-            <a:normAutofit/>
-          </a:bodyPr>
-          <a:lstStyle/>
-          <a:p>
-            <a:pPr indent="0" marL="0">
-              <a:buNone/>
-            </a:pPr>
-            <a:r>
-              <a:rPr lang="en-US" sz="680" dirty="0">
-                <a:solidFill>
-                  <a:srgbClr val="121212"/>
-                </a:solidFill>
-                <a:latin typeface="Microsoft YaHei" pitchFamily="34" charset="0"/>
-                <a:ea typeface="Microsoft YaHei" pitchFamily="34" charset="-122"/>
-                <a:cs typeface="Microsoft YaHei" pitchFamily="34" charset="-120"/>
-              </a:rPr>
-              <a:t>高工锂电</a:t>
-            </a:r>
-            <a:endParaRPr lang="en-US" sz="680" dirty="0"/>
-          </a:p>
-        </p:txBody>
-      </p:sp>
-      <p:sp>
-        <p:nvSpPr>
-          <p:cNvPr id="76" name="Text 74"/>
-          <p:cNvSpPr/>
-          <p:nvPr/>
-        </p:nvSpPr>
-        <p:spPr>
-          <a:xfrm>
-            <a:off x="2487168" y="5248656"/>
-            <a:ext cx="3749040" cy="109728"/>
-          </a:xfrm>
-          <a:prstGeom prst="rect">
-            <a:avLst/>
-          </a:prstGeom>
-          <a:noFill/>
-          <a:ln/>
-        </p:spPr>
-        <p:txBody>
-          <a:bodyPr wrap="square" lIns="0" tIns="0" rIns="0" bIns="0" rtlCol="0" anchor="ctr">
-            <a:normAutofit/>
-          </a:bodyPr>
-          <a:lstStyle/>
-          <a:p>
-            <a:pPr indent="0" marL="0">
-              <a:buNone/>
-            </a:pPr>
-            <a:r>
-              <a:rPr lang="en-US" sz="680" b="1" dirty="0">
-                <a:solidFill>
-                  <a:srgbClr val="121212"/>
-                </a:solidFill>
-                <a:latin typeface="Microsoft YaHei" pitchFamily="34" charset="0"/>
-                <a:ea typeface="Microsoft YaHei" pitchFamily="34" charset="-122"/>
-                <a:cs typeface="Microsoft YaHei" pitchFamily="34" charset="-120"/>
-              </a:rPr>
-              <a:t>高工锂电</a:t>
-            </a:r>
-            <a:endParaRPr lang="en-US" sz="680" dirty="0"/>
-          </a:p>
-        </p:txBody>
-      </p:sp>
-      <p:sp>
-        <p:nvSpPr>
-          <p:cNvPr id="77" name="Text 75"/>
-          <p:cNvSpPr/>
-          <p:nvPr/>
-        </p:nvSpPr>
-        <p:spPr>
-          <a:xfrm>
-            <a:off x="6510528" y="5248656"/>
-            <a:ext cx="4343400" cy="109728"/>
-          </a:xfrm>
-          <a:prstGeom prst="rect">
-            <a:avLst/>
-          </a:prstGeom>
-          <a:noFill/>
-          <a:ln/>
-        </p:spPr>
-        <p:txBody>
-          <a:bodyPr wrap="square" lIns="0" tIns="0" rIns="0" bIns="0" rtlCol="0" anchor="ctr">
-            <a:normAutofit/>
-          </a:bodyPr>
-          <a:lstStyle/>
-          <a:p>
-            <a:pPr indent="0" marL="0">
-              <a:buNone/>
-            </a:pPr>
-            <a:r>
-              <a:rPr lang="en-US" sz="580" dirty="0">
-                <a:solidFill>
-                  <a:srgbClr val="6D756F"/>
-                </a:solidFill>
-                <a:latin typeface="Aptos" pitchFamily="34" charset="0"/>
-                <a:ea typeface="Aptos" pitchFamily="34" charset="-122"/>
-                <a:cs typeface="Aptos" pitchFamily="34" charset="-120"/>
-              </a:rPr>
-              <a:t>https://www.gg-lb.com/</a:t>
+              <a:t>https://mp.weixin.qq.com/s/G9lBBEvE0zdU_xLxQjT2Pw</a:t>
             </a:r>
             <a:endParaRPr lang="en-US" sz="580" dirty="0"/>
           </a:p>
